--- a/planering/biologi-omrade1/biologi-1-1-undersoka-systematiskt.pptx
+++ b/planering/biologi-omrade1/biologi-1-1-undersoka-systematiskt.pptx
@@ -24,10 +24,9 @@
     <p:sldId id="272" r:id="rId18"/>
     <p:sldId id="273" r:id="rId19"/>
     <p:sldId id="274" r:id="rId20"/>
-    <p:sldId id="275" r:id="rId21"/>
   </p:sldIdLst>
   <p:notesMasterIdLst>
-    <p:notesMasterId r:id="rId22"/>
+    <p:notesMasterId r:id="rId21"/>
   </p:notesMasterIdLst>
   <p:sldSz cx="12192000" cy="6858000"/>
   <p:notesSz cx="6858000" cy="12192000"/>
@@ -126,12 +125,12 @@
   <p:extLst>
     <p:ext uri="{521415D9-36F7-43E2-AB2F-B90AF26B5E84}">
       <p14:sectionLst xmlns:p14="http://schemas.microsoft.com/office/powerpoint/2010/main">
-        <p14:section name="Start" id="{f9d39e13-9987-33f0-3268-86036618eed0}">
+        <p14:section name="Start" id="{da025d6b-360a-00e4-9f30-4a38ad01a873}">
           <p14:sldIdLst>
             <p14:sldId id="256"/>
           </p14:sldIdLst>
         </p14:section>
-        <p14:section name="1.1.1 Från fråga till plan" id="{aeb50309-5b4a-fef1-7473-33c60048943e}">
+        <p14:section name="1.1.1 Från fråga till plan" id="{ee0f048c-be12-c50b-05de-146bd26d9a4e}">
           <p14:sldIdLst>
             <p14:sldId id="257"/>
             <p14:sldId id="258"/>
@@ -139,31 +138,30 @@
             <p14:sldId id="260"/>
             <p14:sldId id="261"/>
             <p14:sldId id="262"/>
-            <p14:sldId id="263"/>
           </p14:sldIdLst>
         </p14:section>
-        <p14:section name="1.1.2 Dokumentera" id="{f57dc9d4-1a3a-61fd-b43a-27eaf20dabf4}">
+        <p14:section name="1.1.2 Dokumentera" id="{78bb6a04-a91d-d713-4a9e-1cead7fd9dd8}">
           <p14:sldIdLst>
+            <p14:sldId id="263"/>
             <p14:sldId id="264"/>
             <p14:sldId id="265"/>
             <p14:sldId id="266"/>
             <p14:sldId id="267"/>
-            <p14:sldId id="268"/>
           </p14:sldIdLst>
         </p14:section>
-        <p14:section name="1.1.3 Värdera" id="{ed8047d7-f969-ca64-557a-0bd5adf0e166}">
+        <p14:section name="1.1.3 Värdera" id="{953a3836-ec6a-f4fa-20a8-226a865a3cb9}">
           <p14:sldIdLst>
+            <p14:sldId id="268"/>
             <p14:sldId id="269"/>
             <p14:sldId id="270"/>
             <p14:sldId id="271"/>
-            <p14:sldId id="272"/>
           </p14:sldIdLst>
         </p14:section>
-        <p14:section name="Labb 1.1 Reaktionstid" id="{55045e08-3d4c-d104-ef2b-c13e75091b7d}">
+        <p14:section name="Labb 1.1 Reaktionstid" id="{fbb8e4b3-d7aa-601d-07a1-04c3cbd473cf}">
           <p14:sldIdLst>
+            <p14:sldId id="272"/>
             <p14:sldId id="273"/>
             <p14:sldId id="274"/>
-            <p14:sldId id="275"/>
           </p14:sldIdLst>
         </p14:section>
       </p14:sectionLst>
@@ -1147,7 +1145,7 @@
           <a:p>
             <a:r>
               <a:rPr lang="en-US" dirty="0"/>
-              <a:t>Exempelvärden. Räkna medelvärde av upprepade mätningar, t.ex. 12, 14 och 13 mm.</a:t>
+              <a:t>Visa att samma data kan visas som linje (över tid) eller staplar (dag 7). Diskutera vilket som passar frågan.</a:t>
             </a:r>
             <a:endParaRPr lang="en-US" dirty="0"/>
           </a:p>
@@ -1235,7 +1233,7 @@
           <a:p>
             <a:r>
               <a:rPr lang="en-US" dirty="0"/>
-              <a:t>Visa att samma data kan visas som linje (över tid) eller staplar (dag 7). Diskutera vilket som passar frågan.</a:t>
+              <a:t>Rapporten ska vara så tydlig att någon annan kan göra om försöket.</a:t>
             </a:r>
             <a:endParaRPr lang="en-US" dirty="0"/>
           </a:p>
@@ -1323,7 +1321,7 @@
           <a:p>
             <a:r>
               <a:rPr lang="en-US" dirty="0"/>
-              <a:t>Rapporten ska vara så tydlig att någon annan kan göra om försöket.</a:t>
+              <a:t>Låt eleverna svara i par eller på whiteboard. Facit finns i lärarversionen av kapitlet.</a:t>
             </a:r>
             <a:endParaRPr lang="en-US" dirty="0"/>
           </a:p>
@@ -1411,7 +1409,7 @@
           <a:p>
             <a:r>
               <a:rPr lang="en-US" dirty="0"/>
-              <a:t>Låt eleverna svara i par eller på whiteboard. Facit finns i lärarversionen av kapitlet.</a:t>
+              <a:t>Ca 50 min.</a:t>
             </a:r>
             <a:endParaRPr lang="en-US" dirty="0"/>
           </a:p>
@@ -1499,7 +1497,7 @@
           <a:p>
             <a:r>
               <a:rPr lang="en-US" dirty="0"/>
-              <a:t>Ca 50 min.</a:t>
+              <a:t>Skillnaden mellan slump och systematiskt fel är en C-nivå-poäng.</a:t>
             </a:r>
             <a:endParaRPr lang="en-US" dirty="0"/>
           </a:p>
@@ -1587,7 +1585,7 @@
           <a:p>
             <a:r>
               <a:rPr lang="en-US" dirty="0"/>
-              <a:t>Skillnaden mellan slump och systematiskt fel är en C-nivå-poäng.</a:t>
+              <a:t>Ellas slutsats: krasse i mörker blir högre men svagare. Hon kan inte säga att alla växter gör så.</a:t>
             </a:r>
             <a:endParaRPr lang="en-US" dirty="0"/>
           </a:p>
@@ -1675,7 +1673,7 @@
           <a:p>
             <a:r>
               <a:rPr lang="en-US" dirty="0"/>
-              <a:t>Ellas slutsats: krasse i mörker blir högre men svagare. Hon kan inte säga att alla växter gör så.</a:t>
+              <a:t>Låt eleverna svara i par eller på whiteboard. Facit finns i lärarversionen av kapitlet.</a:t>
             </a:r>
             <a:endParaRPr lang="en-US" dirty="0"/>
           </a:p>
@@ -1763,7 +1761,7 @@
           <a:p>
             <a:r>
               <a:rPr lang="en-US" dirty="0"/>
-              <a:t>Låt eleverna svara i par eller på whiteboard. Facit finns i lärarversionen av kapitlet.</a:t>
+              <a:t>Material: linjal 30 cm, penna, papper. Förväntat: ca 15–25 cm, alltså 0,17–0,23 s. Redovisa klassens värden, inte personliga.</a:t>
             </a:r>
             <a:endParaRPr lang="en-US" dirty="0"/>
           </a:p>
@@ -1851,7 +1849,7 @@
           <a:p>
             <a:r>
               <a:rPr lang="en-US" dirty="0"/>
-              <a:t>Material: linjal 30 cm, penna, papper. Förväntat: ca 15–25 cm, alltså 0,17–0,23 s. Redovisa klassens värden, inte personliga.</a:t>
+              <a:t>Vanliga fel: eleven ser kompisens hand, linjalen hålls sned, noll ligger inte vid fingrarna.</a:t>
             </a:r>
             <a:endParaRPr lang="en-US" dirty="0"/>
           </a:p>
@@ -1939,7 +1937,7 @@
           <a:p>
             <a:r>
               <a:rPr lang="en-US" dirty="0"/>
-              <a:t>Vanliga fel: eleven ser kompisens hand, linjalen hålls sned, noll ligger inte vid fingrarna.</a:t>
+              <a:t>Bonuslabb finns i lärarversionen av kapitlet: Hjälper musik minnet?</a:t>
             </a:r>
             <a:endParaRPr lang="en-US" dirty="0"/>
           </a:p>
@@ -2069,94 +2067,6 @@
 </p:notes>
 </file>
 
-<file path=ppt/notesSlides/notesSlide20.xml><?xml version="1.0" encoding="utf-8"?>
-<p:notes xmlns:a="http://schemas.openxmlformats.org/drawingml/2006/main" xmlns:r="http://schemas.openxmlformats.org/officeDocument/2006/relationships" xmlns:p="http://schemas.openxmlformats.org/presentationml/2006/main">
-  <p:cSld>
-    <p:spTree>
-      <p:nvGrpSpPr>
-        <p:cNvPr id="1" name=""/>
-        <p:cNvGrpSpPr/>
-        <p:nvPr/>
-      </p:nvGrpSpPr>
-      <p:grpSpPr>
-        <a:xfrm>
-          <a:off x="0" y="0"/>
-          <a:ext cx="0" cy="0"/>
-          <a:chOff x="0" y="0"/>
-          <a:chExt cx="0" cy="0"/>
-        </a:xfrm>
-      </p:grpSpPr>
-      <p:sp>
-        <p:nvSpPr>
-          <p:cNvPr id="2" name="Slide Image Placeholder 1"/>
-          <p:cNvSpPr>
-            <a:spLocks noGrp="1" noRot="1" noChangeAspect="1"/>
-          </p:cNvSpPr>
-          <p:nvPr>
-            <p:ph type="sldImg"/>
-          </p:nvPr>
-        </p:nvSpPr>
-        <p:spPr/>
-      </p:sp>
-      <p:sp>
-        <p:nvSpPr>
-          <p:cNvPr id="3" name="Notes Placeholder 2"/>
-          <p:cNvSpPr>
-            <a:spLocks noGrp="1"/>
-          </p:cNvSpPr>
-          <p:nvPr>
-            <p:ph type="body" idx="1"/>
-          </p:nvPr>
-        </p:nvSpPr>
-        <p:spPr/>
-        <p:txBody>
-          <a:bodyPr/>
-          <a:lstStyle/>
-          <a:p>
-            <a:r>
-              <a:rPr lang="en-US" dirty="0"/>
-              <a:t>Bonuslabb finns i lärarversionen av kapitlet: Hjälper musik minnet?</a:t>
-            </a:r>
-            <a:endParaRPr lang="en-US" dirty="0"/>
-          </a:p>
-        </p:txBody>
-      </p:sp>
-      <p:sp>
-        <p:nvSpPr>
-          <p:cNvPr id="4" name="Slide Number Placeholder 3"/>
-          <p:cNvSpPr>
-            <a:spLocks noGrp="1"/>
-          </p:cNvSpPr>
-          <p:nvPr>
-            <p:ph type="sldNum" sz="quarter" idx="10"/>
-          </p:nvPr>
-        </p:nvSpPr>
-        <p:spPr/>
-        <p:txBody>
-          <a:bodyPr/>
-          <a:lstStyle/>
-          <a:p>
-            <a:fld id="{F7021451-1387-4CA6-816F-3879F97B5CBC}" type="slidenum">
-              <a:rPr lang="en-US"/>
-              <a:t>20</a:t>
-            </a:fld>
-            <a:endParaRPr lang="en-US"/>
-          </a:p>
-        </p:txBody>
-      </p:sp>
-    </p:spTree>
-    <p:extLst>
-      <p:ext uri="{BB962C8B-B14F-4D97-AF65-F5344CB8AC3E}">
-        <p14:creationId xmlns:p14="http://schemas.microsoft.com/office/powerpoint/2010/main" val="1024086991"/>
-      </p:ext>
-    </p:extLst>
-  </p:cSld>
-  <p:clrMapOvr>
-    <a:masterClrMapping/>
-  </p:clrMapOvr>
-</p:notes>
-</file>
-
 <file path=ppt/notesSlides/notesSlide3.xml><?xml version="1.0" encoding="utf-8"?>
 <p:notes xmlns:a="http://schemas.openxmlformats.org/drawingml/2006/main" xmlns:r="http://schemas.openxmlformats.org/officeDocument/2006/relationships" xmlns:p="http://schemas.openxmlformats.org/presentationml/2006/main">
   <p:cSld>
@@ -2203,7 +2113,7 @@
           <a:p>
             <a:r>
               <a:rPr lang="en-US" dirty="0"/>
-              <a:t>Låt eleverna berätta vilken sorts biolog de själva skulle vilja vara.</a:t>
+              <a:t>Be eleverna omformulera egna åsiktsfrågor.</a:t>
             </a:r>
             <a:endParaRPr lang="en-US" dirty="0"/>
           </a:p>
@@ -2291,7 +2201,7 @@
           <a:p>
             <a:r>
               <a:rPr lang="en-US" dirty="0"/>
-              <a:t>Be eleverna omformulera egna åsiktsfrågor.</a:t>
+              <a:t>En teori är en väl prövad förklaring med många belägg, till skillnad från en hypotes.</a:t>
             </a:r>
             <a:endParaRPr lang="en-US" dirty="0"/>
           </a:p>
@@ -2379,7 +2289,7 @@
           <a:p>
             <a:r>
               <a:rPr lang="en-US" dirty="0"/>
-              <a:t>En teori är en väl prövad förklaring med många belägg, till skillnad från en hypotes.</a:t>
+              <a:t>Vanligt fel: eleverna blandar ihop oberoende och beroende variabel. Hjälp: det jag ändrar / det jag mäter.</a:t>
             </a:r>
             <a:endParaRPr lang="en-US" dirty="0"/>
           </a:p>
@@ -2467,7 +2377,7 @@
           <a:p>
             <a:r>
               <a:rPr lang="en-US" dirty="0"/>
-              <a:t>Vanligt fel: eleverna blandar ihop oberoende och beroende variabel. Hjälp: det jag ändrar / det jag mäter.</a:t>
+              <a:t>Fråga: varför ska man inte äta i labbet ens när det är ofarligt?</a:t>
             </a:r>
             <a:endParaRPr lang="en-US" dirty="0"/>
           </a:p>
@@ -2555,7 +2465,7 @@
           <a:p>
             <a:r>
               <a:rPr lang="en-US" dirty="0"/>
-              <a:t>Fråga: varför ska man inte äta i labbet ens när det är ofarligt?</a:t>
+              <a:t>Låt eleverna svara i par eller på whiteboard. Facit finns i lärarversionen av kapitlet.</a:t>
             </a:r>
             <a:endParaRPr lang="en-US" dirty="0"/>
           </a:p>
@@ -2643,7 +2553,7 @@
           <a:p>
             <a:r>
               <a:rPr lang="en-US" dirty="0"/>
-              <a:t>Låt eleverna svara i par eller på whiteboard. Facit finns i lärarversionen av kapitlet.</a:t>
+              <a:t>Ca 50 min.</a:t>
             </a:r>
             <a:endParaRPr lang="en-US" dirty="0"/>
           </a:p>
@@ -2731,7 +2641,7 @@
           <a:p>
             <a:r>
               <a:rPr lang="en-US" dirty="0"/>
-              <a:t>Ca 50 min.</a:t>
+              <a:t>Exempelvärden. Räkna medelvärde av upprepade mätningar, t.ex. 12, 14 och 13 mm.</a:t>
             </a:r>
             <a:endParaRPr lang="en-US" dirty="0"/>
           </a:p>
@@ -3640,1004 +3550,122 @@
                   <a:schemeClr val="tx2"/>
                 </a:solidFill>
               </a:rPr>
-              <a:t>Skriv värdena i en tabell</a:t>
+              <a:t>Välj diagram: stapel eller linje</a:t>
             </a:r>
             <a:endParaRPr lang="en-US" sz="3600" dirty="0"/>
+          </a:p>
+        </p:txBody>
+      </p:sp>
+      <p:sp>
+        <p:nvSpPr>
+          <p:cNvPr id="4" name="Text 1"/>
+          <p:cNvSpPr txBox="1"/>
+          <p:nvPr/>
+        </p:nvSpPr>
+        <p:spPr>
+          <a:xfrm>
+            <a:off x="548640" y="1554480"/>
+            <a:ext cx="5120640" cy="4480560"/>
+          </a:xfrm>
+          <a:prstGeom prst="rect">
+            <a:avLst/>
+          </a:prstGeom>
+          <a:noFill/>
+          <a:ln/>
+        </p:spPr>
+        <p:txBody>
+          <a:bodyPr wrap="square" lIns="0" tIns="0" rIns="0" bIns="0" rtlCol="0" anchor="t"/>
+          <a:lstStyle/>
+          <a:p>
+            <a:pPr marL="342900" indent="-342900">
+              <a:spcAft>
+                <a:spcPts val="1000"/>
+              </a:spcAft>
+              <a:buSzPct val="100000"/>
+              <a:buChar char="•"/>
+            </a:pPr>
+            <a:r>
+              <a:rPr lang="en-US" sz="2200" dirty="0">
+                <a:solidFill>
+                  <a:schemeClr val="tx1"/>
+                </a:solidFill>
+              </a:rPr>
+              <a:t>Stapeldiagram: jämför grupper.</a:t>
+            </a:r>
+            <a:endParaRPr lang="en-US" sz="2200" dirty="0"/>
+          </a:p>
+          <a:p>
+            <a:pPr marL="342900" indent="-342900">
+              <a:spcAft>
+                <a:spcPts val="1000"/>
+              </a:spcAft>
+              <a:buSzPct val="100000"/>
+              <a:buChar char="•"/>
+            </a:pPr>
+            <a:r>
+              <a:rPr lang="en-US" sz="2200" dirty="0">
+                <a:solidFill>
+                  <a:schemeClr val="tx1"/>
+                </a:solidFill>
+              </a:rPr>
+              <a:t>Linjediagram: förändring över tid, tid på x-axeln.</a:t>
+            </a:r>
+            <a:endParaRPr lang="en-US" sz="2200" dirty="0"/>
+          </a:p>
+          <a:p>
+            <a:pPr marL="342900" indent="-342900">
+              <a:spcAft>
+                <a:spcPts val="1000"/>
+              </a:spcAft>
+              <a:buSzPct val="100000"/>
+              <a:buChar char="•"/>
+            </a:pPr>
+            <a:r>
+              <a:rPr lang="en-US" sz="2200" dirty="0">
+                <a:solidFill>
+                  <a:schemeClr val="tx1"/>
+                </a:solidFill>
+              </a:rPr>
+              <a:t>Rubrik, namn och enhet på axlarna.</a:t>
+            </a:r>
+            <a:endParaRPr lang="en-US" sz="2200" dirty="0"/>
+          </a:p>
+          <a:p>
+            <a:pPr marL="342900" indent="-342900">
+              <a:spcAft>
+                <a:spcPts val="1000"/>
+              </a:spcAft>
+              <a:buSzPct val="100000"/>
+              <a:buChar char="•"/>
+            </a:pPr>
+            <a:r>
+              <a:rPr lang="en-US" sz="2200" dirty="0">
+                <a:solidFill>
+                  <a:schemeClr val="tx1"/>
+                </a:solidFill>
+              </a:rPr>
+              <a:t>Läs av: högst stapel, skillnad, enhet.</a:t>
+            </a:r>
+            <a:endParaRPr lang="en-US" sz="2200" dirty="0"/>
           </a:p>
         </p:txBody>
       </p:sp>
       <p:graphicFrame>
         <p:nvGraphicFramePr>
-          <p:cNvPr id="11" name="Table 0"/>
-          <p:cNvGraphicFramePr>
-            <a:graphicFrameLocks noGrp="1"/>
-          </p:cNvGraphicFramePr>
-          <p:nvPr>
-            <p:extLst>
-              <p:ext uri="{D42A27DB-BD31-4B8C-83A1-F6EECF244321}">
-                <p14:modId xmlns:p14="http://schemas.microsoft.com/office/powerpoint/2010/main" val="1579011935"/>
-              </p:ext>
-            </p:extLst>
-          </p:nvPr>
+          <p:cNvPr id="5" name="Chart 0" descr=""/>
+          <p:cNvGraphicFramePr/>
+          <p:nvPr/>
         </p:nvGraphicFramePr>
         <p:xfrm>
-          <a:off x="548640" y="1554480"/>
-          <a:ext cx="11091672" cy="914400"/>
+          <a:off x="6035040" y="1463040"/>
+          <a:ext cx="5577840" cy="4572000"/>
         </p:xfrm>
-        <a:graphic>
-          <a:graphicData uri="http://schemas.openxmlformats.org/drawingml/2006/table">
-            <a:tbl>
-              <a:tblPr/>
-              <a:tblGrid>
-                <a:gridCol w="2743200"/>
-                <a:gridCol w="4114800"/>
-                <a:gridCol w="4233672"/>
-              </a:tblGrid>
-              <a:tr h="731520">
-                <a:tc>
-                  <a:txBody>
-                    <a:bodyPr/>
-                    <a:lstStyle/>
-                    <a:p>
-                      <a:pPr indent="0" marL="0">
-                        <a:buNone/>
-                      </a:pPr>
-                      <a:r>
-                        <a:rPr lang="en-US" sz="2000" b="1" dirty="0">
-                          <a:solidFill>
-                            <a:schemeClr val="bg1"/>
-                          </a:solidFill>
-                        </a:rPr>
-                        <a:t>Dag</a:t>
-                      </a:r>
-                      <a:endParaRPr lang="en-US" sz="2000" dirty="0"/>
-                    </a:p>
-                  </a:txBody>
-                  <a:tcPr marL="109728" marR="109728" marT="73152" marB="73152" anchor="ctr">
-                    <a:lnL w="12700" cap="flat" cmpd="sng" algn="ctr">
-                      <a:solidFill>
-                        <a:srgbClr val="C9D8CD"/>
-                      </a:solidFill>
-                      <a:prstDash val="solid"/>
-                      <a:round/>
-                      <a:headEnd type="none" w="med" len="med"/>
-                      <a:tailEnd type="none" w="med" len="med"/>
-                    </a:lnL>
-                    <a:lnR w="12700" cap="flat" cmpd="sng" algn="ctr">
-                      <a:solidFill>
-                        <a:srgbClr val="C9D8CD"/>
-                      </a:solidFill>
-                      <a:prstDash val="solid"/>
-                      <a:round/>
-                      <a:headEnd type="none" w="med" len="med"/>
-                      <a:tailEnd type="none" w="med" len="med"/>
-                    </a:lnR>
-                    <a:lnT w="12700" cap="flat" cmpd="sng" algn="ctr">
-                      <a:solidFill>
-                        <a:srgbClr val="C9D8CD"/>
-                      </a:solidFill>
-                      <a:prstDash val="solid"/>
-                      <a:round/>
-                      <a:headEnd type="none" w="med" len="med"/>
-                      <a:tailEnd type="none" w="med" len="med"/>
-                    </a:lnT>
-                    <a:lnB w="12700" cap="flat" cmpd="sng" algn="ctr">
-                      <a:solidFill>
-                        <a:srgbClr val="C9D8CD"/>
-                      </a:solidFill>
-                      <a:prstDash val="solid"/>
-                      <a:round/>
-                      <a:headEnd type="none" w="med" len="med"/>
-                      <a:tailEnd type="none" w="med" len="med"/>
-                    </a:lnB>
-                    <a:solidFill>
-                      <a:schemeClr val="accent1"/>
-                    </a:solidFill>
-                  </a:tcPr>
-                </a:tc>
-                <a:tc>
-                  <a:txBody>
-                    <a:bodyPr/>
-                    <a:lstStyle/>
-                    <a:p>
-                      <a:pPr indent="0" marL="0">
-                        <a:buNone/>
-                      </a:pPr>
-                      <a:r>
-                        <a:rPr lang="en-US" sz="2000" b="1" dirty="0">
-                          <a:solidFill>
-                            <a:schemeClr val="bg1"/>
-                          </a:solidFill>
-                        </a:rPr>
-                        <a:t>Ljus (mm)</a:t>
-                      </a:r>
-                      <a:endParaRPr lang="en-US" sz="2000" dirty="0"/>
-                    </a:p>
-                  </a:txBody>
-                  <a:tcPr marL="109728" marR="109728" marT="73152" marB="73152" anchor="ctr">
-                    <a:lnL w="12700" cap="flat" cmpd="sng" algn="ctr">
-                      <a:solidFill>
-                        <a:srgbClr val="C9D8CD"/>
-                      </a:solidFill>
-                      <a:prstDash val="solid"/>
-                      <a:round/>
-                      <a:headEnd type="none" w="med" len="med"/>
-                      <a:tailEnd type="none" w="med" len="med"/>
-                    </a:lnL>
-                    <a:lnR w="12700" cap="flat" cmpd="sng" algn="ctr">
-                      <a:solidFill>
-                        <a:srgbClr val="C9D8CD"/>
-                      </a:solidFill>
-                      <a:prstDash val="solid"/>
-                      <a:round/>
-                      <a:headEnd type="none" w="med" len="med"/>
-                      <a:tailEnd type="none" w="med" len="med"/>
-                    </a:lnR>
-                    <a:lnT w="12700" cap="flat" cmpd="sng" algn="ctr">
-                      <a:solidFill>
-                        <a:srgbClr val="C9D8CD"/>
-                      </a:solidFill>
-                      <a:prstDash val="solid"/>
-                      <a:round/>
-                      <a:headEnd type="none" w="med" len="med"/>
-                      <a:tailEnd type="none" w="med" len="med"/>
-                    </a:lnT>
-                    <a:lnB w="12700" cap="flat" cmpd="sng" algn="ctr">
-                      <a:solidFill>
-                        <a:srgbClr val="C9D8CD"/>
-                      </a:solidFill>
-                      <a:prstDash val="solid"/>
-                      <a:round/>
-                      <a:headEnd type="none" w="med" len="med"/>
-                      <a:tailEnd type="none" w="med" len="med"/>
-                    </a:lnB>
-                    <a:solidFill>
-                      <a:schemeClr val="accent1"/>
-                    </a:solidFill>
-                  </a:tcPr>
-                </a:tc>
-                <a:tc>
-                  <a:txBody>
-                    <a:bodyPr/>
-                    <a:lstStyle/>
-                    <a:p>
-                      <a:pPr indent="0" marL="0">
-                        <a:buNone/>
-                      </a:pPr>
-                      <a:r>
-                        <a:rPr lang="en-US" sz="2000" b="1" dirty="0">
-                          <a:solidFill>
-                            <a:schemeClr val="bg1"/>
-                          </a:solidFill>
-                        </a:rPr>
-                        <a:t>Mörker (mm)</a:t>
-                      </a:r>
-                      <a:endParaRPr lang="en-US" sz="2000" dirty="0"/>
-                    </a:p>
-                  </a:txBody>
-                  <a:tcPr marL="109728" marR="109728" marT="73152" marB="73152" anchor="ctr">
-                    <a:lnL w="12700" cap="flat" cmpd="sng" algn="ctr">
-                      <a:solidFill>
-                        <a:srgbClr val="C9D8CD"/>
-                      </a:solidFill>
-                      <a:prstDash val="solid"/>
-                      <a:round/>
-                      <a:headEnd type="none" w="med" len="med"/>
-                      <a:tailEnd type="none" w="med" len="med"/>
-                    </a:lnL>
-                    <a:lnR w="12700" cap="flat" cmpd="sng" algn="ctr">
-                      <a:solidFill>
-                        <a:srgbClr val="C9D8CD"/>
-                      </a:solidFill>
-                      <a:prstDash val="solid"/>
-                      <a:round/>
-                      <a:headEnd type="none" w="med" len="med"/>
-                      <a:tailEnd type="none" w="med" len="med"/>
-                    </a:lnR>
-                    <a:lnT w="12700" cap="flat" cmpd="sng" algn="ctr">
-                      <a:solidFill>
-                        <a:srgbClr val="C9D8CD"/>
-                      </a:solidFill>
-                      <a:prstDash val="solid"/>
-                      <a:round/>
-                      <a:headEnd type="none" w="med" len="med"/>
-                      <a:tailEnd type="none" w="med" len="med"/>
-                    </a:lnT>
-                    <a:lnB w="12700" cap="flat" cmpd="sng" algn="ctr">
-                      <a:solidFill>
-                        <a:srgbClr val="C9D8CD"/>
-                      </a:solidFill>
-                      <a:prstDash val="solid"/>
-                      <a:round/>
-                      <a:headEnd type="none" w="med" len="med"/>
-                      <a:tailEnd type="none" w="med" len="med"/>
-                    </a:lnB>
-                    <a:solidFill>
-                      <a:schemeClr val="accent1"/>
-                    </a:solidFill>
-                  </a:tcPr>
-                </a:tc>
-              </a:tr>
-              <a:tr h="731520">
-                <a:tc>
-                  <a:txBody>
-                    <a:bodyPr/>
-                    <a:lstStyle/>
-                    <a:p>
-                      <a:pPr indent="0" marL="0">
-                        <a:buNone/>
-                      </a:pPr>
-                      <a:r>
-                        <a:rPr lang="en-US" sz="2000" b="1" dirty="0">
-                          <a:solidFill>
-                            <a:schemeClr val="tx1"/>
-                          </a:solidFill>
-                        </a:rPr>
-                        <a:t>1</a:t>
-                      </a:r>
-                      <a:endParaRPr lang="en-US" sz="2000" dirty="0"/>
-                    </a:p>
-                  </a:txBody>
-                  <a:tcPr marL="109728" marR="109728" marT="73152" marB="73152" anchor="ctr">
-                    <a:lnL w="12700" cap="flat" cmpd="sng" algn="ctr">
-                      <a:solidFill>
-                        <a:srgbClr val="C9D8CD"/>
-                      </a:solidFill>
-                      <a:prstDash val="solid"/>
-                      <a:round/>
-                      <a:headEnd type="none" w="med" len="med"/>
-                      <a:tailEnd type="none" w="med" len="med"/>
-                    </a:lnL>
-                    <a:lnR w="12700" cap="flat" cmpd="sng" algn="ctr">
-                      <a:solidFill>
-                        <a:srgbClr val="C9D8CD"/>
-                      </a:solidFill>
-                      <a:prstDash val="solid"/>
-                      <a:round/>
-                      <a:headEnd type="none" w="med" len="med"/>
-                      <a:tailEnd type="none" w="med" len="med"/>
-                    </a:lnR>
-                    <a:lnT w="12700" cap="flat" cmpd="sng" algn="ctr">
-                      <a:solidFill>
-                        <a:srgbClr val="C9D8CD"/>
-                      </a:solidFill>
-                      <a:prstDash val="solid"/>
-                      <a:round/>
-                      <a:headEnd type="none" w="med" len="med"/>
-                      <a:tailEnd type="none" w="med" len="med"/>
-                    </a:lnT>
-                    <a:lnB w="12700" cap="flat" cmpd="sng" algn="ctr">
-                      <a:solidFill>
-                        <a:srgbClr val="C9D8CD"/>
-                      </a:solidFill>
-                      <a:prstDash val="solid"/>
-                      <a:round/>
-                      <a:headEnd type="none" w="med" len="med"/>
-                      <a:tailEnd type="none" w="med" len="med"/>
-                    </a:lnB>
-                    <a:solidFill>
-                      <a:schemeClr val="bg1"/>
-                    </a:solidFill>
-                  </a:tcPr>
-                </a:tc>
-                <a:tc>
-                  <a:txBody>
-                    <a:bodyPr/>
-                    <a:lstStyle/>
-                    <a:p>
-                      <a:pPr indent="0" marL="0">
-                        <a:buNone/>
-                      </a:pPr>
-                      <a:r>
-                        <a:rPr lang="en-US" sz="2000" dirty="0">
-                          <a:solidFill>
-                            <a:schemeClr val="tx1"/>
-                          </a:solidFill>
-                        </a:rPr>
-                        <a:t>5</a:t>
-                      </a:r>
-                      <a:endParaRPr lang="en-US" sz="2000" dirty="0"/>
-                    </a:p>
-                  </a:txBody>
-                  <a:tcPr marL="109728" marR="109728" marT="73152" marB="73152" anchor="ctr">
-                    <a:lnL w="12700" cap="flat" cmpd="sng" algn="ctr">
-                      <a:solidFill>
-                        <a:srgbClr val="C9D8CD"/>
-                      </a:solidFill>
-                      <a:prstDash val="solid"/>
-                      <a:round/>
-                      <a:headEnd type="none" w="med" len="med"/>
-                      <a:tailEnd type="none" w="med" len="med"/>
-                    </a:lnL>
-                    <a:lnR w="12700" cap="flat" cmpd="sng" algn="ctr">
-                      <a:solidFill>
-                        <a:srgbClr val="C9D8CD"/>
-                      </a:solidFill>
-                      <a:prstDash val="solid"/>
-                      <a:round/>
-                      <a:headEnd type="none" w="med" len="med"/>
-                      <a:tailEnd type="none" w="med" len="med"/>
-                    </a:lnR>
-                    <a:lnT w="12700" cap="flat" cmpd="sng" algn="ctr">
-                      <a:solidFill>
-                        <a:srgbClr val="C9D8CD"/>
-                      </a:solidFill>
-                      <a:prstDash val="solid"/>
-                      <a:round/>
-                      <a:headEnd type="none" w="med" len="med"/>
-                      <a:tailEnd type="none" w="med" len="med"/>
-                    </a:lnT>
-                    <a:lnB w="12700" cap="flat" cmpd="sng" algn="ctr">
-                      <a:solidFill>
-                        <a:srgbClr val="C9D8CD"/>
-                      </a:solidFill>
-                      <a:prstDash val="solid"/>
-                      <a:round/>
-                      <a:headEnd type="none" w="med" len="med"/>
-                      <a:tailEnd type="none" w="med" len="med"/>
-                    </a:lnB>
-                    <a:solidFill>
-                      <a:schemeClr val="bg1"/>
-                    </a:solidFill>
-                  </a:tcPr>
-                </a:tc>
-                <a:tc>
-                  <a:txBody>
-                    <a:bodyPr/>
-                    <a:lstStyle/>
-                    <a:p>
-                      <a:pPr indent="0" marL="0">
-                        <a:buNone/>
-                      </a:pPr>
-                      <a:r>
-                        <a:rPr lang="en-US" sz="2000" dirty="0">
-                          <a:solidFill>
-                            <a:schemeClr val="tx1"/>
-                          </a:solidFill>
-                        </a:rPr>
-                        <a:t>5</a:t>
-                      </a:r>
-                      <a:endParaRPr lang="en-US" sz="2000" dirty="0"/>
-                    </a:p>
-                  </a:txBody>
-                  <a:tcPr marL="109728" marR="109728" marT="73152" marB="73152" anchor="ctr">
-                    <a:lnL w="12700" cap="flat" cmpd="sng" algn="ctr">
-                      <a:solidFill>
-                        <a:srgbClr val="C9D8CD"/>
-                      </a:solidFill>
-                      <a:prstDash val="solid"/>
-                      <a:round/>
-                      <a:headEnd type="none" w="med" len="med"/>
-                      <a:tailEnd type="none" w="med" len="med"/>
-                    </a:lnL>
-                    <a:lnR w="12700" cap="flat" cmpd="sng" algn="ctr">
-                      <a:solidFill>
-                        <a:srgbClr val="C9D8CD"/>
-                      </a:solidFill>
-                      <a:prstDash val="solid"/>
-                      <a:round/>
-                      <a:headEnd type="none" w="med" len="med"/>
-                      <a:tailEnd type="none" w="med" len="med"/>
-                    </a:lnR>
-                    <a:lnT w="12700" cap="flat" cmpd="sng" algn="ctr">
-                      <a:solidFill>
-                        <a:srgbClr val="C9D8CD"/>
-                      </a:solidFill>
-                      <a:prstDash val="solid"/>
-                      <a:round/>
-                      <a:headEnd type="none" w="med" len="med"/>
-                      <a:tailEnd type="none" w="med" len="med"/>
-                    </a:lnT>
-                    <a:lnB w="12700" cap="flat" cmpd="sng" algn="ctr">
-                      <a:solidFill>
-                        <a:srgbClr val="C9D8CD"/>
-                      </a:solidFill>
-                      <a:prstDash val="solid"/>
-                      <a:round/>
-                      <a:headEnd type="none" w="med" len="med"/>
-                      <a:tailEnd type="none" w="med" len="med"/>
-                    </a:lnB>
-                    <a:solidFill>
-                      <a:schemeClr val="bg1"/>
-                    </a:solidFill>
-                  </a:tcPr>
-                </a:tc>
-              </a:tr>
-              <a:tr h="731520">
-                <a:tc>
-                  <a:txBody>
-                    <a:bodyPr/>
-                    <a:lstStyle/>
-                    <a:p>
-                      <a:pPr indent="0" marL="0">
-                        <a:buNone/>
-                      </a:pPr>
-                      <a:r>
-                        <a:rPr lang="en-US" sz="2000" b="1" dirty="0">
-                          <a:solidFill>
-                            <a:schemeClr val="tx1"/>
-                          </a:solidFill>
-                        </a:rPr>
-                        <a:t>3</a:t>
-                      </a:r>
-                      <a:endParaRPr lang="en-US" sz="2000" dirty="0"/>
-                    </a:p>
-                  </a:txBody>
-                  <a:tcPr marL="109728" marR="109728" marT="73152" marB="73152" anchor="ctr">
-                    <a:lnL w="12700" cap="flat" cmpd="sng" algn="ctr">
-                      <a:solidFill>
-                        <a:srgbClr val="C9D8CD"/>
-                      </a:solidFill>
-                      <a:prstDash val="solid"/>
-                      <a:round/>
-                      <a:headEnd type="none" w="med" len="med"/>
-                      <a:tailEnd type="none" w="med" len="med"/>
-                    </a:lnL>
-                    <a:lnR w="12700" cap="flat" cmpd="sng" algn="ctr">
-                      <a:solidFill>
-                        <a:srgbClr val="C9D8CD"/>
-                      </a:solidFill>
-                      <a:prstDash val="solid"/>
-                      <a:round/>
-                      <a:headEnd type="none" w="med" len="med"/>
-                      <a:tailEnd type="none" w="med" len="med"/>
-                    </a:lnR>
-                    <a:lnT w="12700" cap="flat" cmpd="sng" algn="ctr">
-                      <a:solidFill>
-                        <a:srgbClr val="C9D8CD"/>
-                      </a:solidFill>
-                      <a:prstDash val="solid"/>
-                      <a:round/>
-                      <a:headEnd type="none" w="med" len="med"/>
-                      <a:tailEnd type="none" w="med" len="med"/>
-                    </a:lnT>
-                    <a:lnB w="12700" cap="flat" cmpd="sng" algn="ctr">
-                      <a:solidFill>
-                        <a:srgbClr val="C9D8CD"/>
-                      </a:solidFill>
-                      <a:prstDash val="solid"/>
-                      <a:round/>
-                      <a:headEnd type="none" w="med" len="med"/>
-                      <a:tailEnd type="none" w="med" len="med"/>
-                    </a:lnB>
-                    <a:solidFill>
-                      <a:schemeClr val="bg1"/>
-                    </a:solidFill>
-                  </a:tcPr>
-                </a:tc>
-                <a:tc>
-                  <a:txBody>
-                    <a:bodyPr/>
-                    <a:lstStyle/>
-                    <a:p>
-                      <a:pPr indent="0" marL="0">
-                        <a:buNone/>
-                      </a:pPr>
-                      <a:r>
-                        <a:rPr lang="en-US" sz="2000" dirty="0">
-                          <a:solidFill>
-                            <a:schemeClr val="tx1"/>
-                          </a:solidFill>
-                        </a:rPr>
-                        <a:t>15</a:t>
-                      </a:r>
-                      <a:endParaRPr lang="en-US" sz="2000" dirty="0"/>
-                    </a:p>
-                  </a:txBody>
-                  <a:tcPr marL="109728" marR="109728" marT="73152" marB="73152" anchor="ctr">
-                    <a:lnL w="12700" cap="flat" cmpd="sng" algn="ctr">
-                      <a:solidFill>
-                        <a:srgbClr val="C9D8CD"/>
-                      </a:solidFill>
-                      <a:prstDash val="solid"/>
-                      <a:round/>
-                      <a:headEnd type="none" w="med" len="med"/>
-                      <a:tailEnd type="none" w="med" len="med"/>
-                    </a:lnL>
-                    <a:lnR w="12700" cap="flat" cmpd="sng" algn="ctr">
-                      <a:solidFill>
-                        <a:srgbClr val="C9D8CD"/>
-                      </a:solidFill>
-                      <a:prstDash val="solid"/>
-                      <a:round/>
-                      <a:headEnd type="none" w="med" len="med"/>
-                      <a:tailEnd type="none" w="med" len="med"/>
-                    </a:lnR>
-                    <a:lnT w="12700" cap="flat" cmpd="sng" algn="ctr">
-                      <a:solidFill>
-                        <a:srgbClr val="C9D8CD"/>
-                      </a:solidFill>
-                      <a:prstDash val="solid"/>
-                      <a:round/>
-                      <a:headEnd type="none" w="med" len="med"/>
-                      <a:tailEnd type="none" w="med" len="med"/>
-                    </a:lnT>
-                    <a:lnB w="12700" cap="flat" cmpd="sng" algn="ctr">
-                      <a:solidFill>
-                        <a:srgbClr val="C9D8CD"/>
-                      </a:solidFill>
-                      <a:prstDash val="solid"/>
-                      <a:round/>
-                      <a:headEnd type="none" w="med" len="med"/>
-                      <a:tailEnd type="none" w="med" len="med"/>
-                    </a:lnB>
-                    <a:solidFill>
-                      <a:schemeClr val="bg1"/>
-                    </a:solidFill>
-                  </a:tcPr>
-                </a:tc>
-                <a:tc>
-                  <a:txBody>
-                    <a:bodyPr/>
-                    <a:lstStyle/>
-                    <a:p>
-                      <a:pPr indent="0" marL="0">
-                        <a:buNone/>
-                      </a:pPr>
-                      <a:r>
-                        <a:rPr lang="en-US" sz="2000" dirty="0">
-                          <a:solidFill>
-                            <a:schemeClr val="tx1"/>
-                          </a:solidFill>
-                        </a:rPr>
-                        <a:t>25</a:t>
-                      </a:r>
-                      <a:endParaRPr lang="en-US" sz="2000" dirty="0"/>
-                    </a:p>
-                  </a:txBody>
-                  <a:tcPr marL="109728" marR="109728" marT="73152" marB="73152" anchor="ctr">
-                    <a:lnL w="12700" cap="flat" cmpd="sng" algn="ctr">
-                      <a:solidFill>
-                        <a:srgbClr val="C9D8CD"/>
-                      </a:solidFill>
-                      <a:prstDash val="solid"/>
-                      <a:round/>
-                      <a:headEnd type="none" w="med" len="med"/>
-                      <a:tailEnd type="none" w="med" len="med"/>
-                    </a:lnL>
-                    <a:lnR w="12700" cap="flat" cmpd="sng" algn="ctr">
-                      <a:solidFill>
-                        <a:srgbClr val="C9D8CD"/>
-                      </a:solidFill>
-                      <a:prstDash val="solid"/>
-                      <a:round/>
-                      <a:headEnd type="none" w="med" len="med"/>
-                      <a:tailEnd type="none" w="med" len="med"/>
-                    </a:lnR>
-                    <a:lnT w="12700" cap="flat" cmpd="sng" algn="ctr">
-                      <a:solidFill>
-                        <a:srgbClr val="C9D8CD"/>
-                      </a:solidFill>
-                      <a:prstDash val="solid"/>
-                      <a:round/>
-                      <a:headEnd type="none" w="med" len="med"/>
-                      <a:tailEnd type="none" w="med" len="med"/>
-                    </a:lnT>
-                    <a:lnB w="12700" cap="flat" cmpd="sng" algn="ctr">
-                      <a:solidFill>
-                        <a:srgbClr val="C9D8CD"/>
-                      </a:solidFill>
-                      <a:prstDash val="solid"/>
-                      <a:round/>
-                      <a:headEnd type="none" w="med" len="med"/>
-                      <a:tailEnd type="none" w="med" len="med"/>
-                    </a:lnB>
-                    <a:solidFill>
-                      <a:schemeClr val="bg1"/>
-                    </a:solidFill>
-                  </a:tcPr>
-                </a:tc>
-              </a:tr>
-              <a:tr h="731520">
-                <a:tc>
-                  <a:txBody>
-                    <a:bodyPr/>
-                    <a:lstStyle/>
-                    <a:p>
-                      <a:pPr indent="0" marL="0">
-                        <a:buNone/>
-                      </a:pPr>
-                      <a:r>
-                        <a:rPr lang="en-US" sz="2000" b="1" dirty="0">
-                          <a:solidFill>
-                            <a:schemeClr val="tx1"/>
-                          </a:solidFill>
-                        </a:rPr>
-                        <a:t>5</a:t>
-                      </a:r>
-                      <a:endParaRPr lang="en-US" sz="2000" dirty="0"/>
-                    </a:p>
-                  </a:txBody>
-                  <a:tcPr marL="109728" marR="109728" marT="73152" marB="73152" anchor="ctr">
-                    <a:lnL w="12700" cap="flat" cmpd="sng" algn="ctr">
-                      <a:solidFill>
-                        <a:srgbClr val="C9D8CD"/>
-                      </a:solidFill>
-                      <a:prstDash val="solid"/>
-                      <a:round/>
-                      <a:headEnd type="none" w="med" len="med"/>
-                      <a:tailEnd type="none" w="med" len="med"/>
-                    </a:lnL>
-                    <a:lnR w="12700" cap="flat" cmpd="sng" algn="ctr">
-                      <a:solidFill>
-                        <a:srgbClr val="C9D8CD"/>
-                      </a:solidFill>
-                      <a:prstDash val="solid"/>
-                      <a:round/>
-                      <a:headEnd type="none" w="med" len="med"/>
-                      <a:tailEnd type="none" w="med" len="med"/>
-                    </a:lnR>
-                    <a:lnT w="12700" cap="flat" cmpd="sng" algn="ctr">
-                      <a:solidFill>
-                        <a:srgbClr val="C9D8CD"/>
-                      </a:solidFill>
-                      <a:prstDash val="solid"/>
-                      <a:round/>
-                      <a:headEnd type="none" w="med" len="med"/>
-                      <a:tailEnd type="none" w="med" len="med"/>
-                    </a:lnT>
-                    <a:lnB w="12700" cap="flat" cmpd="sng" algn="ctr">
-                      <a:solidFill>
-                        <a:srgbClr val="C9D8CD"/>
-                      </a:solidFill>
-                      <a:prstDash val="solid"/>
-                      <a:round/>
-                      <a:headEnd type="none" w="med" len="med"/>
-                      <a:tailEnd type="none" w="med" len="med"/>
-                    </a:lnB>
-                    <a:solidFill>
-                      <a:schemeClr val="bg1"/>
-                    </a:solidFill>
-                  </a:tcPr>
-                </a:tc>
-                <a:tc>
-                  <a:txBody>
-                    <a:bodyPr/>
-                    <a:lstStyle/>
-                    <a:p>
-                      <a:pPr indent="0" marL="0">
-                        <a:buNone/>
-                      </a:pPr>
-                      <a:r>
-                        <a:rPr lang="en-US" sz="2000" dirty="0">
-                          <a:solidFill>
-                            <a:schemeClr val="tx1"/>
-                          </a:solidFill>
-                        </a:rPr>
-                        <a:t>28</a:t>
-                      </a:r>
-                      <a:endParaRPr lang="en-US" sz="2000" dirty="0"/>
-                    </a:p>
-                  </a:txBody>
-                  <a:tcPr marL="109728" marR="109728" marT="73152" marB="73152" anchor="ctr">
-                    <a:lnL w="12700" cap="flat" cmpd="sng" algn="ctr">
-                      <a:solidFill>
-                        <a:srgbClr val="C9D8CD"/>
-                      </a:solidFill>
-                      <a:prstDash val="solid"/>
-                      <a:round/>
-                      <a:headEnd type="none" w="med" len="med"/>
-                      <a:tailEnd type="none" w="med" len="med"/>
-                    </a:lnL>
-                    <a:lnR w="12700" cap="flat" cmpd="sng" algn="ctr">
-                      <a:solidFill>
-                        <a:srgbClr val="C9D8CD"/>
-                      </a:solidFill>
-                      <a:prstDash val="solid"/>
-                      <a:round/>
-                      <a:headEnd type="none" w="med" len="med"/>
-                      <a:tailEnd type="none" w="med" len="med"/>
-                    </a:lnR>
-                    <a:lnT w="12700" cap="flat" cmpd="sng" algn="ctr">
-                      <a:solidFill>
-                        <a:srgbClr val="C9D8CD"/>
-                      </a:solidFill>
-                      <a:prstDash val="solid"/>
-                      <a:round/>
-                      <a:headEnd type="none" w="med" len="med"/>
-                      <a:tailEnd type="none" w="med" len="med"/>
-                    </a:lnT>
-                    <a:lnB w="12700" cap="flat" cmpd="sng" algn="ctr">
-                      <a:solidFill>
-                        <a:srgbClr val="C9D8CD"/>
-                      </a:solidFill>
-                      <a:prstDash val="solid"/>
-                      <a:round/>
-                      <a:headEnd type="none" w="med" len="med"/>
-                      <a:tailEnd type="none" w="med" len="med"/>
-                    </a:lnB>
-                    <a:solidFill>
-                      <a:schemeClr val="bg1"/>
-                    </a:solidFill>
-                  </a:tcPr>
-                </a:tc>
-                <a:tc>
-                  <a:txBody>
-                    <a:bodyPr/>
-                    <a:lstStyle/>
-                    <a:p>
-                      <a:pPr indent="0" marL="0">
-                        <a:buNone/>
-                      </a:pPr>
-                      <a:r>
-                        <a:rPr lang="en-US" sz="2000" dirty="0">
-                          <a:solidFill>
-                            <a:schemeClr val="tx1"/>
-                          </a:solidFill>
-                        </a:rPr>
-                        <a:t>42</a:t>
-                      </a:r>
-                      <a:endParaRPr lang="en-US" sz="2000" dirty="0"/>
-                    </a:p>
-                  </a:txBody>
-                  <a:tcPr marL="109728" marR="109728" marT="73152" marB="73152" anchor="ctr">
-                    <a:lnL w="12700" cap="flat" cmpd="sng" algn="ctr">
-                      <a:solidFill>
-                        <a:srgbClr val="C9D8CD"/>
-                      </a:solidFill>
-                      <a:prstDash val="solid"/>
-                      <a:round/>
-                      <a:headEnd type="none" w="med" len="med"/>
-                      <a:tailEnd type="none" w="med" len="med"/>
-                    </a:lnL>
-                    <a:lnR w="12700" cap="flat" cmpd="sng" algn="ctr">
-                      <a:solidFill>
-                        <a:srgbClr val="C9D8CD"/>
-                      </a:solidFill>
-                      <a:prstDash val="solid"/>
-                      <a:round/>
-                      <a:headEnd type="none" w="med" len="med"/>
-                      <a:tailEnd type="none" w="med" len="med"/>
-                    </a:lnR>
-                    <a:lnT w="12700" cap="flat" cmpd="sng" algn="ctr">
-                      <a:solidFill>
-                        <a:srgbClr val="C9D8CD"/>
-                      </a:solidFill>
-                      <a:prstDash val="solid"/>
-                      <a:round/>
-                      <a:headEnd type="none" w="med" len="med"/>
-                      <a:tailEnd type="none" w="med" len="med"/>
-                    </a:lnT>
-                    <a:lnB w="12700" cap="flat" cmpd="sng" algn="ctr">
-                      <a:solidFill>
-                        <a:srgbClr val="C9D8CD"/>
-                      </a:solidFill>
-                      <a:prstDash val="solid"/>
-                      <a:round/>
-                      <a:headEnd type="none" w="med" len="med"/>
-                      <a:tailEnd type="none" w="med" len="med"/>
-                    </a:lnB>
-                    <a:solidFill>
-                      <a:schemeClr val="bg1"/>
-                    </a:solidFill>
-                  </a:tcPr>
-                </a:tc>
-              </a:tr>
-              <a:tr h="731520">
-                <a:tc>
-                  <a:txBody>
-                    <a:bodyPr/>
-                    <a:lstStyle/>
-                    <a:p>
-                      <a:pPr indent="0" marL="0">
-                        <a:buNone/>
-                      </a:pPr>
-                      <a:r>
-                        <a:rPr lang="en-US" sz="2000" b="1" dirty="0">
-                          <a:solidFill>
-                            <a:schemeClr val="tx1"/>
-                          </a:solidFill>
-                        </a:rPr>
-                        <a:t>7</a:t>
-                      </a:r>
-                      <a:endParaRPr lang="en-US" sz="2000" dirty="0"/>
-                    </a:p>
-                  </a:txBody>
-                  <a:tcPr marL="109728" marR="109728" marT="73152" marB="73152" anchor="ctr">
-                    <a:lnL w="12700" cap="flat" cmpd="sng" algn="ctr">
-                      <a:solidFill>
-                        <a:srgbClr val="C9D8CD"/>
-                      </a:solidFill>
-                      <a:prstDash val="solid"/>
-                      <a:round/>
-                      <a:headEnd type="none" w="med" len="med"/>
-                      <a:tailEnd type="none" w="med" len="med"/>
-                    </a:lnL>
-                    <a:lnR w="12700" cap="flat" cmpd="sng" algn="ctr">
-                      <a:solidFill>
-                        <a:srgbClr val="C9D8CD"/>
-                      </a:solidFill>
-                      <a:prstDash val="solid"/>
-                      <a:round/>
-                      <a:headEnd type="none" w="med" len="med"/>
-                      <a:tailEnd type="none" w="med" len="med"/>
-                    </a:lnR>
-                    <a:lnT w="12700" cap="flat" cmpd="sng" algn="ctr">
-                      <a:solidFill>
-                        <a:srgbClr val="C9D8CD"/>
-                      </a:solidFill>
-                      <a:prstDash val="solid"/>
-                      <a:round/>
-                      <a:headEnd type="none" w="med" len="med"/>
-                      <a:tailEnd type="none" w="med" len="med"/>
-                    </a:lnT>
-                    <a:lnB w="12700" cap="flat" cmpd="sng" algn="ctr">
-                      <a:solidFill>
-                        <a:srgbClr val="C9D8CD"/>
-                      </a:solidFill>
-                      <a:prstDash val="solid"/>
-                      <a:round/>
-                      <a:headEnd type="none" w="med" len="med"/>
-                      <a:tailEnd type="none" w="med" len="med"/>
-                    </a:lnB>
-                    <a:solidFill>
-                      <a:schemeClr val="bg1"/>
-                    </a:solidFill>
-                  </a:tcPr>
-                </a:tc>
-                <a:tc>
-                  <a:txBody>
-                    <a:bodyPr/>
-                    <a:lstStyle/>
-                    <a:p>
-                      <a:pPr indent="0" marL="0">
-                        <a:buNone/>
-                      </a:pPr>
-                      <a:r>
-                        <a:rPr lang="en-US" sz="2000" dirty="0">
-                          <a:solidFill>
-                            <a:schemeClr val="tx1"/>
-                          </a:solidFill>
-                        </a:rPr>
-                        <a:t>40</a:t>
-                      </a:r>
-                      <a:endParaRPr lang="en-US" sz="2000" dirty="0"/>
-                    </a:p>
-                  </a:txBody>
-                  <a:tcPr marL="109728" marR="109728" marT="73152" marB="73152" anchor="ctr">
-                    <a:lnL w="12700" cap="flat" cmpd="sng" algn="ctr">
-                      <a:solidFill>
-                        <a:srgbClr val="C9D8CD"/>
-                      </a:solidFill>
-                      <a:prstDash val="solid"/>
-                      <a:round/>
-                      <a:headEnd type="none" w="med" len="med"/>
-                      <a:tailEnd type="none" w="med" len="med"/>
-                    </a:lnL>
-                    <a:lnR w="12700" cap="flat" cmpd="sng" algn="ctr">
-                      <a:solidFill>
-                        <a:srgbClr val="C9D8CD"/>
-                      </a:solidFill>
-                      <a:prstDash val="solid"/>
-                      <a:round/>
-                      <a:headEnd type="none" w="med" len="med"/>
-                      <a:tailEnd type="none" w="med" len="med"/>
-                    </a:lnR>
-                    <a:lnT w="12700" cap="flat" cmpd="sng" algn="ctr">
-                      <a:solidFill>
-                        <a:srgbClr val="C9D8CD"/>
-                      </a:solidFill>
-                      <a:prstDash val="solid"/>
-                      <a:round/>
-                      <a:headEnd type="none" w="med" len="med"/>
-                      <a:tailEnd type="none" w="med" len="med"/>
-                    </a:lnT>
-                    <a:lnB w="12700" cap="flat" cmpd="sng" algn="ctr">
-                      <a:solidFill>
-                        <a:srgbClr val="C9D8CD"/>
-                      </a:solidFill>
-                      <a:prstDash val="solid"/>
-                      <a:round/>
-                      <a:headEnd type="none" w="med" len="med"/>
-                      <a:tailEnd type="none" w="med" len="med"/>
-                    </a:lnB>
-                    <a:solidFill>
-                      <a:schemeClr val="bg1"/>
-                    </a:solidFill>
-                  </a:tcPr>
-                </a:tc>
-                <a:tc>
-                  <a:txBody>
-                    <a:bodyPr/>
-                    <a:lstStyle/>
-                    <a:p>
-                      <a:pPr indent="0" marL="0">
-                        <a:buNone/>
-                      </a:pPr>
-                      <a:r>
-                        <a:rPr lang="en-US" sz="2000" dirty="0">
-                          <a:solidFill>
-                            <a:schemeClr val="tx1"/>
-                          </a:solidFill>
-                        </a:rPr>
-                        <a:t>60</a:t>
-                      </a:r>
-                      <a:endParaRPr lang="en-US" sz="2000" dirty="0"/>
-                    </a:p>
-                  </a:txBody>
-                  <a:tcPr marL="109728" marR="109728" marT="73152" marB="73152" anchor="ctr">
-                    <a:lnL w="12700" cap="flat" cmpd="sng" algn="ctr">
-                      <a:solidFill>
-                        <a:srgbClr val="C9D8CD"/>
-                      </a:solidFill>
-                      <a:prstDash val="solid"/>
-                      <a:round/>
-                      <a:headEnd type="none" w="med" len="med"/>
-                      <a:tailEnd type="none" w="med" len="med"/>
-                    </a:lnL>
-                    <a:lnR w="12700" cap="flat" cmpd="sng" algn="ctr">
-                      <a:solidFill>
-                        <a:srgbClr val="C9D8CD"/>
-                      </a:solidFill>
-                      <a:prstDash val="solid"/>
-                      <a:round/>
-                      <a:headEnd type="none" w="med" len="med"/>
-                      <a:tailEnd type="none" w="med" len="med"/>
-                    </a:lnR>
-                    <a:lnT w="12700" cap="flat" cmpd="sng" algn="ctr">
-                      <a:solidFill>
-                        <a:srgbClr val="C9D8CD"/>
-                      </a:solidFill>
-                      <a:prstDash val="solid"/>
-                      <a:round/>
-                      <a:headEnd type="none" w="med" len="med"/>
-                      <a:tailEnd type="none" w="med" len="med"/>
-                    </a:lnT>
-                    <a:lnB w="12700" cap="flat" cmpd="sng" algn="ctr">
-                      <a:solidFill>
-                        <a:srgbClr val="C9D8CD"/>
-                      </a:solidFill>
-                      <a:prstDash val="solid"/>
-                      <a:round/>
-                      <a:headEnd type="none" w="med" len="med"/>
-                      <a:tailEnd type="none" w="med" len="med"/>
-                    </a:lnB>
-                    <a:solidFill>
-                      <a:schemeClr val="bg1"/>
-                    </a:solidFill>
-                  </a:tcPr>
-                </a:tc>
-              </a:tr>
-            </a:tbl>
+        <a:graphic xmlns:a="http://schemas.openxmlformats.org/drawingml/2006/main">
+          <a:graphicData uri="http://schemas.openxmlformats.org/drawingml/2006/chart">
+            <c:chart xmlns:c="http://schemas.openxmlformats.org/drawingml/2006/chart" r:id="rId1"/>
           </a:graphicData>
         </a:graphic>
       </p:graphicFrame>
-      <p:sp>
-        <p:nvSpPr>
-          <p:cNvPr id="5" name="Text 1"/>
-          <p:cNvSpPr txBox="1"/>
-          <p:nvPr/>
-        </p:nvSpPr>
-        <p:spPr>
-          <a:xfrm>
-            <a:off x="548640" y="5577840"/>
-            <a:ext cx="11091672" cy="731520"/>
-          </a:xfrm>
-          <a:prstGeom prst="rect">
-            <a:avLst/>
-          </a:prstGeom>
-          <a:noFill/>
-          <a:ln/>
-        </p:spPr>
-        <p:txBody>
-          <a:bodyPr wrap="square" lIns="0" tIns="0" rIns="0" bIns="0" rtlCol="0" anchor="ctr"/>
-          <a:lstStyle/>
-          <a:p>
-            <a:pPr indent="0" marL="0">
-              <a:buNone/>
-            </a:pPr>
-            <a:r>
-              <a:rPr lang="en-US" sz="1800" b="1" dirty="0">
-                <a:solidFill>
-                  <a:schemeClr val="accent2"/>
-                </a:solidFill>
-              </a:rPr>
-              <a:t>Rubriker och enheter. Medelvärde = summan delat med antalet värden.</a:t>
-            </a:r>
-            <a:endParaRPr lang="en-US" sz="1800" dirty="0"/>
-          </a:p>
-        </p:txBody>
-      </p:sp>
       <p:sp>
         <p:nvSpPr>
           <p:cNvPr id="25" name="Slide Number Placeholder 0"/>
@@ -4740,7 +3768,7 @@
                   <a:schemeClr val="tx2"/>
                 </a:solidFill>
               </a:rPr>
-              <a:t>Välj diagram: stapel eller linje</a:t>
+              <a:t>Så skriver du en rapport</a:t>
             </a:r>
             <a:endParaRPr lang="en-US" sz="3600" dirty="0"/>
           </a:p>
@@ -4748,14 +3776,66 @@
       </p:sp>
       <p:sp>
         <p:nvSpPr>
-          <p:cNvPr id="4" name="Text 1"/>
+          <p:cNvPr id="4" name="Kort 1"/>
+          <p:cNvSpPr/>
+          <p:nvPr/>
+        </p:nvSpPr>
+        <p:spPr>
+          <a:xfrm>
+            <a:off x="548640" y="1554480"/>
+            <a:ext cx="2567178" cy="3108960"/>
+          </a:xfrm>
+          <a:prstGeom prst="roundRect">
+            <a:avLst>
+              <a:gd name="adj" fmla="val 4274"/>
+            </a:avLst>
+          </a:prstGeom>
+          <a:solidFill>
+            <a:schemeClr val="bg2"/>
+          </a:solidFill>
+          <a:ln w="12700">
+            <a:solidFill>
+              <a:schemeClr val="bg2"/>
+            </a:solidFill>
+            <a:prstDash val="solid"/>
+          </a:ln>
+        </p:spPr>
+      </p:sp>
+      <p:sp>
+        <p:nvSpPr>
+          <p:cNvPr id="5" name="Siffra 1"/>
+          <p:cNvSpPr/>
+          <p:nvPr/>
+        </p:nvSpPr>
+        <p:spPr>
+          <a:xfrm>
+            <a:off x="777240" y="1783080"/>
+            <a:ext cx="502920" cy="502920"/>
+          </a:xfrm>
+          <a:prstGeom prst="ellipse">
+            <a:avLst/>
+          </a:prstGeom>
+          <a:solidFill>
+            <a:schemeClr val="accent1"/>
+          </a:solidFill>
+          <a:ln w="12700">
+            <a:solidFill>
+              <a:schemeClr val="accent1"/>
+            </a:solidFill>
+            <a:prstDash val="solid"/>
+          </a:ln>
+        </p:spPr>
+      </p:sp>
+      <p:sp>
+        <p:nvSpPr>
+          <p:cNvPr id="6" name="Text 3"/>
           <p:cNvSpPr txBox="1"/>
           <p:nvPr/>
         </p:nvSpPr>
         <p:spPr>
           <a:xfrm>
-            <a:off x="548640" y="1554480"/>
-            <a:ext cx="5120640" cy="4480560"/>
+            <a:off x="777240" y="1783080"/>
+            <a:ext cx="502920" cy="502920"/>
           </a:xfrm>
           <a:prstGeom prst="rect">
             <a:avLst/>
@@ -4764,98 +3844,612 @@
           <a:ln/>
         </p:spPr>
         <p:txBody>
+          <a:bodyPr wrap="square" lIns="0" tIns="0" rIns="0" bIns="0" rtlCol="0" anchor="ctr"/>
+          <a:lstStyle/>
+          <a:p>
+            <a:pPr algn="ctr" indent="0" marL="0">
+              <a:buNone/>
+            </a:pPr>
+            <a:r>
+              <a:rPr lang="en-US" sz="1800" b="1" dirty="0">
+                <a:solidFill>
+                  <a:schemeClr val="bg1"/>
+                </a:solidFill>
+              </a:rPr>
+              <a:t>1</a:t>
+            </a:r>
+            <a:endParaRPr lang="en-US" sz="1800" dirty="0"/>
+          </a:p>
+        </p:txBody>
+      </p:sp>
+      <p:sp>
+        <p:nvSpPr>
+          <p:cNvPr id="7" name="Text 4"/>
+          <p:cNvSpPr txBox="1"/>
+          <p:nvPr/>
+        </p:nvSpPr>
+        <p:spPr>
+          <a:xfrm>
+            <a:off x="777240" y="2423160"/>
+            <a:ext cx="2109978" cy="548640"/>
+          </a:xfrm>
+          <a:prstGeom prst="rect">
+            <a:avLst/>
+          </a:prstGeom>
+          <a:noFill/>
+          <a:ln/>
+        </p:spPr>
+        <p:txBody>
           <a:bodyPr wrap="square" lIns="0" tIns="0" rIns="0" bIns="0" rtlCol="0" anchor="t"/>
           <a:lstStyle/>
           <a:p>
-            <a:pPr marL="342900" indent="-342900">
-              <a:spcAft>
-                <a:spcPts val="1000"/>
-              </a:spcAft>
-              <a:buSzPct val="100000"/>
-              <a:buChar char="•"/>
+            <a:pPr indent="0" marL="0">
+              <a:buNone/>
             </a:pPr>
             <a:r>
-              <a:rPr lang="en-US" sz="2200" dirty="0">
+              <a:rPr lang="en-US" sz="2200" b="1" dirty="0">
+                <a:solidFill>
+                  <a:schemeClr val="tx2"/>
+                </a:solidFill>
+              </a:rPr>
+              <a:t>Syfte</a:t>
+            </a:r>
+            <a:endParaRPr lang="en-US" sz="2200" dirty="0"/>
+          </a:p>
+        </p:txBody>
+      </p:sp>
+      <p:sp>
+        <p:nvSpPr>
+          <p:cNvPr id="8" name="Text 5"/>
+          <p:cNvSpPr txBox="1"/>
+          <p:nvPr/>
+        </p:nvSpPr>
+        <p:spPr>
+          <a:xfrm>
+            <a:off x="777240" y="3017520"/>
+            <a:ext cx="2109978" cy="1463040"/>
+          </a:xfrm>
+          <a:prstGeom prst="rect">
+            <a:avLst/>
+          </a:prstGeom>
+          <a:noFill/>
+          <a:ln/>
+        </p:spPr>
+        <p:txBody>
+          <a:bodyPr wrap="square" lIns="0" tIns="0" rIns="0" bIns="0" rtlCol="0" anchor="t"/>
+          <a:lstStyle/>
+          <a:p>
+            <a:pPr indent="0" marL="0">
+              <a:buNone/>
+            </a:pPr>
+            <a:r>
+              <a:rPr lang="en-US" sz="1800" dirty="0">
                 <a:solidFill>
                   <a:schemeClr val="tx1"/>
                 </a:solidFill>
               </a:rPr>
-              <a:t>Stapeldiagram: jämför grupper.</a:t>
+              <a:t>Vad vill du ta reda på?</a:t>
+            </a:r>
+            <a:endParaRPr lang="en-US" sz="1800" dirty="0"/>
+          </a:p>
+        </p:txBody>
+      </p:sp>
+      <p:sp>
+        <p:nvSpPr>
+          <p:cNvPr id="9" name="Kort 2"/>
+          <p:cNvSpPr/>
+          <p:nvPr/>
+        </p:nvSpPr>
+        <p:spPr>
+          <a:xfrm>
+            <a:off x="3390138" y="1554480"/>
+            <a:ext cx="2567178" cy="3108960"/>
+          </a:xfrm>
+          <a:prstGeom prst="roundRect">
+            <a:avLst>
+              <a:gd name="adj" fmla="val 4274"/>
+            </a:avLst>
+          </a:prstGeom>
+          <a:solidFill>
+            <a:schemeClr val="bg2"/>
+          </a:solidFill>
+          <a:ln w="12700">
+            <a:solidFill>
+              <a:schemeClr val="bg2"/>
+            </a:solidFill>
+            <a:prstDash val="solid"/>
+          </a:ln>
+        </p:spPr>
+      </p:sp>
+      <p:sp>
+        <p:nvSpPr>
+          <p:cNvPr id="10" name="Siffra 2"/>
+          <p:cNvSpPr/>
+          <p:nvPr/>
+        </p:nvSpPr>
+        <p:spPr>
+          <a:xfrm>
+            <a:off x="3618738" y="1783080"/>
+            <a:ext cx="502920" cy="502920"/>
+          </a:xfrm>
+          <a:prstGeom prst="ellipse">
+            <a:avLst/>
+          </a:prstGeom>
+          <a:solidFill>
+            <a:schemeClr val="accent2"/>
+          </a:solidFill>
+          <a:ln w="12700">
+            <a:solidFill>
+              <a:schemeClr val="accent2"/>
+            </a:solidFill>
+            <a:prstDash val="solid"/>
+          </a:ln>
+        </p:spPr>
+      </p:sp>
+      <p:sp>
+        <p:nvSpPr>
+          <p:cNvPr id="11" name="Text 8"/>
+          <p:cNvSpPr txBox="1"/>
+          <p:nvPr/>
+        </p:nvSpPr>
+        <p:spPr>
+          <a:xfrm>
+            <a:off x="3618738" y="1783080"/>
+            <a:ext cx="502920" cy="502920"/>
+          </a:xfrm>
+          <a:prstGeom prst="rect">
+            <a:avLst/>
+          </a:prstGeom>
+          <a:noFill/>
+          <a:ln/>
+        </p:spPr>
+        <p:txBody>
+          <a:bodyPr wrap="square" lIns="0" tIns="0" rIns="0" bIns="0" rtlCol="0" anchor="ctr"/>
+          <a:lstStyle/>
+          <a:p>
+            <a:pPr algn="ctr" indent="0" marL="0">
+              <a:buNone/>
+            </a:pPr>
+            <a:r>
+              <a:rPr lang="en-US" sz="1800" b="1" dirty="0">
+                <a:solidFill>
+                  <a:schemeClr val="bg1"/>
+                </a:solidFill>
+              </a:rPr>
+              <a:t>2</a:t>
+            </a:r>
+            <a:endParaRPr lang="en-US" sz="1800" dirty="0"/>
+          </a:p>
+        </p:txBody>
+      </p:sp>
+      <p:sp>
+        <p:nvSpPr>
+          <p:cNvPr id="12" name="Text 9"/>
+          <p:cNvSpPr txBox="1"/>
+          <p:nvPr/>
+        </p:nvSpPr>
+        <p:spPr>
+          <a:xfrm>
+            <a:off x="3618738" y="2423160"/>
+            <a:ext cx="2109978" cy="548640"/>
+          </a:xfrm>
+          <a:prstGeom prst="rect">
+            <a:avLst/>
+          </a:prstGeom>
+          <a:noFill/>
+          <a:ln/>
+        </p:spPr>
+        <p:txBody>
+          <a:bodyPr wrap="square" lIns="0" tIns="0" rIns="0" bIns="0" rtlCol="0" anchor="t"/>
+          <a:lstStyle/>
+          <a:p>
+            <a:pPr indent="0" marL="0">
+              <a:buNone/>
+            </a:pPr>
+            <a:r>
+              <a:rPr lang="en-US" sz="2200" b="1" dirty="0">
+                <a:solidFill>
+                  <a:schemeClr val="tx2"/>
+                </a:solidFill>
+              </a:rPr>
+              <a:t>Hypotes</a:t>
             </a:r>
             <a:endParaRPr lang="en-US" sz="2200" dirty="0"/>
           </a:p>
-          <a:p>
-            <a:pPr marL="342900" indent="-342900">
-              <a:spcAft>
-                <a:spcPts val="1000"/>
-              </a:spcAft>
-              <a:buSzPct val="100000"/>
-              <a:buChar char="•"/>
+        </p:txBody>
+      </p:sp>
+      <p:sp>
+        <p:nvSpPr>
+          <p:cNvPr id="13" name="Text 10"/>
+          <p:cNvSpPr txBox="1"/>
+          <p:nvPr/>
+        </p:nvSpPr>
+        <p:spPr>
+          <a:xfrm>
+            <a:off x="3618738" y="3017520"/>
+            <a:ext cx="2109978" cy="1463040"/>
+          </a:xfrm>
+          <a:prstGeom prst="rect">
+            <a:avLst/>
+          </a:prstGeom>
+          <a:noFill/>
+          <a:ln/>
+        </p:spPr>
+        <p:txBody>
+          <a:bodyPr wrap="square" lIns="0" tIns="0" rIns="0" bIns="0" rtlCol="0" anchor="t"/>
+          <a:lstStyle/>
+          <a:p>
+            <a:pPr indent="0" marL="0">
+              <a:buNone/>
             </a:pPr>
             <a:r>
-              <a:rPr lang="en-US" sz="2200" dirty="0">
+              <a:rPr lang="en-US" sz="1800" dirty="0">
                 <a:solidFill>
                   <a:schemeClr val="tx1"/>
                 </a:solidFill>
               </a:rPr>
-              <a:t>Linjediagram: förändring över tid, tid på x-axeln.</a:t>
+              <a:t>Vad tror du, och varför?</a:t>
+            </a:r>
+            <a:endParaRPr lang="en-US" sz="1800" dirty="0"/>
+          </a:p>
+        </p:txBody>
+      </p:sp>
+      <p:sp>
+        <p:nvSpPr>
+          <p:cNvPr id="14" name="Kort 3"/>
+          <p:cNvSpPr/>
+          <p:nvPr/>
+        </p:nvSpPr>
+        <p:spPr>
+          <a:xfrm>
+            <a:off x="6231636" y="1554480"/>
+            <a:ext cx="2567178" cy="3108960"/>
+          </a:xfrm>
+          <a:prstGeom prst="roundRect">
+            <a:avLst>
+              <a:gd name="adj" fmla="val 4274"/>
+            </a:avLst>
+          </a:prstGeom>
+          <a:solidFill>
+            <a:schemeClr val="bg2"/>
+          </a:solidFill>
+          <a:ln w="12700">
+            <a:solidFill>
+              <a:schemeClr val="bg2"/>
+            </a:solidFill>
+            <a:prstDash val="solid"/>
+          </a:ln>
+        </p:spPr>
+      </p:sp>
+      <p:sp>
+        <p:nvSpPr>
+          <p:cNvPr id="15" name="Siffra 3"/>
+          <p:cNvSpPr/>
+          <p:nvPr/>
+        </p:nvSpPr>
+        <p:spPr>
+          <a:xfrm>
+            <a:off x="6460236" y="1783080"/>
+            <a:ext cx="502920" cy="502920"/>
+          </a:xfrm>
+          <a:prstGeom prst="ellipse">
+            <a:avLst/>
+          </a:prstGeom>
+          <a:solidFill>
+            <a:schemeClr val="accent4"/>
+          </a:solidFill>
+          <a:ln w="12700">
+            <a:solidFill>
+              <a:schemeClr val="accent4"/>
+            </a:solidFill>
+            <a:prstDash val="solid"/>
+          </a:ln>
+        </p:spPr>
+      </p:sp>
+      <p:sp>
+        <p:nvSpPr>
+          <p:cNvPr id="16" name="Text 13"/>
+          <p:cNvSpPr txBox="1"/>
+          <p:nvPr/>
+        </p:nvSpPr>
+        <p:spPr>
+          <a:xfrm>
+            <a:off x="6460236" y="1783080"/>
+            <a:ext cx="502920" cy="502920"/>
+          </a:xfrm>
+          <a:prstGeom prst="rect">
+            <a:avLst/>
+          </a:prstGeom>
+          <a:noFill/>
+          <a:ln/>
+        </p:spPr>
+        <p:txBody>
+          <a:bodyPr wrap="square" lIns="0" tIns="0" rIns="0" bIns="0" rtlCol="0" anchor="ctr"/>
+          <a:lstStyle/>
+          <a:p>
+            <a:pPr algn="ctr" indent="0" marL="0">
+              <a:buNone/>
+            </a:pPr>
+            <a:r>
+              <a:rPr lang="en-US" sz="1800" b="1" dirty="0">
+                <a:solidFill>
+                  <a:schemeClr val="bg1"/>
+                </a:solidFill>
+              </a:rPr>
+              <a:t>3</a:t>
+            </a:r>
+            <a:endParaRPr lang="en-US" sz="1800" dirty="0"/>
+          </a:p>
+        </p:txBody>
+      </p:sp>
+      <p:sp>
+        <p:nvSpPr>
+          <p:cNvPr id="17" name="Text 14"/>
+          <p:cNvSpPr txBox="1"/>
+          <p:nvPr/>
+        </p:nvSpPr>
+        <p:spPr>
+          <a:xfrm>
+            <a:off x="6460236" y="2423160"/>
+            <a:ext cx="2109978" cy="548640"/>
+          </a:xfrm>
+          <a:prstGeom prst="rect">
+            <a:avLst/>
+          </a:prstGeom>
+          <a:noFill/>
+          <a:ln/>
+        </p:spPr>
+        <p:txBody>
+          <a:bodyPr wrap="square" lIns="0" tIns="0" rIns="0" bIns="0" rtlCol="0" anchor="t"/>
+          <a:lstStyle/>
+          <a:p>
+            <a:pPr indent="0" marL="0">
+              <a:buNone/>
+            </a:pPr>
+            <a:r>
+              <a:rPr lang="en-US" sz="2200" b="1" dirty="0">
+                <a:solidFill>
+                  <a:schemeClr val="tx2"/>
+                </a:solidFill>
+              </a:rPr>
+              <a:t>Material och metod</a:t>
             </a:r>
             <a:endParaRPr lang="en-US" sz="2200" dirty="0"/>
           </a:p>
-          <a:p>
-            <a:pPr marL="342900" indent="-342900">
-              <a:spcAft>
-                <a:spcPts val="1000"/>
-              </a:spcAft>
-              <a:buSzPct val="100000"/>
-              <a:buChar char="•"/>
+        </p:txBody>
+      </p:sp>
+      <p:sp>
+        <p:nvSpPr>
+          <p:cNvPr id="18" name="Text 15"/>
+          <p:cNvSpPr txBox="1"/>
+          <p:nvPr/>
+        </p:nvSpPr>
+        <p:spPr>
+          <a:xfrm>
+            <a:off x="6460236" y="3017520"/>
+            <a:ext cx="2109978" cy="1463040"/>
+          </a:xfrm>
+          <a:prstGeom prst="rect">
+            <a:avLst/>
+          </a:prstGeom>
+          <a:noFill/>
+          <a:ln/>
+        </p:spPr>
+        <p:txBody>
+          <a:bodyPr wrap="square" lIns="0" tIns="0" rIns="0" bIns="0" rtlCol="0" anchor="t"/>
+          <a:lstStyle/>
+          <a:p>
+            <a:pPr indent="0" marL="0">
+              <a:buNone/>
             </a:pPr>
             <a:r>
-              <a:rPr lang="en-US" sz="2200" dirty="0">
+              <a:rPr lang="en-US" sz="1800" dirty="0">
                 <a:solidFill>
                   <a:schemeClr val="tx1"/>
                 </a:solidFill>
               </a:rPr>
-              <a:t>Rubrik, namn och enhet på axlarna.</a:t>
+              <a:t>Vad använde du, hur gjorde du?</a:t>
+            </a:r>
+            <a:endParaRPr lang="en-US" sz="1800" dirty="0"/>
+          </a:p>
+        </p:txBody>
+      </p:sp>
+      <p:sp>
+        <p:nvSpPr>
+          <p:cNvPr id="19" name="Kort 4"/>
+          <p:cNvSpPr/>
+          <p:nvPr/>
+        </p:nvSpPr>
+        <p:spPr>
+          <a:xfrm>
+            <a:off x="9073134" y="1554480"/>
+            <a:ext cx="2567178" cy="3108960"/>
+          </a:xfrm>
+          <a:prstGeom prst="roundRect">
+            <a:avLst>
+              <a:gd name="adj" fmla="val 4274"/>
+            </a:avLst>
+          </a:prstGeom>
+          <a:solidFill>
+            <a:schemeClr val="bg2"/>
+          </a:solidFill>
+          <a:ln w="12700">
+            <a:solidFill>
+              <a:schemeClr val="bg2"/>
+            </a:solidFill>
+            <a:prstDash val="solid"/>
+          </a:ln>
+        </p:spPr>
+      </p:sp>
+      <p:sp>
+        <p:nvSpPr>
+          <p:cNvPr id="20" name="Siffra 4"/>
+          <p:cNvSpPr/>
+          <p:nvPr/>
+        </p:nvSpPr>
+        <p:spPr>
+          <a:xfrm>
+            <a:off x="9301734" y="1783080"/>
+            <a:ext cx="502920" cy="502920"/>
+          </a:xfrm>
+          <a:prstGeom prst="ellipse">
+            <a:avLst/>
+          </a:prstGeom>
+          <a:solidFill>
+            <a:schemeClr val="accent5"/>
+          </a:solidFill>
+          <a:ln w="12700">
+            <a:solidFill>
+              <a:schemeClr val="accent5"/>
+            </a:solidFill>
+            <a:prstDash val="solid"/>
+          </a:ln>
+        </p:spPr>
+      </p:sp>
+      <p:sp>
+        <p:nvSpPr>
+          <p:cNvPr id="21" name="Text 18"/>
+          <p:cNvSpPr txBox="1"/>
+          <p:nvPr/>
+        </p:nvSpPr>
+        <p:spPr>
+          <a:xfrm>
+            <a:off x="9301734" y="1783080"/>
+            <a:ext cx="502920" cy="502920"/>
+          </a:xfrm>
+          <a:prstGeom prst="rect">
+            <a:avLst/>
+          </a:prstGeom>
+          <a:noFill/>
+          <a:ln/>
+        </p:spPr>
+        <p:txBody>
+          <a:bodyPr wrap="square" lIns="0" tIns="0" rIns="0" bIns="0" rtlCol="0" anchor="ctr"/>
+          <a:lstStyle/>
+          <a:p>
+            <a:pPr algn="ctr" indent="0" marL="0">
+              <a:buNone/>
+            </a:pPr>
+            <a:r>
+              <a:rPr lang="en-US" sz="1800" b="1" dirty="0">
+                <a:solidFill>
+                  <a:schemeClr val="bg1"/>
+                </a:solidFill>
+              </a:rPr>
+              <a:t>4</a:t>
+            </a:r>
+            <a:endParaRPr lang="en-US" sz="1800" dirty="0"/>
+          </a:p>
+        </p:txBody>
+      </p:sp>
+      <p:sp>
+        <p:nvSpPr>
+          <p:cNvPr id="22" name="Text 19"/>
+          <p:cNvSpPr txBox="1"/>
+          <p:nvPr/>
+        </p:nvSpPr>
+        <p:spPr>
+          <a:xfrm>
+            <a:off x="9301734" y="2423160"/>
+            <a:ext cx="2109978" cy="548640"/>
+          </a:xfrm>
+          <a:prstGeom prst="rect">
+            <a:avLst/>
+          </a:prstGeom>
+          <a:noFill/>
+          <a:ln/>
+        </p:spPr>
+        <p:txBody>
+          <a:bodyPr wrap="square" lIns="0" tIns="0" rIns="0" bIns="0" rtlCol="0" anchor="t"/>
+          <a:lstStyle/>
+          <a:p>
+            <a:pPr indent="0" marL="0">
+              <a:buNone/>
+            </a:pPr>
+            <a:r>
+              <a:rPr lang="en-US" sz="2200" b="1" dirty="0">
+                <a:solidFill>
+                  <a:schemeClr val="tx2"/>
+                </a:solidFill>
+              </a:rPr>
+              <a:t>Resultat</a:t>
             </a:r>
             <a:endParaRPr lang="en-US" sz="2200" dirty="0"/>
           </a:p>
-          <a:p>
-            <a:pPr marL="342900" indent="-342900">
-              <a:spcAft>
-                <a:spcPts val="1000"/>
-              </a:spcAft>
-              <a:buSzPct val="100000"/>
-              <a:buChar char="•"/>
+        </p:txBody>
+      </p:sp>
+      <p:sp>
+        <p:nvSpPr>
+          <p:cNvPr id="23" name="Text 20"/>
+          <p:cNvSpPr txBox="1"/>
+          <p:nvPr/>
+        </p:nvSpPr>
+        <p:spPr>
+          <a:xfrm>
+            <a:off x="9301734" y="3017520"/>
+            <a:ext cx="2109978" cy="1463040"/>
+          </a:xfrm>
+          <a:prstGeom prst="rect">
+            <a:avLst/>
+          </a:prstGeom>
+          <a:noFill/>
+          <a:ln/>
+        </p:spPr>
+        <p:txBody>
+          <a:bodyPr wrap="square" lIns="0" tIns="0" rIns="0" bIns="0" rtlCol="0" anchor="t"/>
+          <a:lstStyle/>
+          <a:p>
+            <a:pPr indent="0" marL="0">
+              <a:buNone/>
             </a:pPr>
             <a:r>
-              <a:rPr lang="en-US" sz="2200" dirty="0">
+              <a:rPr lang="en-US" sz="1800" dirty="0">
                 <a:solidFill>
                   <a:schemeClr val="tx1"/>
                 </a:solidFill>
               </a:rPr>
-              <a:t>Läs av: högst stapel, skillnad, enhet.</a:t>
-            </a:r>
-            <a:endParaRPr lang="en-US" sz="2200" dirty="0"/>
-          </a:p>
-        </p:txBody>
-      </p:sp>
-      <p:graphicFrame>
-        <p:nvGraphicFramePr>
-          <p:cNvPr id="5" name="Chart 0" descr=""/>
-          <p:cNvGraphicFramePr/>
+              <a:t>Tabell och diagram.</a:t>
+            </a:r>
+            <a:endParaRPr lang="en-US" sz="1800" dirty="0"/>
+          </a:p>
+        </p:txBody>
+      </p:sp>
+      <p:sp>
+        <p:nvSpPr>
+          <p:cNvPr id="24" name="Text 21"/>
+          <p:cNvSpPr txBox="1"/>
           <p:nvPr/>
-        </p:nvGraphicFramePr>
-        <p:xfrm>
-          <a:off x="6035040" y="1463040"/>
-          <a:ext cx="5577840" cy="4572000"/>
-        </p:xfrm>
-        <a:graphic xmlns:a="http://schemas.openxmlformats.org/drawingml/2006/main">
-          <a:graphicData uri="http://schemas.openxmlformats.org/drawingml/2006/chart">
-            <c:chart xmlns:c="http://schemas.openxmlformats.org/drawingml/2006/chart" r:id="rId1"/>
-          </a:graphicData>
-        </a:graphic>
-      </p:graphicFrame>
+        </p:nvSpPr>
+        <p:spPr>
+          <a:xfrm>
+            <a:off x="548640" y="5623560"/>
+            <a:ext cx="11091672" cy="640080"/>
+          </a:xfrm>
+          <a:prstGeom prst="rect">
+            <a:avLst/>
+          </a:prstGeom>
+          <a:noFill/>
+          <a:ln/>
+        </p:spPr>
+        <p:txBody>
+          <a:bodyPr wrap="square" lIns="0" tIns="0" rIns="0" bIns="0" rtlCol="0" anchor="ctr"/>
+          <a:lstStyle/>
+          <a:p>
+            <a:pPr indent="0" marL="0">
+              <a:buNone/>
+            </a:pPr>
+            <a:r>
+              <a:rPr lang="en-US" sz="1600" b="1" dirty="0">
+                <a:solidFill>
+                  <a:schemeClr val="accent2"/>
+                </a:solidFill>
+              </a:rPr>
+              <a:t>Sist: diskussion och slutsats. Vad betyder resultatet? Felkällor?</a:t>
+            </a:r>
+            <a:endParaRPr lang="en-US" sz="1600" dirty="0"/>
+          </a:p>
+        </p:txBody>
+      </p:sp>
       <p:sp>
         <p:nvSpPr>
           <p:cNvPr id="25" name="Slide Number Placeholder 0"/>
@@ -4958,7 +4552,7 @@
                   <a:schemeClr val="tx2"/>
                 </a:solidFill>
               </a:rPr>
-              <a:t>Så skriver du en rapport</a:t>
+              <a:t>Kolla dig själv: 1.1.2</a:t>
             </a:r>
             <a:endParaRPr lang="en-US" sz="3600" dirty="0"/>
           </a:p>
@@ -4966,26 +4560,26 @@
       </p:sp>
       <p:sp>
         <p:nvSpPr>
-          <p:cNvPr id="4" name="Kort 1"/>
+          <p:cNvPr id="4" name="Kolla dig själv"/>
           <p:cNvSpPr/>
           <p:nvPr/>
         </p:nvSpPr>
         <p:spPr>
           <a:xfrm>
             <a:off x="548640" y="1554480"/>
-            <a:ext cx="2567178" cy="3108960"/>
+            <a:ext cx="11091672" cy="4297680"/>
           </a:xfrm>
           <a:prstGeom prst="roundRect">
             <a:avLst>
-              <a:gd name="adj" fmla="val 4274"/>
+              <a:gd name="adj" fmla="val 3191"/>
             </a:avLst>
           </a:prstGeom>
           <a:solidFill>
             <a:schemeClr val="bg2"/>
           </a:solidFill>
-          <a:ln w="12700">
+          <a:ln w="25400">
             <a:solidFill>
-              <a:schemeClr val="bg2"/>
+              <a:schemeClr val="accent3"/>
             </a:solidFill>
             <a:prstDash val="solid"/>
           </a:ln>
@@ -4993,28 +4587,39 @@
       </p:sp>
       <p:sp>
         <p:nvSpPr>
-          <p:cNvPr id="5" name="Siffra 1"/>
-          <p:cNvSpPr/>
+          <p:cNvPr id="5" name="Text 2"/>
+          <p:cNvSpPr txBox="1"/>
           <p:nvPr/>
         </p:nvSpPr>
         <p:spPr>
           <a:xfrm>
-            <a:off x="777240" y="1783080"/>
-            <a:ext cx="502920" cy="502920"/>
-          </a:xfrm>
-          <a:prstGeom prst="ellipse">
+            <a:off x="914400" y="1737360"/>
+            <a:ext cx="5486400" cy="365760"/>
+          </a:xfrm>
+          <a:prstGeom prst="rect">
             <a:avLst/>
           </a:prstGeom>
-          <a:solidFill>
-            <a:schemeClr val="accent1"/>
-          </a:solidFill>
-          <a:ln w="12700">
-            <a:solidFill>
-              <a:schemeClr val="accent1"/>
-            </a:solidFill>
-            <a:prstDash val="solid"/>
-          </a:ln>
-        </p:spPr>
+          <a:noFill/>
+          <a:ln/>
+        </p:spPr>
+        <p:txBody>
+          <a:bodyPr wrap="square" lIns="0" tIns="0" rIns="0" bIns="0" rtlCol="0" anchor="ctr"/>
+          <a:lstStyle/>
+          <a:p>
+            <a:pPr indent="0" marL="0">
+              <a:buNone/>
+            </a:pPr>
+            <a:r>
+              <a:rPr lang="en-US" sz="1400" b="1" spc="300" kern="0" dirty="0">
+                <a:solidFill>
+                  <a:schemeClr val="accent1"/>
+                </a:solidFill>
+              </a:rPr>
+              <a:t>KOLLA DIG SJÄLV</a:t>
+            </a:r>
+            <a:endParaRPr lang="en-US" sz="1400" dirty="0"/>
+          </a:p>
+        </p:txBody>
       </p:sp>
       <p:sp>
         <p:nvSpPr>
@@ -5024,8 +4629,8 @@
         </p:nvSpPr>
         <p:spPr>
           <a:xfrm>
-            <a:off x="777240" y="1783080"/>
-            <a:ext cx="502920" cy="502920"/>
+            <a:off x="914400" y="2194560"/>
+            <a:ext cx="10360152" cy="3474720"/>
           </a:xfrm>
           <a:prstGeom prst="rect">
             <a:avLst/>
@@ -5034,609 +4639,83 @@
           <a:ln/>
         </p:spPr>
         <p:txBody>
-          <a:bodyPr wrap="square" lIns="0" tIns="0" rIns="0" bIns="0" rtlCol="0" anchor="ctr"/>
-          <a:lstStyle/>
-          <a:p>
-            <a:pPr algn="ctr" indent="0" marL="0">
-              <a:buNone/>
+          <a:bodyPr wrap="square" lIns="0" tIns="0" rIns="0" bIns="0" rtlCol="0" anchor="t"/>
+          <a:lstStyle/>
+          <a:p>
+            <a:pPr marL="342900" indent="-342900">
+              <a:spcAft>
+                <a:spcPts val="1200"/>
+              </a:spcAft>
+              <a:buSzPct val="100000"/>
+              <a:buFont typeface="+mj-lt"/>
+              <a:buAutoNum type="arabicPeriod" startAt="1"/>
             </a:pPr>
             <a:r>
-              <a:rPr lang="en-US" sz="1800" b="1" dirty="0">
-                <a:solidFill>
-                  <a:schemeClr val="bg1"/>
+              <a:rPr lang="en-US" sz="2600" dirty="0">
+                <a:solidFill>
+                  <a:schemeClr val="tx1"/>
                 </a:solidFill>
               </a:rPr>
-              <a:t>1</a:t>
-            </a:r>
-            <a:endParaRPr lang="en-US" sz="1800" dirty="0"/>
-          </a:p>
-        </p:txBody>
-      </p:sp>
-      <p:sp>
-        <p:nvSpPr>
-          <p:cNvPr id="7" name="Text 4"/>
-          <p:cNvSpPr txBox="1"/>
-          <p:nvPr/>
-        </p:nvSpPr>
-        <p:spPr>
-          <a:xfrm>
-            <a:off x="777240" y="2423160"/>
-            <a:ext cx="2109978" cy="548640"/>
-          </a:xfrm>
-          <a:prstGeom prst="rect">
-            <a:avLst/>
-          </a:prstGeom>
-          <a:noFill/>
-          <a:ln/>
-        </p:spPr>
-        <p:txBody>
-          <a:bodyPr wrap="square" lIns="0" tIns="0" rIns="0" bIns="0" rtlCol="0" anchor="t"/>
-          <a:lstStyle/>
-          <a:p>
-            <a:pPr indent="0" marL="0">
-              <a:buNone/>
+              <a:t>Vad ska en tabell innehålla?</a:t>
+            </a:r>
+            <a:endParaRPr lang="en-US" sz="2600" dirty="0"/>
+          </a:p>
+          <a:p>
+            <a:pPr marL="342900" indent="-342900">
+              <a:spcAft>
+                <a:spcPts val="1200"/>
+              </a:spcAft>
+              <a:buSzPct val="100000"/>
+              <a:buFont typeface="+mj-lt"/>
+              <a:buAutoNum type="arabicPeriod" startAt="1"/>
             </a:pPr>
             <a:r>
-              <a:rPr lang="en-US" sz="2200" b="1" dirty="0">
-                <a:solidFill>
-                  <a:schemeClr val="tx2"/>
+              <a:rPr lang="en-US" sz="2600" dirty="0">
+                <a:solidFill>
+                  <a:schemeClr val="tx1"/>
                 </a:solidFill>
               </a:rPr>
-              <a:t>Syfte</a:t>
-            </a:r>
-            <a:endParaRPr lang="en-US" sz="2200" dirty="0"/>
-          </a:p>
-        </p:txBody>
-      </p:sp>
-      <p:sp>
-        <p:nvSpPr>
-          <p:cNvPr id="8" name="Text 5"/>
-          <p:cNvSpPr txBox="1"/>
-          <p:nvPr/>
-        </p:nvSpPr>
-        <p:spPr>
-          <a:xfrm>
-            <a:off x="777240" y="3017520"/>
-            <a:ext cx="2109978" cy="1463040"/>
-          </a:xfrm>
-          <a:prstGeom prst="rect">
-            <a:avLst/>
-          </a:prstGeom>
-          <a:noFill/>
-          <a:ln/>
-        </p:spPr>
-        <p:txBody>
-          <a:bodyPr wrap="square" lIns="0" tIns="0" rIns="0" bIns="0" rtlCol="0" anchor="t"/>
-          <a:lstStyle/>
-          <a:p>
-            <a:pPr indent="0" marL="0">
-              <a:buNone/>
+              <a:t>När passar stapeldiagram, och när linjediagram?</a:t>
+            </a:r>
+            <a:endParaRPr lang="en-US" sz="2600" dirty="0"/>
+          </a:p>
+          <a:p>
+            <a:pPr marL="342900" indent="-342900">
+              <a:spcAft>
+                <a:spcPts val="1200"/>
+              </a:spcAft>
+              <a:buSzPct val="100000"/>
+              <a:buFont typeface="+mj-lt"/>
+              <a:buAutoNum type="arabicPeriod" startAt="1"/>
             </a:pPr>
             <a:r>
-              <a:rPr lang="en-US" sz="1800" dirty="0">
+              <a:rPr lang="en-US" sz="2600" dirty="0">
                 <a:solidFill>
                   <a:schemeClr val="tx1"/>
                 </a:solidFill>
               </a:rPr>
-              <a:t>Vad vill du ta reda på?</a:t>
-            </a:r>
-            <a:endParaRPr lang="en-US" sz="1800" dirty="0"/>
-          </a:p>
-        </p:txBody>
-      </p:sp>
-      <p:sp>
-        <p:nvSpPr>
-          <p:cNvPr id="9" name="Kort 2"/>
-          <p:cNvSpPr/>
-          <p:nvPr/>
-        </p:nvSpPr>
-        <p:spPr>
-          <a:xfrm>
-            <a:off x="3390138" y="1554480"/>
-            <a:ext cx="2567178" cy="3108960"/>
-          </a:xfrm>
-          <a:prstGeom prst="roundRect">
-            <a:avLst>
-              <a:gd name="adj" fmla="val 4274"/>
-            </a:avLst>
-          </a:prstGeom>
-          <a:solidFill>
-            <a:schemeClr val="bg2"/>
-          </a:solidFill>
-          <a:ln w="12700">
-            <a:solidFill>
-              <a:schemeClr val="bg2"/>
-            </a:solidFill>
-            <a:prstDash val="solid"/>
-          </a:ln>
-        </p:spPr>
-      </p:sp>
-      <p:sp>
-        <p:nvSpPr>
-          <p:cNvPr id="10" name="Siffra 2"/>
-          <p:cNvSpPr/>
-          <p:nvPr/>
-        </p:nvSpPr>
-        <p:spPr>
-          <a:xfrm>
-            <a:off x="3618738" y="1783080"/>
-            <a:ext cx="502920" cy="502920"/>
-          </a:xfrm>
-          <a:prstGeom prst="ellipse">
-            <a:avLst/>
-          </a:prstGeom>
-          <a:solidFill>
-            <a:schemeClr val="accent2"/>
-          </a:solidFill>
-          <a:ln w="12700">
-            <a:solidFill>
-              <a:schemeClr val="accent2"/>
-            </a:solidFill>
-            <a:prstDash val="solid"/>
-          </a:ln>
-        </p:spPr>
-      </p:sp>
-      <p:sp>
-        <p:nvSpPr>
-          <p:cNvPr id="11" name="Text 8"/>
-          <p:cNvSpPr txBox="1"/>
-          <p:nvPr/>
-        </p:nvSpPr>
-        <p:spPr>
-          <a:xfrm>
-            <a:off x="3618738" y="1783080"/>
-            <a:ext cx="502920" cy="502920"/>
-          </a:xfrm>
-          <a:prstGeom prst="rect">
-            <a:avLst/>
-          </a:prstGeom>
-          <a:noFill/>
-          <a:ln/>
-        </p:spPr>
-        <p:txBody>
-          <a:bodyPr wrap="square" lIns="0" tIns="0" rIns="0" bIns="0" rtlCol="0" anchor="ctr"/>
-          <a:lstStyle/>
-          <a:p>
-            <a:pPr algn="ctr" indent="0" marL="0">
-              <a:buNone/>
+              <a:t>Räkna medelvärdet av 12, 14 och 13 mm.</a:t>
+            </a:r>
+            <a:endParaRPr lang="en-US" sz="2600" dirty="0"/>
+          </a:p>
+          <a:p>
+            <a:pPr marL="342900" indent="-342900">
+              <a:spcAft>
+                <a:spcPts val="1200"/>
+              </a:spcAft>
+              <a:buSzPct val="100000"/>
+              <a:buFont typeface="+mj-lt"/>
+              <a:buAutoNum type="arabicPeriod" startAt="1"/>
             </a:pPr>
             <a:r>
-              <a:rPr lang="en-US" sz="1800" b="1" dirty="0">
-                <a:solidFill>
-                  <a:schemeClr val="bg1"/>
+              <a:rPr lang="en-US" sz="2600" dirty="0">
+                <a:solidFill>
+                  <a:schemeClr val="tx1"/>
                 </a:solidFill>
               </a:rPr>
-              <a:t>2</a:t>
-            </a:r>
-            <a:endParaRPr lang="en-US" sz="1800" dirty="0"/>
-          </a:p>
-        </p:txBody>
-      </p:sp>
-      <p:sp>
-        <p:nvSpPr>
-          <p:cNvPr id="12" name="Text 9"/>
-          <p:cNvSpPr txBox="1"/>
-          <p:nvPr/>
-        </p:nvSpPr>
-        <p:spPr>
-          <a:xfrm>
-            <a:off x="3618738" y="2423160"/>
-            <a:ext cx="2109978" cy="548640"/>
-          </a:xfrm>
-          <a:prstGeom prst="rect">
-            <a:avLst/>
-          </a:prstGeom>
-          <a:noFill/>
-          <a:ln/>
-        </p:spPr>
-        <p:txBody>
-          <a:bodyPr wrap="square" lIns="0" tIns="0" rIns="0" bIns="0" rtlCol="0" anchor="t"/>
-          <a:lstStyle/>
-          <a:p>
-            <a:pPr indent="0" marL="0">
-              <a:buNone/>
-            </a:pPr>
-            <a:r>
-              <a:rPr lang="en-US" sz="2200" b="1" dirty="0">
-                <a:solidFill>
-                  <a:schemeClr val="tx2"/>
-                </a:solidFill>
-              </a:rPr>
-              <a:t>Hypotes</a:t>
-            </a:r>
-            <a:endParaRPr lang="en-US" sz="2200" dirty="0"/>
-          </a:p>
-        </p:txBody>
-      </p:sp>
-      <p:sp>
-        <p:nvSpPr>
-          <p:cNvPr id="13" name="Text 10"/>
-          <p:cNvSpPr txBox="1"/>
-          <p:nvPr/>
-        </p:nvSpPr>
-        <p:spPr>
-          <a:xfrm>
-            <a:off x="3618738" y="3017520"/>
-            <a:ext cx="2109978" cy="1463040"/>
-          </a:xfrm>
-          <a:prstGeom prst="rect">
-            <a:avLst/>
-          </a:prstGeom>
-          <a:noFill/>
-          <a:ln/>
-        </p:spPr>
-        <p:txBody>
-          <a:bodyPr wrap="square" lIns="0" tIns="0" rIns="0" bIns="0" rtlCol="0" anchor="t"/>
-          <a:lstStyle/>
-          <a:p>
-            <a:pPr indent="0" marL="0">
-              <a:buNone/>
-            </a:pPr>
-            <a:r>
-              <a:rPr lang="en-US" sz="1800" dirty="0">
-                <a:solidFill>
-                  <a:schemeClr val="tx1"/>
-                </a:solidFill>
-              </a:rPr>
-              <a:t>Vad tror du, och varför?</a:t>
-            </a:r>
-            <a:endParaRPr lang="en-US" sz="1800" dirty="0"/>
-          </a:p>
-        </p:txBody>
-      </p:sp>
-      <p:sp>
-        <p:nvSpPr>
-          <p:cNvPr id="14" name="Kort 3"/>
-          <p:cNvSpPr/>
-          <p:nvPr/>
-        </p:nvSpPr>
-        <p:spPr>
-          <a:xfrm>
-            <a:off x="6231636" y="1554480"/>
-            <a:ext cx="2567178" cy="3108960"/>
-          </a:xfrm>
-          <a:prstGeom prst="roundRect">
-            <a:avLst>
-              <a:gd name="adj" fmla="val 4274"/>
-            </a:avLst>
-          </a:prstGeom>
-          <a:solidFill>
-            <a:schemeClr val="bg2"/>
-          </a:solidFill>
-          <a:ln w="12700">
-            <a:solidFill>
-              <a:schemeClr val="bg2"/>
-            </a:solidFill>
-            <a:prstDash val="solid"/>
-          </a:ln>
-        </p:spPr>
-      </p:sp>
-      <p:sp>
-        <p:nvSpPr>
-          <p:cNvPr id="15" name="Siffra 3"/>
-          <p:cNvSpPr/>
-          <p:nvPr/>
-        </p:nvSpPr>
-        <p:spPr>
-          <a:xfrm>
-            <a:off x="6460236" y="1783080"/>
-            <a:ext cx="502920" cy="502920"/>
-          </a:xfrm>
-          <a:prstGeom prst="ellipse">
-            <a:avLst/>
-          </a:prstGeom>
-          <a:solidFill>
-            <a:schemeClr val="accent4"/>
-          </a:solidFill>
-          <a:ln w="12700">
-            <a:solidFill>
-              <a:schemeClr val="accent4"/>
-            </a:solidFill>
-            <a:prstDash val="solid"/>
-          </a:ln>
-        </p:spPr>
-      </p:sp>
-      <p:sp>
-        <p:nvSpPr>
-          <p:cNvPr id="16" name="Text 13"/>
-          <p:cNvSpPr txBox="1"/>
-          <p:nvPr/>
-        </p:nvSpPr>
-        <p:spPr>
-          <a:xfrm>
-            <a:off x="6460236" y="1783080"/>
-            <a:ext cx="502920" cy="502920"/>
-          </a:xfrm>
-          <a:prstGeom prst="rect">
-            <a:avLst/>
-          </a:prstGeom>
-          <a:noFill/>
-          <a:ln/>
-        </p:spPr>
-        <p:txBody>
-          <a:bodyPr wrap="square" lIns="0" tIns="0" rIns="0" bIns="0" rtlCol="0" anchor="ctr"/>
-          <a:lstStyle/>
-          <a:p>
-            <a:pPr algn="ctr" indent="0" marL="0">
-              <a:buNone/>
-            </a:pPr>
-            <a:r>
-              <a:rPr lang="en-US" sz="1800" b="1" dirty="0">
-                <a:solidFill>
-                  <a:schemeClr val="bg1"/>
-                </a:solidFill>
-              </a:rPr>
-              <a:t>3</a:t>
-            </a:r>
-            <a:endParaRPr lang="en-US" sz="1800" dirty="0"/>
-          </a:p>
-        </p:txBody>
-      </p:sp>
-      <p:sp>
-        <p:nvSpPr>
-          <p:cNvPr id="17" name="Text 14"/>
-          <p:cNvSpPr txBox="1"/>
-          <p:nvPr/>
-        </p:nvSpPr>
-        <p:spPr>
-          <a:xfrm>
-            <a:off x="6460236" y="2423160"/>
-            <a:ext cx="2109978" cy="548640"/>
-          </a:xfrm>
-          <a:prstGeom prst="rect">
-            <a:avLst/>
-          </a:prstGeom>
-          <a:noFill/>
-          <a:ln/>
-        </p:spPr>
-        <p:txBody>
-          <a:bodyPr wrap="square" lIns="0" tIns="0" rIns="0" bIns="0" rtlCol="0" anchor="t"/>
-          <a:lstStyle/>
-          <a:p>
-            <a:pPr indent="0" marL="0">
-              <a:buNone/>
-            </a:pPr>
-            <a:r>
-              <a:rPr lang="en-US" sz="2200" b="1" dirty="0">
-                <a:solidFill>
-                  <a:schemeClr val="tx2"/>
-                </a:solidFill>
-              </a:rPr>
-              <a:t>Material och metod</a:t>
-            </a:r>
-            <a:endParaRPr lang="en-US" sz="2200" dirty="0"/>
-          </a:p>
-        </p:txBody>
-      </p:sp>
-      <p:sp>
-        <p:nvSpPr>
-          <p:cNvPr id="18" name="Text 15"/>
-          <p:cNvSpPr txBox="1"/>
-          <p:nvPr/>
-        </p:nvSpPr>
-        <p:spPr>
-          <a:xfrm>
-            <a:off x="6460236" y="3017520"/>
-            <a:ext cx="2109978" cy="1463040"/>
-          </a:xfrm>
-          <a:prstGeom prst="rect">
-            <a:avLst/>
-          </a:prstGeom>
-          <a:noFill/>
-          <a:ln/>
-        </p:spPr>
-        <p:txBody>
-          <a:bodyPr wrap="square" lIns="0" tIns="0" rIns="0" bIns="0" rtlCol="0" anchor="t"/>
-          <a:lstStyle/>
-          <a:p>
-            <a:pPr indent="0" marL="0">
-              <a:buNone/>
-            </a:pPr>
-            <a:r>
-              <a:rPr lang="en-US" sz="1800" dirty="0">
-                <a:solidFill>
-                  <a:schemeClr val="tx1"/>
-                </a:solidFill>
-              </a:rPr>
-              <a:t>Vad använde du, hur gjorde du?</a:t>
-            </a:r>
-            <a:endParaRPr lang="en-US" sz="1800" dirty="0"/>
-          </a:p>
-        </p:txBody>
-      </p:sp>
-      <p:sp>
-        <p:nvSpPr>
-          <p:cNvPr id="19" name="Kort 4"/>
-          <p:cNvSpPr/>
-          <p:nvPr/>
-        </p:nvSpPr>
-        <p:spPr>
-          <a:xfrm>
-            <a:off x="9073134" y="1554480"/>
-            <a:ext cx="2567178" cy="3108960"/>
-          </a:xfrm>
-          <a:prstGeom prst="roundRect">
-            <a:avLst>
-              <a:gd name="adj" fmla="val 4274"/>
-            </a:avLst>
-          </a:prstGeom>
-          <a:solidFill>
-            <a:schemeClr val="bg2"/>
-          </a:solidFill>
-          <a:ln w="12700">
-            <a:solidFill>
-              <a:schemeClr val="bg2"/>
-            </a:solidFill>
-            <a:prstDash val="solid"/>
-          </a:ln>
-        </p:spPr>
-      </p:sp>
-      <p:sp>
-        <p:nvSpPr>
-          <p:cNvPr id="20" name="Siffra 4"/>
-          <p:cNvSpPr/>
-          <p:nvPr/>
-        </p:nvSpPr>
-        <p:spPr>
-          <a:xfrm>
-            <a:off x="9301734" y="1783080"/>
-            <a:ext cx="502920" cy="502920"/>
-          </a:xfrm>
-          <a:prstGeom prst="ellipse">
-            <a:avLst/>
-          </a:prstGeom>
-          <a:solidFill>
-            <a:schemeClr val="accent5"/>
-          </a:solidFill>
-          <a:ln w="12700">
-            <a:solidFill>
-              <a:schemeClr val="accent5"/>
-            </a:solidFill>
-            <a:prstDash val="solid"/>
-          </a:ln>
-        </p:spPr>
-      </p:sp>
-      <p:sp>
-        <p:nvSpPr>
-          <p:cNvPr id="21" name="Text 18"/>
-          <p:cNvSpPr txBox="1"/>
-          <p:nvPr/>
-        </p:nvSpPr>
-        <p:spPr>
-          <a:xfrm>
-            <a:off x="9301734" y="1783080"/>
-            <a:ext cx="502920" cy="502920"/>
-          </a:xfrm>
-          <a:prstGeom prst="rect">
-            <a:avLst/>
-          </a:prstGeom>
-          <a:noFill/>
-          <a:ln/>
-        </p:spPr>
-        <p:txBody>
-          <a:bodyPr wrap="square" lIns="0" tIns="0" rIns="0" bIns="0" rtlCol="0" anchor="ctr"/>
-          <a:lstStyle/>
-          <a:p>
-            <a:pPr algn="ctr" indent="0" marL="0">
-              <a:buNone/>
-            </a:pPr>
-            <a:r>
-              <a:rPr lang="en-US" sz="1800" b="1" dirty="0">
-                <a:solidFill>
-                  <a:schemeClr val="bg1"/>
-                </a:solidFill>
-              </a:rPr>
-              <a:t>4</a:t>
-            </a:r>
-            <a:endParaRPr lang="en-US" sz="1800" dirty="0"/>
-          </a:p>
-        </p:txBody>
-      </p:sp>
-      <p:sp>
-        <p:nvSpPr>
-          <p:cNvPr id="22" name="Text 19"/>
-          <p:cNvSpPr txBox="1"/>
-          <p:nvPr/>
-        </p:nvSpPr>
-        <p:spPr>
-          <a:xfrm>
-            <a:off x="9301734" y="2423160"/>
-            <a:ext cx="2109978" cy="548640"/>
-          </a:xfrm>
-          <a:prstGeom prst="rect">
-            <a:avLst/>
-          </a:prstGeom>
-          <a:noFill/>
-          <a:ln/>
-        </p:spPr>
-        <p:txBody>
-          <a:bodyPr wrap="square" lIns="0" tIns="0" rIns="0" bIns="0" rtlCol="0" anchor="t"/>
-          <a:lstStyle/>
-          <a:p>
-            <a:pPr indent="0" marL="0">
-              <a:buNone/>
-            </a:pPr>
-            <a:r>
-              <a:rPr lang="en-US" sz="2200" b="1" dirty="0">
-                <a:solidFill>
-                  <a:schemeClr val="tx2"/>
-                </a:solidFill>
-              </a:rPr>
-              <a:t>Resultat</a:t>
-            </a:r>
-            <a:endParaRPr lang="en-US" sz="2200" dirty="0"/>
-          </a:p>
-        </p:txBody>
-      </p:sp>
-      <p:sp>
-        <p:nvSpPr>
-          <p:cNvPr id="23" name="Text 20"/>
-          <p:cNvSpPr txBox="1"/>
-          <p:nvPr/>
-        </p:nvSpPr>
-        <p:spPr>
-          <a:xfrm>
-            <a:off x="9301734" y="3017520"/>
-            <a:ext cx="2109978" cy="1463040"/>
-          </a:xfrm>
-          <a:prstGeom prst="rect">
-            <a:avLst/>
-          </a:prstGeom>
-          <a:noFill/>
-          <a:ln/>
-        </p:spPr>
-        <p:txBody>
-          <a:bodyPr wrap="square" lIns="0" tIns="0" rIns="0" bIns="0" rtlCol="0" anchor="t"/>
-          <a:lstStyle/>
-          <a:p>
-            <a:pPr indent="0" marL="0">
-              <a:buNone/>
-            </a:pPr>
-            <a:r>
-              <a:rPr lang="en-US" sz="1800" dirty="0">
-                <a:solidFill>
-                  <a:schemeClr val="tx1"/>
-                </a:solidFill>
-              </a:rPr>
-              <a:t>Tabell och diagram.</a:t>
-            </a:r>
-            <a:endParaRPr lang="en-US" sz="1800" dirty="0"/>
-          </a:p>
-        </p:txBody>
-      </p:sp>
-      <p:sp>
-        <p:nvSpPr>
-          <p:cNvPr id="24" name="Text 21"/>
-          <p:cNvSpPr txBox="1"/>
-          <p:nvPr/>
-        </p:nvSpPr>
-        <p:spPr>
-          <a:xfrm>
-            <a:off x="548640" y="5623560"/>
-            <a:ext cx="11091672" cy="640080"/>
-          </a:xfrm>
-          <a:prstGeom prst="rect">
-            <a:avLst/>
-          </a:prstGeom>
-          <a:noFill/>
-          <a:ln/>
-        </p:spPr>
-        <p:txBody>
-          <a:bodyPr wrap="square" lIns="0" tIns="0" rIns="0" bIns="0" rtlCol="0" anchor="ctr"/>
-          <a:lstStyle/>
-          <a:p>
-            <a:pPr indent="0" marL="0">
-              <a:buNone/>
-            </a:pPr>
-            <a:r>
-              <a:rPr lang="en-US" sz="1600" b="1" dirty="0">
-                <a:solidFill>
-                  <a:schemeClr val="accent2"/>
-                </a:solidFill>
-              </a:rPr>
-              <a:t>Sist: diskussion och slutsats. Vad betyder resultatet? Felkällor?</a:t>
-            </a:r>
-            <a:endParaRPr lang="en-US" sz="1600" dirty="0"/>
+              <a:t>Vilka delar ingår i en rapport?</a:t>
+            </a:r>
+            <a:endParaRPr lang="en-US" sz="2600" dirty="0"/>
           </a:p>
         </p:txBody>
       </p:sp>
@@ -5720,8 +4799,8 @@
         </p:nvSpPr>
         <p:spPr>
           <a:xfrm>
-            <a:off x="548640" y="320040"/>
-            <a:ext cx="11091672" cy="914400"/>
+            <a:off x="731520" y="2103120"/>
+            <a:ext cx="10698480" cy="1463040"/>
           </a:xfrm>
           <a:prstGeom prst="rect">
             <a:avLst/>
@@ -5737,54 +4816,29 @@
               <a:buNone/>
             </a:pPr>
             <a:r>
-              <a:rPr lang="en-US" sz="3600" b="1" dirty="0">
-                <a:solidFill>
-                  <a:schemeClr val="tx2"/>
+              <a:rPr lang="en-US" sz="4400" b="1" dirty="0">
+                <a:solidFill>
+                  <a:schemeClr val="bg1"/>
                 </a:solidFill>
               </a:rPr>
-              <a:t>Kolla dig själv: 1.1.2</a:t>
-            </a:r>
-            <a:endParaRPr lang="en-US" sz="3600" dirty="0"/>
-          </a:p>
-        </p:txBody>
-      </p:sp>
-      <p:sp>
-        <p:nvSpPr>
-          <p:cNvPr id="4" name="Kolla dig själv"/>
+              <a:t>1.1.3 Värdera</a:t>
+            </a:r>
+            <a:endParaRPr lang="en-US" sz="4400" dirty="0"/>
+          </a:p>
+        </p:txBody>
+      </p:sp>
+      <p:sp>
+        <p:nvSpPr>
+          <p:cNvPr id="4" name="Text 0"/>
           <p:cNvSpPr/>
-          <p:nvPr/>
-        </p:nvSpPr>
-        <p:spPr>
-          <a:xfrm>
-            <a:off x="548640" y="1554480"/>
-            <a:ext cx="11091672" cy="4297680"/>
-          </a:xfrm>
-          <a:prstGeom prst="roundRect">
-            <a:avLst>
-              <a:gd name="adj" fmla="val 3191"/>
-            </a:avLst>
-          </a:prstGeom>
-          <a:solidFill>
-            <a:schemeClr val="bg2"/>
-          </a:solidFill>
-          <a:ln w="25400">
-            <a:solidFill>
-              <a:schemeClr val="accent3"/>
-            </a:solidFill>
-            <a:prstDash val="solid"/>
-          </a:ln>
-        </p:spPr>
-      </p:sp>
-      <p:sp>
-        <p:nvSpPr>
-          <p:cNvPr id="5" name="Text 2"/>
-          <p:cNvSpPr txBox="1"/>
-          <p:nvPr/>
-        </p:nvSpPr>
-        <p:spPr>
-          <a:xfrm>
-            <a:off x="914400" y="1737360"/>
-            <a:ext cx="5486400" cy="365760"/>
+          <p:nvPr>
+            <p:ph idx="101" type="body" hasCustomPrompt="1"/>
+          </p:nvPr>
+        </p:nvSpPr>
+        <p:spPr>
+          <a:xfrm>
+            <a:off x="731520" y="3657600"/>
+            <a:ext cx="10698480" cy="822960"/>
           </a:xfrm>
           <a:prstGeom prst="rect">
             <a:avLst/>
@@ -5793,164 +4847,21 @@
           <a:ln/>
         </p:spPr>
         <p:txBody>
-          <a:bodyPr wrap="square" lIns="0" tIns="0" rIns="0" bIns="0" rtlCol="0" anchor="ctr"/>
-          <a:lstStyle/>
-          <a:p>
-            <a:pPr indent="0" marL="0">
+          <a:bodyPr wrap="square" lIns="0" tIns="0" rIns="0" bIns="0" rtlCol="0" anchor="t"/>
+          <a:lstStyle/>
+          <a:p>
+            <a:pPr algn="l" indent="0" marL="0">
               <a:buNone/>
             </a:pPr>
             <a:r>
-              <a:rPr lang="en-US" sz="1400" b="1" spc="300" kern="0" dirty="0">
-                <a:solidFill>
-                  <a:schemeClr val="accent1"/>
+              <a:rPr lang="en-US" sz="2200" dirty="0">
+                <a:solidFill>
+                  <a:schemeClr val="bg2"/>
                 </a:solidFill>
               </a:rPr>
-              <a:t>KOLLA DIG SJÄLV</a:t>
-            </a:r>
-            <a:endParaRPr lang="en-US" sz="1400" dirty="0"/>
-          </a:p>
-        </p:txBody>
-      </p:sp>
-      <p:sp>
-        <p:nvSpPr>
-          <p:cNvPr id="6" name="Text 3"/>
-          <p:cNvSpPr txBox="1"/>
-          <p:nvPr/>
-        </p:nvSpPr>
-        <p:spPr>
-          <a:xfrm>
-            <a:off x="914400" y="2194560"/>
-            <a:ext cx="10360152" cy="3474720"/>
-          </a:xfrm>
-          <a:prstGeom prst="rect">
-            <a:avLst/>
-          </a:prstGeom>
-          <a:noFill/>
-          <a:ln/>
-        </p:spPr>
-        <p:txBody>
-          <a:bodyPr wrap="square" lIns="0" tIns="0" rIns="0" bIns="0" rtlCol="0" anchor="t"/>
-          <a:lstStyle/>
-          <a:p>
-            <a:pPr marL="342900" indent="-342900">
-              <a:spcAft>
-                <a:spcPts val="1200"/>
-              </a:spcAft>
-              <a:buSzPct val="100000"/>
-              <a:buFont typeface="+mj-lt"/>
-              <a:buAutoNum type="arabicPeriod" startAt="1"/>
-            </a:pPr>
-            <a:r>
-              <a:rPr lang="en-US" sz="2600" dirty="0">
-                <a:solidFill>
-                  <a:schemeClr val="tx1"/>
-                </a:solidFill>
-              </a:rPr>
-              <a:t>Vad ska en tabell innehålla?</a:t>
-            </a:r>
-            <a:endParaRPr lang="en-US" sz="2600" dirty="0"/>
-          </a:p>
-          <a:p>
-            <a:pPr marL="342900" indent="-342900">
-              <a:spcAft>
-                <a:spcPts val="1200"/>
-              </a:spcAft>
-              <a:buSzPct val="100000"/>
-              <a:buFont typeface="+mj-lt"/>
-              <a:buAutoNum type="arabicPeriod" startAt="1"/>
-            </a:pPr>
-            <a:r>
-              <a:rPr lang="en-US" sz="2600" dirty="0">
-                <a:solidFill>
-                  <a:schemeClr val="tx1"/>
-                </a:solidFill>
-              </a:rPr>
-              <a:t>När passar stapeldiagram, och när linjediagram?</a:t>
-            </a:r>
-            <a:endParaRPr lang="en-US" sz="2600" dirty="0"/>
-          </a:p>
-          <a:p>
-            <a:pPr marL="342900" indent="-342900">
-              <a:spcAft>
-                <a:spcPts val="1200"/>
-              </a:spcAft>
-              <a:buSzPct val="100000"/>
-              <a:buFont typeface="+mj-lt"/>
-              <a:buAutoNum type="arabicPeriod" startAt="1"/>
-            </a:pPr>
-            <a:r>
-              <a:rPr lang="en-US" sz="2600" dirty="0">
-                <a:solidFill>
-                  <a:schemeClr val="tx1"/>
-                </a:solidFill>
-              </a:rPr>
-              <a:t>Räkna medelvärdet av 12, 14 och 13 mm.</a:t>
-            </a:r>
-            <a:endParaRPr lang="en-US" sz="2600" dirty="0"/>
-          </a:p>
-          <a:p>
-            <a:pPr marL="342900" indent="-342900">
-              <a:spcAft>
-                <a:spcPts val="1200"/>
-              </a:spcAft>
-              <a:buSzPct val="100000"/>
-              <a:buFont typeface="+mj-lt"/>
-              <a:buAutoNum type="arabicPeriod" startAt="1"/>
-            </a:pPr>
-            <a:r>
-              <a:rPr lang="en-US" sz="2600" dirty="0">
-                <a:solidFill>
-                  <a:schemeClr val="tx1"/>
-                </a:solidFill>
-              </a:rPr>
-              <a:t>Vilka delar ingår i en rapport?</a:t>
-            </a:r>
-            <a:endParaRPr lang="en-US" sz="2600" dirty="0"/>
-          </a:p>
-        </p:txBody>
-      </p:sp>
-      <p:sp>
-        <p:nvSpPr>
-          <p:cNvPr id="25" name="Slide Number Placeholder 0"/>
-          <p:cNvSpPr>
-            <a:spLocks noGrp="1"/>
-          </p:cNvSpPr>
-          <p:nvPr>
-            <p:ph type="sldNum" sz="quarter" idx="4294967295"/>
-          </p:nvPr>
-        </p:nvSpPr>
-        <p:spPr>
-          <a:xfrm>
-            <a:off x="11274552" y="6400800"/>
-            <a:ext cx="457200" cy="274320"/>
-          </a:xfrm>
-          <a:prstGeom prst="rect">
-            <a:avLst/>
-          </a:prstGeom>
-          <a:extLst>
-            <a:ext uri="{C572A759-6A51-4108-AA02-DFA0A04FC94B}">
-              <ma14:wrappingTextBoxFlag xmlns:ma14="http://schemas.microsoft.com/office/mac/drawingml/2011/main" val="0"/>
-            </a:ext>
-          </a:extLst>
-        </p:spPr>
-        <p:txBody>
-          <a:bodyPr/>
-          <a:lstStyle>
-            <a:lvl1pPr>
-              <a:defRPr sz="1100">
-                <a:solidFill>
-                  <a:schemeClr val="tx2"/>
-                </a:solidFill>
-              </a:defRPr>
-            </a:lvl1pPr>
-          </a:lstStyle>
-          <a:p>
-            <a:pPr algn="l"/>
-            <a:fld id="{F7021451-1387-4CA6-816F-3879F97B5CBC}" type="slidenum">
-              <a:rPr b="0" lang="en-US"/>
-              <a:t>13</a:t>
-            </a:fld>
-            <a:endParaRPr lang="en-US"/>
+              <a:t>Lektion 3: felkällor, tillförlitlighet och slutsats</a:t>
+            </a:r>
+            <a:endParaRPr lang="en-US" sz="2200" dirty="0"/>
           </a:p>
         </p:txBody>
       </p:sp>
@@ -5989,8 +4900,8 @@
         </p:nvSpPr>
         <p:spPr>
           <a:xfrm>
-            <a:off x="731520" y="2103120"/>
-            <a:ext cx="10698480" cy="1463040"/>
+            <a:off x="548640" y="320040"/>
+            <a:ext cx="11091672" cy="914400"/>
           </a:xfrm>
           <a:prstGeom prst="rect">
             <a:avLst/>
@@ -6006,107 +4917,6 @@
               <a:buNone/>
             </a:pPr>
             <a:r>
-              <a:rPr lang="en-US" sz="4400" b="1" dirty="0">
-                <a:solidFill>
-                  <a:schemeClr val="bg1"/>
-                </a:solidFill>
-              </a:rPr>
-              <a:t>1.1.3 Värdera</a:t>
-            </a:r>
-            <a:endParaRPr lang="en-US" sz="4400" dirty="0"/>
-          </a:p>
-        </p:txBody>
-      </p:sp>
-      <p:sp>
-        <p:nvSpPr>
-          <p:cNvPr id="4" name="Text 0"/>
-          <p:cNvSpPr/>
-          <p:nvPr>
-            <p:ph idx="101" type="body" hasCustomPrompt="1"/>
-          </p:nvPr>
-        </p:nvSpPr>
-        <p:spPr>
-          <a:xfrm>
-            <a:off x="731520" y="3657600"/>
-            <a:ext cx="10698480" cy="822960"/>
-          </a:xfrm>
-          <a:prstGeom prst="rect">
-            <a:avLst/>
-          </a:prstGeom>
-          <a:noFill/>
-          <a:ln/>
-        </p:spPr>
-        <p:txBody>
-          <a:bodyPr wrap="square" lIns="0" tIns="0" rIns="0" bIns="0" rtlCol="0" anchor="t"/>
-          <a:lstStyle/>
-          <a:p>
-            <a:pPr algn="l" indent="0" marL="0">
-              <a:buNone/>
-            </a:pPr>
-            <a:r>
-              <a:rPr lang="en-US" sz="2200" dirty="0">
-                <a:solidFill>
-                  <a:schemeClr val="bg2"/>
-                </a:solidFill>
-              </a:rPr>
-              <a:t>Lektion 3: felkällor, tillförlitlighet och slutsats</a:t>
-            </a:r>
-            <a:endParaRPr lang="en-US" sz="2200" dirty="0"/>
-          </a:p>
-        </p:txBody>
-      </p:sp>
-    </p:spTree>
-  </p:cSld>
-  <p:clrMapOvr>
-    <a:masterClrMapping/>
-  </p:clrMapOvr>
-</p:sld>
-</file>
-
-<file path=ppt/slides/slide15.xml><?xml version="1.0" encoding="utf-8"?>
-<p:sld xmlns:a="http://schemas.openxmlformats.org/drawingml/2006/main" xmlns:r="http://schemas.openxmlformats.org/officeDocument/2006/relationships" xmlns:p="http://schemas.openxmlformats.org/presentationml/2006/main">
-  <p:cSld name="Slide 15">
-    <p:spTree>
-      <p:nvGrpSpPr>
-        <p:cNvPr id="1" name=""/>
-        <p:cNvGrpSpPr/>
-        <p:nvPr/>
-      </p:nvGrpSpPr>
-      <p:grpSpPr>
-        <a:xfrm>
-          <a:off x="0" y="0"/>
-          <a:ext cx="0" cy="0"/>
-          <a:chOff x="0" y="0"/>
-          <a:chExt cx="0" cy="0"/>
-        </a:xfrm>
-      </p:grpSpPr>
-      <p:sp>
-        <p:nvSpPr>
-          <p:cNvPr id="3" name="Text 0"/>
-          <p:cNvSpPr/>
-          <p:nvPr>
-            <p:ph idx="100" type="title" hasCustomPrompt="1"/>
-          </p:nvPr>
-        </p:nvSpPr>
-        <p:spPr>
-          <a:xfrm>
-            <a:off x="548640" y="320040"/>
-            <a:ext cx="11091672" cy="914400"/>
-          </a:xfrm>
-          <a:prstGeom prst="rect">
-            <a:avLst/>
-          </a:prstGeom>
-          <a:noFill/>
-          <a:ln/>
-        </p:spPr>
-        <p:txBody>
-          <a:bodyPr wrap="square" lIns="0" tIns="0" rIns="0" bIns="0" rtlCol="0" anchor="ctr"/>
-          <a:lstStyle/>
-          <a:p>
-            <a:pPr algn="l" indent="0" marL="0">
-              <a:buNone/>
-            </a:pPr>
-            <a:r>
               <a:rPr lang="en-US" sz="3600" b="1" dirty="0">
                 <a:solidFill>
                   <a:schemeClr val="tx2"/>
@@ -6120,7 +4930,7 @@
       </p:sp>
       <p:graphicFrame>
         <p:nvGraphicFramePr>
-          <p:cNvPr id="16" name="Table 0"/>
+          <p:cNvPr id="15" name="Table 0"/>
           <p:cNvGraphicFramePr>
             <a:graphicFrameLocks noGrp="1"/>
           </p:cNvGraphicFramePr>
@@ -6779,6 +5589,630 @@
             <a:pPr algn="l"/>
             <a:fld id="{F7021451-1387-4CA6-816F-3879F97B5CBC}" type="slidenum">
               <a:rPr b="0" lang="en-US"/>
+              <a:t>14</a:t>
+            </a:fld>
+            <a:endParaRPr lang="en-US"/>
+          </a:p>
+        </p:txBody>
+      </p:sp>
+    </p:spTree>
+  </p:cSld>
+  <p:clrMapOvr>
+    <a:masterClrMapping/>
+  </p:clrMapOvr>
+</p:sld>
+</file>
+
+<file path=ppt/slides/slide15.xml><?xml version="1.0" encoding="utf-8"?>
+<p:sld xmlns:a="http://schemas.openxmlformats.org/drawingml/2006/main" xmlns:r="http://schemas.openxmlformats.org/officeDocument/2006/relationships" xmlns:p="http://schemas.openxmlformats.org/presentationml/2006/main">
+  <p:cSld name="Slide 15">
+    <p:spTree>
+      <p:nvGrpSpPr>
+        <p:cNvPr id="1" name=""/>
+        <p:cNvGrpSpPr/>
+        <p:nvPr/>
+      </p:nvGrpSpPr>
+      <p:grpSpPr>
+        <a:xfrm>
+          <a:off x="0" y="0"/>
+          <a:ext cx="0" cy="0"/>
+          <a:chOff x="0" y="0"/>
+          <a:chExt cx="0" cy="0"/>
+        </a:xfrm>
+      </p:grpSpPr>
+      <p:sp>
+        <p:nvSpPr>
+          <p:cNvPr id="3" name="Text 0"/>
+          <p:cNvSpPr/>
+          <p:nvPr>
+            <p:ph idx="100" type="title" hasCustomPrompt="1"/>
+          </p:nvPr>
+        </p:nvSpPr>
+        <p:spPr>
+          <a:xfrm>
+            <a:off x="548640" y="320040"/>
+            <a:ext cx="11091672" cy="914400"/>
+          </a:xfrm>
+          <a:prstGeom prst="rect">
+            <a:avLst/>
+          </a:prstGeom>
+          <a:noFill/>
+          <a:ln/>
+        </p:spPr>
+        <p:txBody>
+          <a:bodyPr wrap="square" lIns="0" tIns="0" rIns="0" bIns="0" rtlCol="0" anchor="ctr"/>
+          <a:lstStyle/>
+          <a:p>
+            <a:pPr algn="l" indent="0" marL="0">
+              <a:buNone/>
+            </a:pPr>
+            <a:r>
+              <a:rPr lang="en-US" sz="3600" b="1" dirty="0">
+                <a:solidFill>
+                  <a:schemeClr val="tx2"/>
+                </a:solidFill>
+              </a:rPr>
+              <a:t>Kan jag lita på resultatet?</a:t>
+            </a:r>
+            <a:endParaRPr lang="en-US" sz="3600" dirty="0"/>
+          </a:p>
+        </p:txBody>
+      </p:sp>
+      <p:sp>
+        <p:nvSpPr>
+          <p:cNvPr id="4" name="Kort 1"/>
+          <p:cNvSpPr/>
+          <p:nvPr/>
+        </p:nvSpPr>
+        <p:spPr>
+          <a:xfrm>
+            <a:off x="548640" y="1554480"/>
+            <a:ext cx="3514344" cy="3291840"/>
+          </a:xfrm>
+          <a:prstGeom prst="roundRect">
+            <a:avLst>
+              <a:gd name="adj" fmla="val 3333"/>
+            </a:avLst>
+          </a:prstGeom>
+          <a:solidFill>
+            <a:schemeClr val="bg2"/>
+          </a:solidFill>
+          <a:ln w="12700">
+            <a:solidFill>
+              <a:schemeClr val="bg2"/>
+            </a:solidFill>
+            <a:prstDash val="solid"/>
+          </a:ln>
+        </p:spPr>
+      </p:sp>
+      <p:sp>
+        <p:nvSpPr>
+          <p:cNvPr id="5" name="Siffra 1"/>
+          <p:cNvSpPr/>
+          <p:nvPr/>
+        </p:nvSpPr>
+        <p:spPr>
+          <a:xfrm>
+            <a:off x="777240" y="1783080"/>
+            <a:ext cx="502920" cy="502920"/>
+          </a:xfrm>
+          <a:prstGeom prst="ellipse">
+            <a:avLst/>
+          </a:prstGeom>
+          <a:solidFill>
+            <a:schemeClr val="accent1"/>
+          </a:solidFill>
+          <a:ln w="12700">
+            <a:solidFill>
+              <a:schemeClr val="accent1"/>
+            </a:solidFill>
+            <a:prstDash val="solid"/>
+          </a:ln>
+        </p:spPr>
+      </p:sp>
+      <p:sp>
+        <p:nvSpPr>
+          <p:cNvPr id="6" name="Text 3"/>
+          <p:cNvSpPr txBox="1"/>
+          <p:nvPr/>
+        </p:nvSpPr>
+        <p:spPr>
+          <a:xfrm>
+            <a:off x="777240" y="1783080"/>
+            <a:ext cx="502920" cy="502920"/>
+          </a:xfrm>
+          <a:prstGeom prst="rect">
+            <a:avLst/>
+          </a:prstGeom>
+          <a:noFill/>
+          <a:ln/>
+        </p:spPr>
+        <p:txBody>
+          <a:bodyPr wrap="square" lIns="0" tIns="0" rIns="0" bIns="0" rtlCol="0" anchor="ctr"/>
+          <a:lstStyle/>
+          <a:p>
+            <a:pPr algn="ctr" indent="0" marL="0">
+              <a:buNone/>
+            </a:pPr>
+            <a:r>
+              <a:rPr lang="en-US" sz="1800" b="1" dirty="0">
+                <a:solidFill>
+                  <a:schemeClr val="bg1"/>
+                </a:solidFill>
+              </a:rPr>
+              <a:t>1</a:t>
+            </a:r>
+            <a:endParaRPr lang="en-US" sz="1800" dirty="0"/>
+          </a:p>
+        </p:txBody>
+      </p:sp>
+      <p:sp>
+        <p:nvSpPr>
+          <p:cNvPr id="7" name="Text 4"/>
+          <p:cNvSpPr txBox="1"/>
+          <p:nvPr/>
+        </p:nvSpPr>
+        <p:spPr>
+          <a:xfrm>
+            <a:off x="777240" y="2423160"/>
+            <a:ext cx="3057144" cy="548640"/>
+          </a:xfrm>
+          <a:prstGeom prst="rect">
+            <a:avLst/>
+          </a:prstGeom>
+          <a:noFill/>
+          <a:ln/>
+        </p:spPr>
+        <p:txBody>
+          <a:bodyPr wrap="square" lIns="0" tIns="0" rIns="0" bIns="0" rtlCol="0" anchor="t"/>
+          <a:lstStyle/>
+          <a:p>
+            <a:pPr indent="0" marL="0">
+              <a:buNone/>
+            </a:pPr>
+            <a:r>
+              <a:rPr lang="en-US" sz="2200" b="1" dirty="0">
+                <a:solidFill>
+                  <a:schemeClr val="tx2"/>
+                </a:solidFill>
+              </a:rPr>
+              <a:t>Tillförlitlighet</a:t>
+            </a:r>
+            <a:endParaRPr lang="en-US" sz="2200" dirty="0"/>
+          </a:p>
+        </p:txBody>
+      </p:sp>
+      <p:sp>
+        <p:nvSpPr>
+          <p:cNvPr id="8" name="Text 5"/>
+          <p:cNvSpPr txBox="1"/>
+          <p:nvPr/>
+        </p:nvSpPr>
+        <p:spPr>
+          <a:xfrm>
+            <a:off x="777240" y="3017520"/>
+            <a:ext cx="3057144" cy="1645920"/>
+          </a:xfrm>
+          <a:prstGeom prst="rect">
+            <a:avLst/>
+          </a:prstGeom>
+          <a:noFill/>
+          <a:ln/>
+        </p:spPr>
+        <p:txBody>
+          <a:bodyPr wrap="square" lIns="0" tIns="0" rIns="0" bIns="0" rtlCol="0" anchor="t"/>
+          <a:lstStyle/>
+          <a:p>
+            <a:pPr indent="0" marL="0">
+              <a:buNone/>
+            </a:pPr>
+            <a:r>
+              <a:rPr lang="en-US" sz="1800" dirty="0">
+                <a:solidFill>
+                  <a:schemeClr val="tx1"/>
+                </a:solidFill>
+              </a:rPr>
+              <a:t>Skulle vi få samma resultat om vi gjorde om försöket?</a:t>
+            </a:r>
+            <a:endParaRPr lang="en-US" sz="1800" dirty="0"/>
+          </a:p>
+        </p:txBody>
+      </p:sp>
+      <p:sp>
+        <p:nvSpPr>
+          <p:cNvPr id="9" name="Kort 2"/>
+          <p:cNvSpPr/>
+          <p:nvPr/>
+        </p:nvSpPr>
+        <p:spPr>
+          <a:xfrm>
+            <a:off x="4337304" y="1554480"/>
+            <a:ext cx="3514344" cy="3291840"/>
+          </a:xfrm>
+          <a:prstGeom prst="roundRect">
+            <a:avLst>
+              <a:gd name="adj" fmla="val 3333"/>
+            </a:avLst>
+          </a:prstGeom>
+          <a:solidFill>
+            <a:schemeClr val="bg2"/>
+          </a:solidFill>
+          <a:ln w="12700">
+            <a:solidFill>
+              <a:schemeClr val="bg2"/>
+            </a:solidFill>
+            <a:prstDash val="solid"/>
+          </a:ln>
+        </p:spPr>
+      </p:sp>
+      <p:sp>
+        <p:nvSpPr>
+          <p:cNvPr id="10" name="Siffra 2"/>
+          <p:cNvSpPr/>
+          <p:nvPr/>
+        </p:nvSpPr>
+        <p:spPr>
+          <a:xfrm>
+            <a:off x="4565904" y="1783080"/>
+            <a:ext cx="502920" cy="502920"/>
+          </a:xfrm>
+          <a:prstGeom prst="ellipse">
+            <a:avLst/>
+          </a:prstGeom>
+          <a:solidFill>
+            <a:schemeClr val="accent2"/>
+          </a:solidFill>
+          <a:ln w="12700">
+            <a:solidFill>
+              <a:schemeClr val="accent2"/>
+            </a:solidFill>
+            <a:prstDash val="solid"/>
+          </a:ln>
+        </p:spPr>
+      </p:sp>
+      <p:sp>
+        <p:nvSpPr>
+          <p:cNvPr id="11" name="Text 8"/>
+          <p:cNvSpPr txBox="1"/>
+          <p:nvPr/>
+        </p:nvSpPr>
+        <p:spPr>
+          <a:xfrm>
+            <a:off x="4565904" y="1783080"/>
+            <a:ext cx="502920" cy="502920"/>
+          </a:xfrm>
+          <a:prstGeom prst="rect">
+            <a:avLst/>
+          </a:prstGeom>
+          <a:noFill/>
+          <a:ln/>
+        </p:spPr>
+        <p:txBody>
+          <a:bodyPr wrap="square" lIns="0" tIns="0" rIns="0" bIns="0" rtlCol="0" anchor="ctr"/>
+          <a:lstStyle/>
+          <a:p>
+            <a:pPr algn="ctr" indent="0" marL="0">
+              <a:buNone/>
+            </a:pPr>
+            <a:r>
+              <a:rPr lang="en-US" sz="1800" b="1" dirty="0">
+                <a:solidFill>
+                  <a:schemeClr val="bg1"/>
+                </a:solidFill>
+              </a:rPr>
+              <a:t>2</a:t>
+            </a:r>
+            <a:endParaRPr lang="en-US" sz="1800" dirty="0"/>
+          </a:p>
+        </p:txBody>
+      </p:sp>
+      <p:sp>
+        <p:nvSpPr>
+          <p:cNvPr id="12" name="Text 9"/>
+          <p:cNvSpPr txBox="1"/>
+          <p:nvPr/>
+        </p:nvSpPr>
+        <p:spPr>
+          <a:xfrm>
+            <a:off x="4565904" y="2423160"/>
+            <a:ext cx="3057144" cy="548640"/>
+          </a:xfrm>
+          <a:prstGeom prst="rect">
+            <a:avLst/>
+          </a:prstGeom>
+          <a:noFill/>
+          <a:ln/>
+        </p:spPr>
+        <p:txBody>
+          <a:bodyPr wrap="square" lIns="0" tIns="0" rIns="0" bIns="0" rtlCol="0" anchor="t"/>
+          <a:lstStyle/>
+          <a:p>
+            <a:pPr indent="0" marL="0">
+              <a:buNone/>
+            </a:pPr>
+            <a:r>
+              <a:rPr lang="en-US" sz="2200" b="1" dirty="0">
+                <a:solidFill>
+                  <a:schemeClr val="tx2"/>
+                </a:solidFill>
+              </a:rPr>
+              <a:t>Giltighet</a:t>
+            </a:r>
+            <a:endParaRPr lang="en-US" sz="2200" dirty="0"/>
+          </a:p>
+        </p:txBody>
+      </p:sp>
+      <p:sp>
+        <p:nvSpPr>
+          <p:cNvPr id="13" name="Text 10"/>
+          <p:cNvSpPr txBox="1"/>
+          <p:nvPr/>
+        </p:nvSpPr>
+        <p:spPr>
+          <a:xfrm>
+            <a:off x="4565904" y="3017520"/>
+            <a:ext cx="3057144" cy="1645920"/>
+          </a:xfrm>
+          <a:prstGeom prst="rect">
+            <a:avLst/>
+          </a:prstGeom>
+          <a:noFill/>
+          <a:ln/>
+        </p:spPr>
+        <p:txBody>
+          <a:bodyPr wrap="square" lIns="0" tIns="0" rIns="0" bIns="0" rtlCol="0" anchor="t"/>
+          <a:lstStyle/>
+          <a:p>
+            <a:pPr indent="0" marL="0">
+              <a:buNone/>
+            </a:pPr>
+            <a:r>
+              <a:rPr lang="en-US" sz="1800" dirty="0">
+                <a:solidFill>
+                  <a:schemeClr val="tx1"/>
+                </a:solidFill>
+              </a:rPr>
+              <a:t>Mätte vi det vi ville veta? Är höjd ett bra mått på att krassen mår bra?</a:t>
+            </a:r>
+            <a:endParaRPr lang="en-US" sz="1800" dirty="0"/>
+          </a:p>
+        </p:txBody>
+      </p:sp>
+      <p:sp>
+        <p:nvSpPr>
+          <p:cNvPr id="14" name="Kort 3"/>
+          <p:cNvSpPr/>
+          <p:nvPr/>
+        </p:nvSpPr>
+        <p:spPr>
+          <a:xfrm>
+            <a:off x="8125968" y="1554480"/>
+            <a:ext cx="3514344" cy="3291840"/>
+          </a:xfrm>
+          <a:prstGeom prst="roundRect">
+            <a:avLst>
+              <a:gd name="adj" fmla="val 3333"/>
+            </a:avLst>
+          </a:prstGeom>
+          <a:solidFill>
+            <a:schemeClr val="bg2"/>
+          </a:solidFill>
+          <a:ln w="12700">
+            <a:solidFill>
+              <a:schemeClr val="bg2"/>
+            </a:solidFill>
+            <a:prstDash val="solid"/>
+          </a:ln>
+        </p:spPr>
+      </p:sp>
+      <p:sp>
+        <p:nvSpPr>
+          <p:cNvPr id="15" name="Siffra 3"/>
+          <p:cNvSpPr/>
+          <p:nvPr/>
+        </p:nvSpPr>
+        <p:spPr>
+          <a:xfrm>
+            <a:off x="8354568" y="1783080"/>
+            <a:ext cx="502920" cy="502920"/>
+          </a:xfrm>
+          <a:prstGeom prst="ellipse">
+            <a:avLst/>
+          </a:prstGeom>
+          <a:solidFill>
+            <a:schemeClr val="accent4"/>
+          </a:solidFill>
+          <a:ln w="12700">
+            <a:solidFill>
+              <a:schemeClr val="accent4"/>
+            </a:solidFill>
+            <a:prstDash val="solid"/>
+          </a:ln>
+        </p:spPr>
+      </p:sp>
+      <p:sp>
+        <p:nvSpPr>
+          <p:cNvPr id="16" name="Text 13"/>
+          <p:cNvSpPr txBox="1"/>
+          <p:nvPr/>
+        </p:nvSpPr>
+        <p:spPr>
+          <a:xfrm>
+            <a:off x="8354568" y="1783080"/>
+            <a:ext cx="502920" cy="502920"/>
+          </a:xfrm>
+          <a:prstGeom prst="rect">
+            <a:avLst/>
+          </a:prstGeom>
+          <a:noFill/>
+          <a:ln/>
+        </p:spPr>
+        <p:txBody>
+          <a:bodyPr wrap="square" lIns="0" tIns="0" rIns="0" bIns="0" rtlCol="0" anchor="ctr"/>
+          <a:lstStyle/>
+          <a:p>
+            <a:pPr algn="ctr" indent="0" marL="0">
+              <a:buNone/>
+            </a:pPr>
+            <a:r>
+              <a:rPr lang="en-US" sz="1800" b="1" dirty="0">
+                <a:solidFill>
+                  <a:schemeClr val="bg1"/>
+                </a:solidFill>
+              </a:rPr>
+              <a:t>3</a:t>
+            </a:r>
+            <a:endParaRPr lang="en-US" sz="1800" dirty="0"/>
+          </a:p>
+        </p:txBody>
+      </p:sp>
+      <p:sp>
+        <p:nvSpPr>
+          <p:cNvPr id="17" name="Text 14"/>
+          <p:cNvSpPr txBox="1"/>
+          <p:nvPr/>
+        </p:nvSpPr>
+        <p:spPr>
+          <a:xfrm>
+            <a:off x="8354568" y="2423160"/>
+            <a:ext cx="3057144" cy="548640"/>
+          </a:xfrm>
+          <a:prstGeom prst="rect">
+            <a:avLst/>
+          </a:prstGeom>
+          <a:noFill/>
+          <a:ln/>
+        </p:spPr>
+        <p:txBody>
+          <a:bodyPr wrap="square" lIns="0" tIns="0" rIns="0" bIns="0" rtlCol="0" anchor="t"/>
+          <a:lstStyle/>
+          <a:p>
+            <a:pPr indent="0" marL="0">
+              <a:buNone/>
+            </a:pPr>
+            <a:r>
+              <a:rPr lang="en-US" sz="2200" b="1" dirty="0">
+                <a:solidFill>
+                  <a:schemeClr val="tx2"/>
+                </a:solidFill>
+              </a:rPr>
+              <a:t>Slutsats</a:t>
+            </a:r>
+            <a:endParaRPr lang="en-US" sz="2200" dirty="0"/>
+          </a:p>
+        </p:txBody>
+      </p:sp>
+      <p:sp>
+        <p:nvSpPr>
+          <p:cNvPr id="18" name="Text 15"/>
+          <p:cNvSpPr txBox="1"/>
+          <p:nvPr/>
+        </p:nvSpPr>
+        <p:spPr>
+          <a:xfrm>
+            <a:off x="8354568" y="3017520"/>
+            <a:ext cx="3057144" cy="1645920"/>
+          </a:xfrm>
+          <a:prstGeom prst="rect">
+            <a:avLst/>
+          </a:prstGeom>
+          <a:noFill/>
+          <a:ln/>
+        </p:spPr>
+        <p:txBody>
+          <a:bodyPr wrap="square" lIns="0" tIns="0" rIns="0" bIns="0" rtlCol="0" anchor="t"/>
+          <a:lstStyle/>
+          <a:p>
+            <a:pPr indent="0" marL="0">
+              <a:buNone/>
+            </a:pPr>
+            <a:r>
+              <a:rPr lang="en-US" sz="1800" dirty="0">
+                <a:solidFill>
+                  <a:schemeClr val="tx1"/>
+                </a:solidFill>
+              </a:rPr>
+              <a:t>Svara på frågan och stämma med resultatet. Skriv också vad du inte vet.</a:t>
+            </a:r>
+            <a:endParaRPr lang="en-US" sz="1800" dirty="0"/>
+          </a:p>
+        </p:txBody>
+      </p:sp>
+      <p:sp>
+        <p:nvSpPr>
+          <p:cNvPr id="19" name="Text 16"/>
+          <p:cNvSpPr txBox="1"/>
+          <p:nvPr/>
+        </p:nvSpPr>
+        <p:spPr>
+          <a:xfrm>
+            <a:off x="548640" y="5623560"/>
+            <a:ext cx="11091672" cy="640080"/>
+          </a:xfrm>
+          <a:prstGeom prst="rect">
+            <a:avLst/>
+          </a:prstGeom>
+          <a:noFill/>
+          <a:ln/>
+        </p:spPr>
+        <p:txBody>
+          <a:bodyPr wrap="square" lIns="0" tIns="0" rIns="0" bIns="0" rtlCol="0" anchor="ctr"/>
+          <a:lstStyle/>
+          <a:p>
+            <a:pPr indent="0" marL="0">
+              <a:buNone/>
+            </a:pPr>
+            <a:r>
+              <a:rPr lang="en-US" sz="1600" b="1" dirty="0">
+                <a:solidFill>
+                  <a:schemeClr val="accent2"/>
+                </a:solidFill>
+              </a:rPr>
+              <a:t>Ett resultat som inte stämmer med hypotesen är inget misslyckande.</a:t>
+            </a:r>
+            <a:endParaRPr lang="en-US" sz="1600" dirty="0"/>
+          </a:p>
+        </p:txBody>
+      </p:sp>
+      <p:sp>
+        <p:nvSpPr>
+          <p:cNvPr id="25" name="Slide Number Placeholder 0"/>
+          <p:cNvSpPr>
+            <a:spLocks noGrp="1"/>
+          </p:cNvSpPr>
+          <p:nvPr>
+            <p:ph type="sldNum" sz="quarter" idx="4294967295"/>
+          </p:nvPr>
+        </p:nvSpPr>
+        <p:spPr>
+          <a:xfrm>
+            <a:off x="11274552" y="6400800"/>
+            <a:ext cx="457200" cy="274320"/>
+          </a:xfrm>
+          <a:prstGeom prst="rect">
+            <a:avLst/>
+          </a:prstGeom>
+          <a:extLst>
+            <a:ext uri="{C572A759-6A51-4108-AA02-DFA0A04FC94B}">
+              <ma14:wrappingTextBoxFlag xmlns:ma14="http://schemas.microsoft.com/office/mac/drawingml/2011/main" val="0"/>
+            </a:ext>
+          </a:extLst>
+        </p:spPr>
+        <p:txBody>
+          <a:bodyPr/>
+          <a:lstStyle>
+            <a:lvl1pPr>
+              <a:defRPr sz="1100">
+                <a:solidFill>
+                  <a:schemeClr val="tx2"/>
+                </a:solidFill>
+              </a:defRPr>
+            </a:lvl1pPr>
+          </a:lstStyle>
+          <a:p>
+            <a:pPr algn="l"/>
+            <a:fld id="{F7021451-1387-4CA6-816F-3879F97B5CBC}" type="slidenum">
+              <a:rPr b="0" lang="en-US"/>
               <a:t>15</a:t>
             </a:fld>
             <a:endParaRPr lang="en-US"/>
@@ -6842,7 +6276,7 @@
                   <a:schemeClr val="tx2"/>
                 </a:solidFill>
               </a:rPr>
-              <a:t>Kan jag lita på resultatet?</a:t>
+              <a:t>Kolla dig själv: 1.1.3</a:t>
             </a:r>
             <a:endParaRPr lang="en-US" sz="3600" dirty="0"/>
           </a:p>
@@ -6850,26 +6284,26 @@
       </p:sp>
       <p:sp>
         <p:nvSpPr>
-          <p:cNvPr id="4" name="Kort 1"/>
+          <p:cNvPr id="4" name="Kolla dig själv"/>
           <p:cNvSpPr/>
           <p:nvPr/>
         </p:nvSpPr>
         <p:spPr>
           <a:xfrm>
             <a:off x="548640" y="1554480"/>
-            <a:ext cx="3514344" cy="3291840"/>
+            <a:ext cx="11091672" cy="4297680"/>
           </a:xfrm>
           <a:prstGeom prst="roundRect">
             <a:avLst>
-              <a:gd name="adj" fmla="val 3333"/>
+              <a:gd name="adj" fmla="val 3191"/>
             </a:avLst>
           </a:prstGeom>
           <a:solidFill>
             <a:schemeClr val="bg2"/>
           </a:solidFill>
-          <a:ln w="12700">
+          <a:ln w="25400">
             <a:solidFill>
-              <a:schemeClr val="bg2"/>
+              <a:schemeClr val="accent3"/>
             </a:solidFill>
             <a:prstDash val="solid"/>
           </a:ln>
@@ -6877,28 +6311,39 @@
       </p:sp>
       <p:sp>
         <p:nvSpPr>
-          <p:cNvPr id="5" name="Siffra 1"/>
-          <p:cNvSpPr/>
+          <p:cNvPr id="5" name="Text 2"/>
+          <p:cNvSpPr txBox="1"/>
           <p:nvPr/>
         </p:nvSpPr>
         <p:spPr>
           <a:xfrm>
-            <a:off x="777240" y="1783080"/>
-            <a:ext cx="502920" cy="502920"/>
-          </a:xfrm>
-          <a:prstGeom prst="ellipse">
+            <a:off x="914400" y="1737360"/>
+            <a:ext cx="5486400" cy="365760"/>
+          </a:xfrm>
+          <a:prstGeom prst="rect">
             <a:avLst/>
           </a:prstGeom>
-          <a:solidFill>
-            <a:schemeClr val="accent1"/>
-          </a:solidFill>
-          <a:ln w="12700">
-            <a:solidFill>
-              <a:schemeClr val="accent1"/>
-            </a:solidFill>
-            <a:prstDash val="solid"/>
-          </a:ln>
-        </p:spPr>
+          <a:noFill/>
+          <a:ln/>
+        </p:spPr>
+        <p:txBody>
+          <a:bodyPr wrap="square" lIns="0" tIns="0" rIns="0" bIns="0" rtlCol="0" anchor="ctr"/>
+          <a:lstStyle/>
+          <a:p>
+            <a:pPr indent="0" marL="0">
+              <a:buNone/>
+            </a:pPr>
+            <a:r>
+              <a:rPr lang="en-US" sz="1400" b="1" spc="300" kern="0" dirty="0">
+                <a:solidFill>
+                  <a:schemeClr val="accent1"/>
+                </a:solidFill>
+              </a:rPr>
+              <a:t>KOLLA DIG SJÄLV</a:t>
+            </a:r>
+            <a:endParaRPr lang="en-US" sz="1400" dirty="0"/>
+          </a:p>
+        </p:txBody>
       </p:sp>
       <p:sp>
         <p:nvSpPr>
@@ -6908,8 +6353,8 @@
         </p:nvSpPr>
         <p:spPr>
           <a:xfrm>
-            <a:off x="777240" y="1783080"/>
-            <a:ext cx="502920" cy="502920"/>
+            <a:off x="914400" y="2194560"/>
+            <a:ext cx="10360152" cy="3474720"/>
           </a:xfrm>
           <a:prstGeom prst="rect">
             <a:avLst/>
@@ -6918,449 +6363,83 @@
           <a:ln/>
         </p:spPr>
         <p:txBody>
-          <a:bodyPr wrap="square" lIns="0" tIns="0" rIns="0" bIns="0" rtlCol="0" anchor="ctr"/>
-          <a:lstStyle/>
-          <a:p>
-            <a:pPr algn="ctr" indent="0" marL="0">
-              <a:buNone/>
+          <a:bodyPr wrap="square" lIns="0" tIns="0" rIns="0" bIns="0" rtlCol="0" anchor="t"/>
+          <a:lstStyle/>
+          <a:p>
+            <a:pPr marL="342900" indent="-342900">
+              <a:spcAft>
+                <a:spcPts val="1200"/>
+              </a:spcAft>
+              <a:buSzPct val="100000"/>
+              <a:buFont typeface="+mj-lt"/>
+              <a:buAutoNum type="arabicPeriod" startAt="1"/>
             </a:pPr>
             <a:r>
-              <a:rPr lang="en-US" sz="1800" b="1" dirty="0">
-                <a:solidFill>
-                  <a:schemeClr val="bg1"/>
+              <a:rPr lang="en-US" sz="2600" dirty="0">
+                <a:solidFill>
+                  <a:schemeClr val="tx1"/>
                 </a:solidFill>
               </a:rPr>
-              <a:t>1</a:t>
-            </a:r>
-            <a:endParaRPr lang="en-US" sz="1800" dirty="0"/>
-          </a:p>
-        </p:txBody>
-      </p:sp>
-      <p:sp>
-        <p:nvSpPr>
-          <p:cNvPr id="7" name="Text 4"/>
-          <p:cNvSpPr txBox="1"/>
-          <p:nvPr/>
-        </p:nvSpPr>
-        <p:spPr>
-          <a:xfrm>
-            <a:off x="777240" y="2423160"/>
-            <a:ext cx="3057144" cy="548640"/>
-          </a:xfrm>
-          <a:prstGeom prst="rect">
-            <a:avLst/>
-          </a:prstGeom>
-          <a:noFill/>
-          <a:ln/>
-        </p:spPr>
-        <p:txBody>
-          <a:bodyPr wrap="square" lIns="0" tIns="0" rIns="0" bIns="0" rtlCol="0" anchor="t"/>
-          <a:lstStyle/>
-          <a:p>
-            <a:pPr indent="0" marL="0">
-              <a:buNone/>
+              <a:t>Skillnaden mellan slump och systematiskt fel? Ge ett exempel på vardera.</a:t>
+            </a:r>
+            <a:endParaRPr lang="en-US" sz="2600" dirty="0"/>
+          </a:p>
+          <a:p>
+            <a:pPr marL="342900" indent="-342900">
+              <a:spcAft>
+                <a:spcPts val="1200"/>
+              </a:spcAft>
+              <a:buSzPct val="100000"/>
+              <a:buFont typeface="+mj-lt"/>
+              <a:buAutoNum type="arabicPeriod" startAt="1"/>
             </a:pPr>
             <a:r>
-              <a:rPr lang="en-US" sz="2200" b="1" dirty="0">
-                <a:solidFill>
-                  <a:schemeClr val="tx2"/>
+              <a:rPr lang="en-US" sz="2600" dirty="0">
+                <a:solidFill>
+                  <a:schemeClr val="tx1"/>
                 </a:solidFill>
               </a:rPr>
-              <a:t>Tillförlitlighet</a:t>
-            </a:r>
-            <a:endParaRPr lang="en-US" sz="2200" dirty="0"/>
-          </a:p>
-        </p:txBody>
-      </p:sp>
-      <p:sp>
-        <p:nvSpPr>
-          <p:cNvPr id="8" name="Text 5"/>
-          <p:cNvSpPr txBox="1"/>
-          <p:nvPr/>
-        </p:nvSpPr>
-        <p:spPr>
-          <a:xfrm>
-            <a:off x="777240" y="3017520"/>
-            <a:ext cx="3057144" cy="1645920"/>
-          </a:xfrm>
-          <a:prstGeom prst="rect">
-            <a:avLst/>
-          </a:prstGeom>
-          <a:noFill/>
-          <a:ln/>
-        </p:spPr>
-        <p:txBody>
-          <a:bodyPr wrap="square" lIns="0" tIns="0" rIns="0" bIns="0" rtlCol="0" anchor="t"/>
-          <a:lstStyle/>
-          <a:p>
-            <a:pPr indent="0" marL="0">
-              <a:buNone/>
+              <a:t>Varför minskar slumpen när man upprepar ett försök?</a:t>
+            </a:r>
+            <a:endParaRPr lang="en-US" sz="2600" dirty="0"/>
+          </a:p>
+          <a:p>
+            <a:pPr marL="342900" indent="-342900">
+              <a:spcAft>
+                <a:spcPts val="1200"/>
+              </a:spcAft>
+              <a:buSzPct val="100000"/>
+              <a:buFont typeface="+mj-lt"/>
+              <a:buAutoNum type="arabicPeriod" startAt="1"/>
             </a:pPr>
             <a:r>
-              <a:rPr lang="en-US" sz="1800" dirty="0">
+              <a:rPr lang="en-US" sz="2600" dirty="0">
                 <a:solidFill>
                   <a:schemeClr val="tx1"/>
                 </a:solidFill>
               </a:rPr>
-              <a:t>Skulle vi få samma resultat om vi gjorde om försöket?</a:t>
-            </a:r>
-            <a:endParaRPr lang="en-US" sz="1800" dirty="0"/>
-          </a:p>
-        </p:txBody>
-      </p:sp>
-      <p:sp>
-        <p:nvSpPr>
-          <p:cNvPr id="9" name="Kort 2"/>
-          <p:cNvSpPr/>
-          <p:nvPr/>
-        </p:nvSpPr>
-        <p:spPr>
-          <a:xfrm>
-            <a:off x="4337304" y="1554480"/>
-            <a:ext cx="3514344" cy="3291840"/>
-          </a:xfrm>
-          <a:prstGeom prst="roundRect">
-            <a:avLst>
-              <a:gd name="adj" fmla="val 3333"/>
-            </a:avLst>
-          </a:prstGeom>
-          <a:solidFill>
-            <a:schemeClr val="bg2"/>
-          </a:solidFill>
-          <a:ln w="12700">
-            <a:solidFill>
-              <a:schemeClr val="bg2"/>
-            </a:solidFill>
-            <a:prstDash val="solid"/>
-          </a:ln>
-        </p:spPr>
-      </p:sp>
-      <p:sp>
-        <p:nvSpPr>
-          <p:cNvPr id="10" name="Siffra 2"/>
-          <p:cNvSpPr/>
-          <p:nvPr/>
-        </p:nvSpPr>
-        <p:spPr>
-          <a:xfrm>
-            <a:off x="4565904" y="1783080"/>
-            <a:ext cx="502920" cy="502920"/>
-          </a:xfrm>
-          <a:prstGeom prst="ellipse">
-            <a:avLst/>
-          </a:prstGeom>
-          <a:solidFill>
-            <a:schemeClr val="accent2"/>
-          </a:solidFill>
-          <a:ln w="12700">
-            <a:solidFill>
-              <a:schemeClr val="accent2"/>
-            </a:solidFill>
-            <a:prstDash val="solid"/>
-          </a:ln>
-        </p:spPr>
-      </p:sp>
-      <p:sp>
-        <p:nvSpPr>
-          <p:cNvPr id="11" name="Text 8"/>
-          <p:cNvSpPr txBox="1"/>
-          <p:nvPr/>
-        </p:nvSpPr>
-        <p:spPr>
-          <a:xfrm>
-            <a:off x="4565904" y="1783080"/>
-            <a:ext cx="502920" cy="502920"/>
-          </a:xfrm>
-          <a:prstGeom prst="rect">
-            <a:avLst/>
-          </a:prstGeom>
-          <a:noFill/>
-          <a:ln/>
-        </p:spPr>
-        <p:txBody>
-          <a:bodyPr wrap="square" lIns="0" tIns="0" rIns="0" bIns="0" rtlCol="0" anchor="ctr"/>
-          <a:lstStyle/>
-          <a:p>
-            <a:pPr algn="ctr" indent="0" marL="0">
-              <a:buNone/>
+              <a:t>Vad menas med giltighet?</a:t>
+            </a:r>
+            <a:endParaRPr lang="en-US" sz="2600" dirty="0"/>
+          </a:p>
+          <a:p>
+            <a:pPr marL="342900" indent="-342900">
+              <a:spcAft>
+                <a:spcPts val="1200"/>
+              </a:spcAft>
+              <a:buSzPct val="100000"/>
+              <a:buFont typeface="+mj-lt"/>
+              <a:buAutoNum type="arabicPeriod" startAt="1"/>
             </a:pPr>
             <a:r>
-              <a:rPr lang="en-US" sz="1800" b="1" dirty="0">
-                <a:solidFill>
-                  <a:schemeClr val="bg1"/>
+              <a:rPr lang="en-US" sz="2600" dirty="0">
+                <a:solidFill>
+                  <a:schemeClr val="tx1"/>
                 </a:solidFill>
               </a:rPr>
-              <a:t>2</a:t>
-            </a:r>
-            <a:endParaRPr lang="en-US" sz="1800" dirty="0"/>
-          </a:p>
-        </p:txBody>
-      </p:sp>
-      <p:sp>
-        <p:nvSpPr>
-          <p:cNvPr id="12" name="Text 9"/>
-          <p:cNvSpPr txBox="1"/>
-          <p:nvPr/>
-        </p:nvSpPr>
-        <p:spPr>
-          <a:xfrm>
-            <a:off x="4565904" y="2423160"/>
-            <a:ext cx="3057144" cy="548640"/>
-          </a:xfrm>
-          <a:prstGeom prst="rect">
-            <a:avLst/>
-          </a:prstGeom>
-          <a:noFill/>
-          <a:ln/>
-        </p:spPr>
-        <p:txBody>
-          <a:bodyPr wrap="square" lIns="0" tIns="0" rIns="0" bIns="0" rtlCol="0" anchor="t"/>
-          <a:lstStyle/>
-          <a:p>
-            <a:pPr indent="0" marL="0">
-              <a:buNone/>
-            </a:pPr>
-            <a:r>
-              <a:rPr lang="en-US" sz="2200" b="1" dirty="0">
-                <a:solidFill>
-                  <a:schemeClr val="tx2"/>
-                </a:solidFill>
-              </a:rPr>
-              <a:t>Giltighet</a:t>
-            </a:r>
-            <a:endParaRPr lang="en-US" sz="2200" dirty="0"/>
-          </a:p>
-        </p:txBody>
-      </p:sp>
-      <p:sp>
-        <p:nvSpPr>
-          <p:cNvPr id="13" name="Text 10"/>
-          <p:cNvSpPr txBox="1"/>
-          <p:nvPr/>
-        </p:nvSpPr>
-        <p:spPr>
-          <a:xfrm>
-            <a:off x="4565904" y="3017520"/>
-            <a:ext cx="3057144" cy="1645920"/>
-          </a:xfrm>
-          <a:prstGeom prst="rect">
-            <a:avLst/>
-          </a:prstGeom>
-          <a:noFill/>
-          <a:ln/>
-        </p:spPr>
-        <p:txBody>
-          <a:bodyPr wrap="square" lIns="0" tIns="0" rIns="0" bIns="0" rtlCol="0" anchor="t"/>
-          <a:lstStyle/>
-          <a:p>
-            <a:pPr indent="0" marL="0">
-              <a:buNone/>
-            </a:pPr>
-            <a:r>
-              <a:rPr lang="en-US" sz="1800" dirty="0">
-                <a:solidFill>
-                  <a:schemeClr val="tx1"/>
-                </a:solidFill>
-              </a:rPr>
-              <a:t>Mätte vi det vi ville veta? Är höjd ett bra mått på att krassen mår bra?</a:t>
-            </a:r>
-            <a:endParaRPr lang="en-US" sz="1800" dirty="0"/>
-          </a:p>
-        </p:txBody>
-      </p:sp>
-      <p:sp>
-        <p:nvSpPr>
-          <p:cNvPr id="14" name="Kort 3"/>
-          <p:cNvSpPr/>
-          <p:nvPr/>
-        </p:nvSpPr>
-        <p:spPr>
-          <a:xfrm>
-            <a:off x="8125968" y="1554480"/>
-            <a:ext cx="3514344" cy="3291840"/>
-          </a:xfrm>
-          <a:prstGeom prst="roundRect">
-            <a:avLst>
-              <a:gd name="adj" fmla="val 3333"/>
-            </a:avLst>
-          </a:prstGeom>
-          <a:solidFill>
-            <a:schemeClr val="bg2"/>
-          </a:solidFill>
-          <a:ln w="12700">
-            <a:solidFill>
-              <a:schemeClr val="bg2"/>
-            </a:solidFill>
-            <a:prstDash val="solid"/>
-          </a:ln>
-        </p:spPr>
-      </p:sp>
-      <p:sp>
-        <p:nvSpPr>
-          <p:cNvPr id="15" name="Siffra 3"/>
-          <p:cNvSpPr/>
-          <p:nvPr/>
-        </p:nvSpPr>
-        <p:spPr>
-          <a:xfrm>
-            <a:off x="8354568" y="1783080"/>
-            <a:ext cx="502920" cy="502920"/>
-          </a:xfrm>
-          <a:prstGeom prst="ellipse">
-            <a:avLst/>
-          </a:prstGeom>
-          <a:solidFill>
-            <a:schemeClr val="accent4"/>
-          </a:solidFill>
-          <a:ln w="12700">
-            <a:solidFill>
-              <a:schemeClr val="accent4"/>
-            </a:solidFill>
-            <a:prstDash val="solid"/>
-          </a:ln>
-        </p:spPr>
-      </p:sp>
-      <p:sp>
-        <p:nvSpPr>
-          <p:cNvPr id="16" name="Text 13"/>
-          <p:cNvSpPr txBox="1"/>
-          <p:nvPr/>
-        </p:nvSpPr>
-        <p:spPr>
-          <a:xfrm>
-            <a:off x="8354568" y="1783080"/>
-            <a:ext cx="502920" cy="502920"/>
-          </a:xfrm>
-          <a:prstGeom prst="rect">
-            <a:avLst/>
-          </a:prstGeom>
-          <a:noFill/>
-          <a:ln/>
-        </p:spPr>
-        <p:txBody>
-          <a:bodyPr wrap="square" lIns="0" tIns="0" rIns="0" bIns="0" rtlCol="0" anchor="ctr"/>
-          <a:lstStyle/>
-          <a:p>
-            <a:pPr algn="ctr" indent="0" marL="0">
-              <a:buNone/>
-            </a:pPr>
-            <a:r>
-              <a:rPr lang="en-US" sz="1800" b="1" dirty="0">
-                <a:solidFill>
-                  <a:schemeClr val="bg1"/>
-                </a:solidFill>
-              </a:rPr>
-              <a:t>3</a:t>
-            </a:r>
-            <a:endParaRPr lang="en-US" sz="1800" dirty="0"/>
-          </a:p>
-        </p:txBody>
-      </p:sp>
-      <p:sp>
-        <p:nvSpPr>
-          <p:cNvPr id="17" name="Text 14"/>
-          <p:cNvSpPr txBox="1"/>
-          <p:nvPr/>
-        </p:nvSpPr>
-        <p:spPr>
-          <a:xfrm>
-            <a:off x="8354568" y="2423160"/>
-            <a:ext cx="3057144" cy="548640"/>
-          </a:xfrm>
-          <a:prstGeom prst="rect">
-            <a:avLst/>
-          </a:prstGeom>
-          <a:noFill/>
-          <a:ln/>
-        </p:spPr>
-        <p:txBody>
-          <a:bodyPr wrap="square" lIns="0" tIns="0" rIns="0" bIns="0" rtlCol="0" anchor="t"/>
-          <a:lstStyle/>
-          <a:p>
-            <a:pPr indent="0" marL="0">
-              <a:buNone/>
-            </a:pPr>
-            <a:r>
-              <a:rPr lang="en-US" sz="2200" b="1" dirty="0">
-                <a:solidFill>
-                  <a:schemeClr val="tx2"/>
-                </a:solidFill>
-              </a:rPr>
-              <a:t>Slutsats</a:t>
-            </a:r>
-            <a:endParaRPr lang="en-US" sz="2200" dirty="0"/>
-          </a:p>
-        </p:txBody>
-      </p:sp>
-      <p:sp>
-        <p:nvSpPr>
-          <p:cNvPr id="18" name="Text 15"/>
-          <p:cNvSpPr txBox="1"/>
-          <p:nvPr/>
-        </p:nvSpPr>
-        <p:spPr>
-          <a:xfrm>
-            <a:off x="8354568" y="3017520"/>
-            <a:ext cx="3057144" cy="1645920"/>
-          </a:xfrm>
-          <a:prstGeom prst="rect">
-            <a:avLst/>
-          </a:prstGeom>
-          <a:noFill/>
-          <a:ln/>
-        </p:spPr>
-        <p:txBody>
-          <a:bodyPr wrap="square" lIns="0" tIns="0" rIns="0" bIns="0" rtlCol="0" anchor="t"/>
-          <a:lstStyle/>
-          <a:p>
-            <a:pPr indent="0" marL="0">
-              <a:buNone/>
-            </a:pPr>
-            <a:r>
-              <a:rPr lang="en-US" sz="1800" dirty="0">
-                <a:solidFill>
-                  <a:schemeClr val="tx1"/>
-                </a:solidFill>
-              </a:rPr>
-              <a:t>Svara på frågan och stämma med resultatet. Skriv också vad du inte vet.</a:t>
-            </a:r>
-            <a:endParaRPr lang="en-US" sz="1800" dirty="0"/>
-          </a:p>
-        </p:txBody>
-      </p:sp>
-      <p:sp>
-        <p:nvSpPr>
-          <p:cNvPr id="19" name="Text 16"/>
-          <p:cNvSpPr txBox="1"/>
-          <p:nvPr/>
-        </p:nvSpPr>
-        <p:spPr>
-          <a:xfrm>
-            <a:off x="548640" y="5623560"/>
-            <a:ext cx="11091672" cy="640080"/>
-          </a:xfrm>
-          <a:prstGeom prst="rect">
-            <a:avLst/>
-          </a:prstGeom>
-          <a:noFill/>
-          <a:ln/>
-        </p:spPr>
-        <p:txBody>
-          <a:bodyPr wrap="square" lIns="0" tIns="0" rIns="0" bIns="0" rtlCol="0" anchor="ctr"/>
-          <a:lstStyle/>
-          <a:p>
-            <a:pPr indent="0" marL="0">
-              <a:buNone/>
-            </a:pPr>
-            <a:r>
-              <a:rPr lang="en-US" sz="1600" b="1" dirty="0">
-                <a:solidFill>
-                  <a:schemeClr val="accent2"/>
-                </a:solidFill>
-              </a:rPr>
-              <a:t>Ett resultat som inte stämmer med hypotesen är inget misslyckande.</a:t>
-            </a:r>
-            <a:endParaRPr lang="en-US" sz="1600" dirty="0"/>
+              <a:t>Varför ska en slutsats också säga vad man inte vet?</a:t>
+            </a:r>
+            <a:endParaRPr lang="en-US" sz="2600" dirty="0"/>
           </a:p>
         </p:txBody>
       </p:sp>
@@ -7444,8 +6523,8 @@
         </p:nvSpPr>
         <p:spPr>
           <a:xfrm>
-            <a:off x="548640" y="320040"/>
-            <a:ext cx="11091672" cy="914400"/>
+            <a:off x="731520" y="2103120"/>
+            <a:ext cx="10698480" cy="1463040"/>
           </a:xfrm>
           <a:prstGeom prst="rect">
             <a:avLst/>
@@ -7461,54 +6540,29 @@
               <a:buNone/>
             </a:pPr>
             <a:r>
-              <a:rPr lang="en-US" sz="3600" b="1" dirty="0">
-                <a:solidFill>
-                  <a:schemeClr val="tx2"/>
+              <a:rPr lang="en-US" sz="4400" b="1" dirty="0">
+                <a:solidFill>
+                  <a:schemeClr val="bg1"/>
                 </a:solidFill>
               </a:rPr>
-              <a:t>Kolla dig själv: 1.1.3</a:t>
-            </a:r>
-            <a:endParaRPr lang="en-US" sz="3600" dirty="0"/>
-          </a:p>
-        </p:txBody>
-      </p:sp>
-      <p:sp>
-        <p:nvSpPr>
-          <p:cNvPr id="4" name="Kolla dig själv"/>
+              <a:t>Labb 1.1 Reaktionstid</a:t>
+            </a:r>
+            <a:endParaRPr lang="en-US" sz="4400" dirty="0"/>
+          </a:p>
+        </p:txBody>
+      </p:sp>
+      <p:sp>
+        <p:nvSpPr>
+          <p:cNvPr id="4" name="Text 0"/>
           <p:cNvSpPr/>
-          <p:nvPr/>
-        </p:nvSpPr>
-        <p:spPr>
-          <a:xfrm>
-            <a:off x="548640" y="1554480"/>
-            <a:ext cx="11091672" cy="4297680"/>
-          </a:xfrm>
-          <a:prstGeom prst="roundRect">
-            <a:avLst>
-              <a:gd name="adj" fmla="val 3191"/>
-            </a:avLst>
-          </a:prstGeom>
-          <a:solidFill>
-            <a:schemeClr val="bg2"/>
-          </a:solidFill>
-          <a:ln w="25400">
-            <a:solidFill>
-              <a:schemeClr val="accent3"/>
-            </a:solidFill>
-            <a:prstDash val="solid"/>
-          </a:ln>
-        </p:spPr>
-      </p:sp>
-      <p:sp>
-        <p:nvSpPr>
-          <p:cNvPr id="5" name="Text 2"/>
-          <p:cNvSpPr txBox="1"/>
-          <p:nvPr/>
-        </p:nvSpPr>
-        <p:spPr>
-          <a:xfrm>
-            <a:off x="914400" y="1737360"/>
-            <a:ext cx="5486400" cy="365760"/>
+          <p:nvPr>
+            <p:ph idx="101" type="body" hasCustomPrompt="1"/>
+          </p:nvPr>
+        </p:nvSpPr>
+        <p:spPr>
+          <a:xfrm>
+            <a:off x="731520" y="3657600"/>
+            <a:ext cx="10698480" cy="822960"/>
           </a:xfrm>
           <a:prstGeom prst="rect">
             <a:avLst/>
@@ -7517,164 +6571,21 @@
           <a:ln/>
         </p:spPr>
         <p:txBody>
-          <a:bodyPr wrap="square" lIns="0" tIns="0" rIns="0" bIns="0" rtlCol="0" anchor="ctr"/>
-          <a:lstStyle/>
-          <a:p>
-            <a:pPr indent="0" marL="0">
+          <a:bodyPr wrap="square" lIns="0" tIns="0" rIns="0" bIns="0" rtlCol="0" anchor="t"/>
+          <a:lstStyle/>
+          <a:p>
+            <a:pPr algn="l" indent="0" marL="0">
               <a:buNone/>
             </a:pPr>
             <a:r>
-              <a:rPr lang="en-US" sz="1400" b="1" spc="300" kern="0" dirty="0">
-                <a:solidFill>
-                  <a:schemeClr val="accent1"/>
+              <a:rPr lang="en-US" sz="2200" dirty="0">
+                <a:solidFill>
+                  <a:schemeClr val="bg2"/>
                 </a:solidFill>
               </a:rPr>
-              <a:t>KOLLA DIG SJÄLV</a:t>
-            </a:r>
-            <a:endParaRPr lang="en-US" sz="1400" dirty="0"/>
-          </a:p>
-        </p:txBody>
-      </p:sp>
-      <p:sp>
-        <p:nvSpPr>
-          <p:cNvPr id="6" name="Text 3"/>
-          <p:cNvSpPr txBox="1"/>
-          <p:nvPr/>
-        </p:nvSpPr>
-        <p:spPr>
-          <a:xfrm>
-            <a:off x="914400" y="2194560"/>
-            <a:ext cx="10360152" cy="3474720"/>
-          </a:xfrm>
-          <a:prstGeom prst="rect">
-            <a:avLst/>
-          </a:prstGeom>
-          <a:noFill/>
-          <a:ln/>
-        </p:spPr>
-        <p:txBody>
-          <a:bodyPr wrap="square" lIns="0" tIns="0" rIns="0" bIns="0" rtlCol="0" anchor="t"/>
-          <a:lstStyle/>
-          <a:p>
-            <a:pPr marL="342900" indent="-342900">
-              <a:spcAft>
-                <a:spcPts val="1200"/>
-              </a:spcAft>
-              <a:buSzPct val="100000"/>
-              <a:buFont typeface="+mj-lt"/>
-              <a:buAutoNum type="arabicPeriod" startAt="1"/>
-            </a:pPr>
-            <a:r>
-              <a:rPr lang="en-US" sz="2600" dirty="0">
-                <a:solidFill>
-                  <a:schemeClr val="tx1"/>
-                </a:solidFill>
-              </a:rPr>
-              <a:t>Skillnaden mellan slump och systematiskt fel? Ge ett exempel på vardera.</a:t>
-            </a:r>
-            <a:endParaRPr lang="en-US" sz="2600" dirty="0"/>
-          </a:p>
-          <a:p>
-            <a:pPr marL="342900" indent="-342900">
-              <a:spcAft>
-                <a:spcPts val="1200"/>
-              </a:spcAft>
-              <a:buSzPct val="100000"/>
-              <a:buFont typeface="+mj-lt"/>
-              <a:buAutoNum type="arabicPeriod" startAt="1"/>
-            </a:pPr>
-            <a:r>
-              <a:rPr lang="en-US" sz="2600" dirty="0">
-                <a:solidFill>
-                  <a:schemeClr val="tx1"/>
-                </a:solidFill>
-              </a:rPr>
-              <a:t>Varför minskar slumpen när man upprepar ett försök?</a:t>
-            </a:r>
-            <a:endParaRPr lang="en-US" sz="2600" dirty="0"/>
-          </a:p>
-          <a:p>
-            <a:pPr marL="342900" indent="-342900">
-              <a:spcAft>
-                <a:spcPts val="1200"/>
-              </a:spcAft>
-              <a:buSzPct val="100000"/>
-              <a:buFont typeface="+mj-lt"/>
-              <a:buAutoNum type="arabicPeriod" startAt="1"/>
-            </a:pPr>
-            <a:r>
-              <a:rPr lang="en-US" sz="2600" dirty="0">
-                <a:solidFill>
-                  <a:schemeClr val="tx1"/>
-                </a:solidFill>
-              </a:rPr>
-              <a:t>Vad menas med giltighet?</a:t>
-            </a:r>
-            <a:endParaRPr lang="en-US" sz="2600" dirty="0"/>
-          </a:p>
-          <a:p>
-            <a:pPr marL="342900" indent="-342900">
-              <a:spcAft>
-                <a:spcPts val="1200"/>
-              </a:spcAft>
-              <a:buSzPct val="100000"/>
-              <a:buFont typeface="+mj-lt"/>
-              <a:buAutoNum type="arabicPeriod" startAt="1"/>
-            </a:pPr>
-            <a:r>
-              <a:rPr lang="en-US" sz="2600" dirty="0">
-                <a:solidFill>
-                  <a:schemeClr val="tx1"/>
-                </a:solidFill>
-              </a:rPr>
-              <a:t>Varför ska en slutsats också säga vad man inte vet?</a:t>
-            </a:r>
-            <a:endParaRPr lang="en-US" sz="2600" dirty="0"/>
-          </a:p>
-        </p:txBody>
-      </p:sp>
-      <p:sp>
-        <p:nvSpPr>
-          <p:cNvPr id="25" name="Slide Number Placeholder 0"/>
-          <p:cNvSpPr>
-            <a:spLocks noGrp="1"/>
-          </p:cNvSpPr>
-          <p:nvPr>
-            <p:ph type="sldNum" sz="quarter" idx="4294967295"/>
-          </p:nvPr>
-        </p:nvSpPr>
-        <p:spPr>
-          <a:xfrm>
-            <a:off x="11274552" y="6400800"/>
-            <a:ext cx="457200" cy="274320"/>
-          </a:xfrm>
-          <a:prstGeom prst="rect">
-            <a:avLst/>
-          </a:prstGeom>
-          <a:extLst>
-            <a:ext uri="{C572A759-6A51-4108-AA02-DFA0A04FC94B}">
-              <ma14:wrappingTextBoxFlag xmlns:ma14="http://schemas.microsoft.com/office/mac/drawingml/2011/main" val="0"/>
-            </a:ext>
-          </a:extLst>
-        </p:spPr>
-        <p:txBody>
-          <a:bodyPr/>
-          <a:lstStyle>
-            <a:lvl1pPr>
-              <a:defRPr sz="1100">
-                <a:solidFill>
-                  <a:schemeClr val="tx2"/>
-                </a:solidFill>
-              </a:defRPr>
-            </a:lvl1pPr>
-          </a:lstStyle>
-          <a:p>
-            <a:pPr algn="l"/>
-            <a:fld id="{F7021451-1387-4CA6-816F-3879F97B5CBC}" type="slidenum">
-              <a:rPr b="0" lang="en-US"/>
-              <a:t>17</a:t>
-            </a:fld>
-            <a:endParaRPr lang="en-US"/>
+              <a:t>Ca 45 min: planera och genomför ett rättvist försök</a:t>
+            </a:r>
+            <a:endParaRPr lang="en-US" sz="2200" dirty="0"/>
           </a:p>
         </p:txBody>
       </p:sp>
@@ -7713,8 +6624,8 @@
         </p:nvSpPr>
         <p:spPr>
           <a:xfrm>
-            <a:off x="731520" y="2103120"/>
-            <a:ext cx="10698480" cy="1463040"/>
+            <a:off x="548640" y="320040"/>
+            <a:ext cx="11091672" cy="914400"/>
           </a:xfrm>
           <a:prstGeom prst="rect">
             <a:avLst/>
@@ -7730,29 +6641,27 @@
               <a:buNone/>
             </a:pPr>
             <a:r>
-              <a:rPr lang="en-US" sz="4400" b="1" dirty="0">
-                <a:solidFill>
-                  <a:schemeClr val="bg1"/>
+              <a:rPr lang="en-US" sz="3600" b="1" dirty="0">
+                <a:solidFill>
+                  <a:schemeClr val="tx2"/>
                 </a:solidFill>
               </a:rPr>
-              <a:t>Labb 1.1 Reaktionstid</a:t>
-            </a:r>
-            <a:endParaRPr lang="en-US" sz="4400" dirty="0"/>
-          </a:p>
-        </p:txBody>
-      </p:sp>
-      <p:sp>
-        <p:nvSpPr>
-          <p:cNvPr id="4" name="Text 0"/>
-          <p:cNvSpPr/>
-          <p:nvPr>
-            <p:ph idx="101" type="body" hasCustomPrompt="1"/>
-          </p:nvPr>
-        </p:nvSpPr>
-        <p:spPr>
-          <a:xfrm>
-            <a:off x="731520" y="3657600"/>
-            <a:ext cx="10698480" cy="822960"/>
+              <a:t>Hur snabb är din reaktion?</a:t>
+            </a:r>
+            <a:endParaRPr lang="en-US" sz="3600" dirty="0"/>
+          </a:p>
+        </p:txBody>
+      </p:sp>
+      <p:sp>
+        <p:nvSpPr>
+          <p:cNvPr id="4" name="Text 1"/>
+          <p:cNvSpPr txBox="1"/>
+          <p:nvPr/>
+        </p:nvSpPr>
+        <p:spPr>
+          <a:xfrm>
+            <a:off x="548640" y="1554480"/>
+            <a:ext cx="6245352" cy="4480560"/>
           </a:xfrm>
           <a:prstGeom prst="rect">
             <a:avLst/>
@@ -7764,18 +6673,145 @@
           <a:bodyPr wrap="square" lIns="0" tIns="0" rIns="0" bIns="0" rtlCol="0" anchor="t"/>
           <a:lstStyle/>
           <a:p>
-            <a:pPr algn="l" indent="0" marL="0">
-              <a:buNone/>
+            <a:pPr marL="342900" indent="-342900">
+              <a:spcAft>
+                <a:spcPts val="1000"/>
+              </a:spcAft>
+              <a:buSzPct val="100000"/>
+              <a:buChar char="•"/>
             </a:pPr>
             <a:r>
-              <a:rPr lang="en-US" sz="2200" dirty="0">
-                <a:solidFill>
-                  <a:schemeClr val="bg2"/>
+              <a:rPr lang="en-US" sz="2400" dirty="0">
+                <a:solidFill>
+                  <a:schemeClr val="tx1"/>
                 </a:solidFill>
               </a:rPr>
-              <a:t>Ca 45 min: planera och genomför ett rättvist försök</a:t>
-            </a:r>
-            <a:endParaRPr lang="en-US" sz="2200" dirty="0"/>
+              <a:t>Din kompis släpper linjalen utan förvarning.</a:t>
+            </a:r>
+            <a:endParaRPr lang="en-US" sz="2400" dirty="0"/>
+          </a:p>
+          <a:p>
+            <a:pPr marL="342900" indent="-342900">
+              <a:spcAft>
+                <a:spcPts val="1000"/>
+              </a:spcAft>
+              <a:buSzPct val="100000"/>
+              <a:buChar char="•"/>
+            </a:pPr>
+            <a:r>
+              <a:rPr lang="en-US" sz="2400" dirty="0">
+                <a:solidFill>
+                  <a:schemeClr val="tx1"/>
+                </a:solidFill>
+              </a:rPr>
+              <a:t>Du fångar den. Läs av fallsträckan i cm.</a:t>
+            </a:r>
+            <a:endParaRPr lang="en-US" sz="2400" dirty="0"/>
+          </a:p>
+          <a:p>
+            <a:pPr marL="342900" indent="-342900">
+              <a:spcAft>
+                <a:spcPts val="1000"/>
+              </a:spcAft>
+              <a:buSzPct val="100000"/>
+              <a:buChar char="•"/>
+            </a:pPr>
+            <a:r>
+              <a:rPr lang="en-US" sz="2400" dirty="0">
+                <a:solidFill>
+                  <a:schemeClr val="tx1"/>
+                </a:solidFill>
+              </a:rPr>
+              <a:t>Minst fem försök per hand. Samma linjal, samma startläge.</a:t>
+            </a:r>
+            <a:endParaRPr lang="en-US" sz="2400" dirty="0"/>
+          </a:p>
+          <a:p>
+            <a:pPr marL="342900" indent="-342900">
+              <a:spcAft>
+                <a:spcPts val="1000"/>
+              </a:spcAft>
+              <a:buSzPct val="100000"/>
+              <a:buChar char="•"/>
+            </a:pPr>
+            <a:r>
+              <a:rPr lang="en-US" sz="2400" dirty="0">
+                <a:solidFill>
+                  <a:schemeClr val="tx1"/>
+                </a:solidFill>
+              </a:rPr>
+              <a:t>Tabell, medelvärde och stapeldiagram. Skriv slutsats och felkällor.</a:t>
+            </a:r>
+            <a:endParaRPr lang="en-US" sz="2400" dirty="0"/>
+          </a:p>
+        </p:txBody>
+      </p:sp>
+      <p:pic>
+        <p:nvPicPr>
+          <p:cNvPr id="5" name="Image 0" descr="Hur snabb är din reaktion?">    </p:cNvPr>
+          <p:cNvPicPr>
+            <a:picLocks noChangeAspect="1"/>
+          </p:cNvPicPr>
+          <p:nvPr/>
+        </p:nvPicPr>
+        <p:blipFill>
+          <a:blip r:embed="rId1"/>
+          <a:stretch>
+            <a:fillRect/>
+          </a:stretch>
+        </p:blipFill>
+        <p:spPr>
+          <a:xfrm>
+            <a:off x="7251192" y="2156770"/>
+            <a:ext cx="4389120" cy="3275979"/>
+          </a:xfrm>
+          <a:prstGeom prst="rect">
+            <a:avLst/>
+          </a:prstGeom>
+        </p:spPr>
+      </p:pic>
+      <p:sp>
+        <p:nvSpPr>
+          <p:cNvPr id="25" name="Slide Number Placeholder 0"/>
+          <p:cNvSpPr>
+            <a:spLocks noGrp="1"/>
+          </p:cNvSpPr>
+          <p:nvPr>
+            <p:ph type="sldNum" sz="quarter" idx="4294967295"/>
+          </p:nvPr>
+        </p:nvSpPr>
+        <p:spPr>
+          <a:xfrm>
+            <a:off x="11274552" y="6400800"/>
+            <a:ext cx="457200" cy="274320"/>
+          </a:xfrm>
+          <a:prstGeom prst="rect">
+            <a:avLst/>
+          </a:prstGeom>
+          <a:extLst>
+            <a:ext uri="{C572A759-6A51-4108-AA02-DFA0A04FC94B}">
+              <ma14:wrappingTextBoxFlag xmlns:ma14="http://schemas.microsoft.com/office/mac/drawingml/2011/main" val="0"/>
+            </a:ext>
+          </a:extLst>
+        </p:spPr>
+        <p:txBody>
+          <a:bodyPr/>
+          <a:lstStyle>
+            <a:lvl1pPr>
+              <a:defRPr sz="1100">
+                <a:solidFill>
+                  <a:schemeClr val="tx2"/>
+                </a:solidFill>
+              </a:defRPr>
+            </a:lvl1pPr>
+          </a:lstStyle>
+          <a:p>
+            <a:pPr algn="l"/>
+            <a:fld id="{F7021451-1387-4CA6-816F-3879F97B5CBC}" type="slidenum">
+              <a:rPr b="0" lang="en-US"/>
+              <a:t>18</a:t>
+            </a:fld>
+            <a:endParaRPr lang="en-US"/>
           </a:p>
         </p:txBody>
       </p:sp>
@@ -7836,333 +6872,6 @@
                   <a:schemeClr val="tx2"/>
                 </a:solidFill>
               </a:rPr>
-              <a:t>Hur snabb är din reaktion?</a:t>
-            </a:r>
-            <a:endParaRPr lang="en-US" sz="3600" dirty="0"/>
-          </a:p>
-        </p:txBody>
-      </p:sp>
-      <p:sp>
-        <p:nvSpPr>
-          <p:cNvPr id="4" name="Text 1"/>
-          <p:cNvSpPr txBox="1"/>
-          <p:nvPr/>
-        </p:nvSpPr>
-        <p:spPr>
-          <a:xfrm>
-            <a:off x="548640" y="1554480"/>
-            <a:ext cx="6245352" cy="4480560"/>
-          </a:xfrm>
-          <a:prstGeom prst="rect">
-            <a:avLst/>
-          </a:prstGeom>
-          <a:noFill/>
-          <a:ln/>
-        </p:spPr>
-        <p:txBody>
-          <a:bodyPr wrap="square" lIns="0" tIns="0" rIns="0" bIns="0" rtlCol="0" anchor="t"/>
-          <a:lstStyle/>
-          <a:p>
-            <a:pPr marL="342900" indent="-342900">
-              <a:spcAft>
-                <a:spcPts val="1000"/>
-              </a:spcAft>
-              <a:buSzPct val="100000"/>
-              <a:buChar char="•"/>
-            </a:pPr>
-            <a:r>
-              <a:rPr lang="en-US" sz="2400" dirty="0">
-                <a:solidFill>
-                  <a:schemeClr val="tx1"/>
-                </a:solidFill>
-              </a:rPr>
-              <a:t>Din kompis släpper linjalen utan förvarning.</a:t>
-            </a:r>
-            <a:endParaRPr lang="en-US" sz="2400" dirty="0"/>
-          </a:p>
-          <a:p>
-            <a:pPr marL="342900" indent="-342900">
-              <a:spcAft>
-                <a:spcPts val="1000"/>
-              </a:spcAft>
-              <a:buSzPct val="100000"/>
-              <a:buChar char="•"/>
-            </a:pPr>
-            <a:r>
-              <a:rPr lang="en-US" sz="2400" dirty="0">
-                <a:solidFill>
-                  <a:schemeClr val="tx1"/>
-                </a:solidFill>
-              </a:rPr>
-              <a:t>Du fångar den. Läs av fallsträckan i cm.</a:t>
-            </a:r>
-            <a:endParaRPr lang="en-US" sz="2400" dirty="0"/>
-          </a:p>
-          <a:p>
-            <a:pPr marL="342900" indent="-342900">
-              <a:spcAft>
-                <a:spcPts val="1000"/>
-              </a:spcAft>
-              <a:buSzPct val="100000"/>
-              <a:buChar char="•"/>
-            </a:pPr>
-            <a:r>
-              <a:rPr lang="en-US" sz="2400" dirty="0">
-                <a:solidFill>
-                  <a:schemeClr val="tx1"/>
-                </a:solidFill>
-              </a:rPr>
-              <a:t>Minst fem försök per hand. Samma linjal, samma startläge.</a:t>
-            </a:r>
-            <a:endParaRPr lang="en-US" sz="2400" dirty="0"/>
-          </a:p>
-          <a:p>
-            <a:pPr marL="342900" indent="-342900">
-              <a:spcAft>
-                <a:spcPts val="1000"/>
-              </a:spcAft>
-              <a:buSzPct val="100000"/>
-              <a:buChar char="•"/>
-            </a:pPr>
-            <a:r>
-              <a:rPr lang="en-US" sz="2400" dirty="0">
-                <a:solidFill>
-                  <a:schemeClr val="tx1"/>
-                </a:solidFill>
-              </a:rPr>
-              <a:t>Tabell, medelvärde och stapeldiagram. Skriv slutsats och felkällor.</a:t>
-            </a:r>
-            <a:endParaRPr lang="en-US" sz="2400" dirty="0"/>
-          </a:p>
-        </p:txBody>
-      </p:sp>
-      <p:pic>
-        <p:nvPicPr>
-          <p:cNvPr id="5" name="Image 0" descr="Hur snabb är din reaktion?">    </p:cNvPr>
-          <p:cNvPicPr>
-            <a:picLocks noChangeAspect="1"/>
-          </p:cNvPicPr>
-          <p:nvPr/>
-        </p:nvPicPr>
-        <p:blipFill>
-          <a:blip r:embed="rId1"/>
-          <a:stretch>
-            <a:fillRect/>
-          </a:stretch>
-        </p:blipFill>
-        <p:spPr>
-          <a:xfrm>
-            <a:off x="7251192" y="2156770"/>
-            <a:ext cx="4389120" cy="3275979"/>
-          </a:xfrm>
-          <a:prstGeom prst="rect">
-            <a:avLst/>
-          </a:prstGeom>
-        </p:spPr>
-      </p:pic>
-      <p:sp>
-        <p:nvSpPr>
-          <p:cNvPr id="25" name="Slide Number Placeholder 0"/>
-          <p:cNvSpPr>
-            <a:spLocks noGrp="1"/>
-          </p:cNvSpPr>
-          <p:nvPr>
-            <p:ph type="sldNum" sz="quarter" idx="4294967295"/>
-          </p:nvPr>
-        </p:nvSpPr>
-        <p:spPr>
-          <a:xfrm>
-            <a:off x="11274552" y="6400800"/>
-            <a:ext cx="457200" cy="274320"/>
-          </a:xfrm>
-          <a:prstGeom prst="rect">
-            <a:avLst/>
-          </a:prstGeom>
-          <a:extLst>
-            <a:ext uri="{C572A759-6A51-4108-AA02-DFA0A04FC94B}">
-              <ma14:wrappingTextBoxFlag xmlns:ma14="http://schemas.microsoft.com/office/mac/drawingml/2011/main" val="0"/>
-            </a:ext>
-          </a:extLst>
-        </p:spPr>
-        <p:txBody>
-          <a:bodyPr/>
-          <a:lstStyle>
-            <a:lvl1pPr>
-              <a:defRPr sz="1100">
-                <a:solidFill>
-                  <a:schemeClr val="tx2"/>
-                </a:solidFill>
-              </a:defRPr>
-            </a:lvl1pPr>
-          </a:lstStyle>
-          <a:p>
-            <a:pPr algn="l"/>
-            <a:fld id="{F7021451-1387-4CA6-816F-3879F97B5CBC}" type="slidenum">
-              <a:rPr b="0" lang="en-US"/>
-              <a:t>19</a:t>
-            </a:fld>
-            <a:endParaRPr lang="en-US"/>
-          </a:p>
-        </p:txBody>
-      </p:sp>
-    </p:spTree>
-  </p:cSld>
-  <p:clrMapOvr>
-    <a:masterClrMapping/>
-  </p:clrMapOvr>
-</p:sld>
-</file>
-
-<file path=ppt/slides/slide2.xml><?xml version="1.0" encoding="utf-8"?>
-<p:sld xmlns:a="http://schemas.openxmlformats.org/drawingml/2006/main" xmlns:r="http://schemas.openxmlformats.org/officeDocument/2006/relationships" xmlns:p="http://schemas.openxmlformats.org/presentationml/2006/main">
-  <p:cSld name="Slide 2">
-    <p:spTree>
-      <p:nvGrpSpPr>
-        <p:cNvPr id="1" name=""/>
-        <p:cNvGrpSpPr/>
-        <p:nvPr/>
-      </p:nvGrpSpPr>
-      <p:grpSpPr>
-        <a:xfrm>
-          <a:off x="0" y="0"/>
-          <a:ext cx="0" cy="0"/>
-          <a:chOff x="0" y="0"/>
-          <a:chExt cx="0" cy="0"/>
-        </a:xfrm>
-      </p:grpSpPr>
-      <p:sp>
-        <p:nvSpPr>
-          <p:cNvPr id="3" name="Text 0"/>
-          <p:cNvSpPr/>
-          <p:nvPr>
-            <p:ph idx="100" type="title" hasCustomPrompt="1"/>
-          </p:nvPr>
-        </p:nvSpPr>
-        <p:spPr>
-          <a:xfrm>
-            <a:off x="731520" y="2103120"/>
-            <a:ext cx="10698480" cy="1463040"/>
-          </a:xfrm>
-          <a:prstGeom prst="rect">
-            <a:avLst/>
-          </a:prstGeom>
-          <a:noFill/>
-          <a:ln/>
-        </p:spPr>
-        <p:txBody>
-          <a:bodyPr wrap="square" lIns="0" tIns="0" rIns="0" bIns="0" rtlCol="0" anchor="ctr"/>
-          <a:lstStyle/>
-          <a:p>
-            <a:pPr algn="l" indent="0" marL="0">
-              <a:buNone/>
-            </a:pPr>
-            <a:r>
-              <a:rPr lang="en-US" sz="4400" b="1" dirty="0">
-                <a:solidFill>
-                  <a:schemeClr val="bg1"/>
-                </a:solidFill>
-              </a:rPr>
-              <a:t>1.1.1 Från fråga till plan</a:t>
-            </a:r>
-            <a:endParaRPr lang="en-US" sz="4400" dirty="0"/>
-          </a:p>
-        </p:txBody>
-      </p:sp>
-      <p:sp>
-        <p:nvSpPr>
-          <p:cNvPr id="4" name="Text 0"/>
-          <p:cNvSpPr/>
-          <p:nvPr>
-            <p:ph idx="101" type="body" hasCustomPrompt="1"/>
-          </p:nvPr>
-        </p:nvSpPr>
-        <p:spPr>
-          <a:xfrm>
-            <a:off x="731520" y="3657600"/>
-            <a:ext cx="10698480" cy="822960"/>
-          </a:xfrm>
-          <a:prstGeom prst="rect">
-            <a:avLst/>
-          </a:prstGeom>
-          <a:noFill/>
-          <a:ln/>
-        </p:spPr>
-        <p:txBody>
-          <a:bodyPr wrap="square" lIns="0" tIns="0" rIns="0" bIns="0" rtlCol="0" anchor="t"/>
-          <a:lstStyle/>
-          <a:p>
-            <a:pPr algn="l" indent="0" marL="0">
-              <a:buNone/>
-            </a:pPr>
-            <a:r>
-              <a:rPr lang="en-US" sz="2200" dirty="0">
-                <a:solidFill>
-                  <a:schemeClr val="bg2"/>
-                </a:solidFill>
-              </a:rPr>
-              <a:t>Lektion 1: undersökningsbar fråga, hypotes och rättvist försök</a:t>
-            </a:r>
-            <a:endParaRPr lang="en-US" sz="2200" dirty="0"/>
-          </a:p>
-        </p:txBody>
-      </p:sp>
-    </p:spTree>
-  </p:cSld>
-  <p:clrMapOvr>
-    <a:masterClrMapping/>
-  </p:clrMapOvr>
-</p:sld>
-</file>
-
-<file path=ppt/slides/slide20.xml><?xml version="1.0" encoding="utf-8"?>
-<p:sld xmlns:a="http://schemas.openxmlformats.org/drawingml/2006/main" xmlns:r="http://schemas.openxmlformats.org/officeDocument/2006/relationships" xmlns:p="http://schemas.openxmlformats.org/presentationml/2006/main">
-  <p:cSld name="Slide 20">
-    <p:spTree>
-      <p:nvGrpSpPr>
-        <p:cNvPr id="1" name=""/>
-        <p:cNvGrpSpPr/>
-        <p:nvPr/>
-      </p:nvGrpSpPr>
-      <p:grpSpPr>
-        <a:xfrm>
-          <a:off x="0" y="0"/>
-          <a:ext cx="0" cy="0"/>
-          <a:chOff x="0" y="0"/>
-          <a:chExt cx="0" cy="0"/>
-        </a:xfrm>
-      </p:grpSpPr>
-      <p:sp>
-        <p:nvSpPr>
-          <p:cNvPr id="3" name="Text 0"/>
-          <p:cNvSpPr/>
-          <p:nvPr>
-            <p:ph idx="100" type="title" hasCustomPrompt="1"/>
-          </p:nvPr>
-        </p:nvSpPr>
-        <p:spPr>
-          <a:xfrm>
-            <a:off x="548640" y="320040"/>
-            <a:ext cx="11091672" cy="914400"/>
-          </a:xfrm>
-          <a:prstGeom prst="rect">
-            <a:avLst/>
-          </a:prstGeom>
-          <a:noFill/>
-          <a:ln/>
-        </p:spPr>
-        <p:txBody>
-          <a:bodyPr wrap="square" lIns="0" tIns="0" rIns="0" bIns="0" rtlCol="0" anchor="ctr"/>
-          <a:lstStyle/>
-          <a:p>
-            <a:pPr algn="l" indent="0" marL="0">
-              <a:buNone/>
-            </a:pPr>
-            <a:r>
-              <a:rPr lang="en-US" sz="3600" b="1" dirty="0">
-                <a:solidFill>
-                  <a:schemeClr val="tx2"/>
-                </a:solidFill>
-              </a:rPr>
               <a:t>Från fallsträcka till reaktionstid</a:t>
             </a:r>
             <a:endParaRPr lang="en-US" sz="3600" dirty="0"/>
@@ -8171,7 +6880,7 @@
       </p:sp>
       <p:graphicFrame>
         <p:nvGraphicFramePr>
-          <p:cNvPr id="21" name="Table 0"/>
+          <p:cNvPr id="20" name="Table 0"/>
           <p:cNvGraphicFramePr>
             <a:graphicFrameLocks noGrp="1"/>
           </p:cNvGraphicFramePr>
@@ -9137,9 +7846,110 @@
             <a:pPr algn="l"/>
             <a:fld id="{F7021451-1387-4CA6-816F-3879F97B5CBC}" type="slidenum">
               <a:rPr b="0" lang="en-US"/>
-              <a:t>20</a:t>
+              <a:t>19</a:t>
             </a:fld>
             <a:endParaRPr lang="en-US"/>
+          </a:p>
+        </p:txBody>
+      </p:sp>
+    </p:spTree>
+  </p:cSld>
+  <p:clrMapOvr>
+    <a:masterClrMapping/>
+  </p:clrMapOvr>
+</p:sld>
+</file>
+
+<file path=ppt/slides/slide2.xml><?xml version="1.0" encoding="utf-8"?>
+<p:sld xmlns:a="http://schemas.openxmlformats.org/drawingml/2006/main" xmlns:r="http://schemas.openxmlformats.org/officeDocument/2006/relationships" xmlns:p="http://schemas.openxmlformats.org/presentationml/2006/main">
+  <p:cSld name="Slide 2">
+    <p:spTree>
+      <p:nvGrpSpPr>
+        <p:cNvPr id="1" name=""/>
+        <p:cNvGrpSpPr/>
+        <p:nvPr/>
+      </p:nvGrpSpPr>
+      <p:grpSpPr>
+        <a:xfrm>
+          <a:off x="0" y="0"/>
+          <a:ext cx="0" cy="0"/>
+          <a:chOff x="0" y="0"/>
+          <a:chExt cx="0" cy="0"/>
+        </a:xfrm>
+      </p:grpSpPr>
+      <p:sp>
+        <p:nvSpPr>
+          <p:cNvPr id="3" name="Text 0"/>
+          <p:cNvSpPr/>
+          <p:nvPr>
+            <p:ph idx="100" type="title" hasCustomPrompt="1"/>
+          </p:nvPr>
+        </p:nvSpPr>
+        <p:spPr>
+          <a:xfrm>
+            <a:off x="731520" y="2103120"/>
+            <a:ext cx="10698480" cy="1463040"/>
+          </a:xfrm>
+          <a:prstGeom prst="rect">
+            <a:avLst/>
+          </a:prstGeom>
+          <a:noFill/>
+          <a:ln/>
+        </p:spPr>
+        <p:txBody>
+          <a:bodyPr wrap="square" lIns="0" tIns="0" rIns="0" bIns="0" rtlCol="0" anchor="ctr"/>
+          <a:lstStyle/>
+          <a:p>
+            <a:pPr algn="l" indent="0" marL="0">
+              <a:buNone/>
+            </a:pPr>
+            <a:r>
+              <a:rPr lang="en-US" sz="4400" b="1" dirty="0">
+                <a:solidFill>
+                  <a:schemeClr val="bg1"/>
+                </a:solidFill>
+              </a:rPr>
+              <a:t>1.1.1 Från fråga till plan</a:t>
+            </a:r>
+            <a:endParaRPr lang="en-US" sz="4400" dirty="0"/>
+          </a:p>
+        </p:txBody>
+      </p:sp>
+      <p:sp>
+        <p:nvSpPr>
+          <p:cNvPr id="4" name="Text 0"/>
+          <p:cNvSpPr/>
+          <p:nvPr>
+            <p:ph idx="101" type="body" hasCustomPrompt="1"/>
+          </p:nvPr>
+        </p:nvSpPr>
+        <p:spPr>
+          <a:xfrm>
+            <a:off x="731520" y="3657600"/>
+            <a:ext cx="10698480" cy="822960"/>
+          </a:xfrm>
+          <a:prstGeom prst="rect">
+            <a:avLst/>
+          </a:prstGeom>
+          <a:noFill/>
+          <a:ln/>
+        </p:spPr>
+        <p:txBody>
+          <a:bodyPr wrap="square" lIns="0" tIns="0" rIns="0" bIns="0" rtlCol="0" anchor="t"/>
+          <a:lstStyle/>
+          <a:p>
+            <a:pPr algn="l" indent="0" marL="0">
+              <a:buNone/>
+            </a:pPr>
+            <a:r>
+              <a:rPr lang="en-US" sz="2200" dirty="0">
+                <a:solidFill>
+                  <a:schemeClr val="bg2"/>
+                </a:solidFill>
+              </a:rPr>
+              <a:t>Lektion 1: undersökningsbar fråga, hypotes och rättvist försök</a:t>
+            </a:r>
+            <a:endParaRPr lang="en-US" sz="2200" dirty="0"/>
           </a:p>
         </p:txBody>
       </p:sp>
@@ -9200,214 +8010,6 @@
                   <a:schemeClr val="tx2"/>
                 </a:solidFill>
               </a:rPr>
-              <a:t>Vad är biologi?</a:t>
-            </a:r>
-            <a:endParaRPr lang="en-US" sz="3600" dirty="0"/>
-          </a:p>
-        </p:txBody>
-      </p:sp>
-      <p:sp>
-        <p:nvSpPr>
-          <p:cNvPr id="4" name="Text 1"/>
-          <p:cNvSpPr txBox="1"/>
-          <p:nvPr/>
-        </p:nvSpPr>
-        <p:spPr>
-          <a:xfrm>
-            <a:off x="548640" y="1554480"/>
-            <a:ext cx="4233672" cy="4480560"/>
-          </a:xfrm>
-          <a:prstGeom prst="rect">
-            <a:avLst/>
-          </a:prstGeom>
-          <a:noFill/>
-          <a:ln/>
-        </p:spPr>
-        <p:txBody>
-          <a:bodyPr wrap="square" lIns="0" tIns="0" rIns="0" bIns="0" rtlCol="0" anchor="t"/>
-          <a:lstStyle/>
-          <a:p>
-            <a:pPr marL="342900" indent="-342900">
-              <a:spcAft>
-                <a:spcPts val="1000"/>
-              </a:spcAft>
-              <a:buSzPct val="100000"/>
-              <a:buChar char="•"/>
-            </a:pPr>
-            <a:r>
-              <a:rPr lang="en-US" sz="2400" dirty="0">
-                <a:solidFill>
-                  <a:schemeClr val="tx1"/>
-                </a:solidFill>
-              </a:rPr>
-              <a:t>Biologi är läran om livet.</a:t>
-            </a:r>
-            <a:endParaRPr lang="en-US" sz="2400" dirty="0"/>
-          </a:p>
-          <a:p>
-            <a:pPr marL="342900" indent="-342900">
-              <a:spcAft>
-                <a:spcPts val="1000"/>
-              </a:spcAft>
-              <a:buSzPct val="100000"/>
-              <a:buChar char="•"/>
-            </a:pPr>
-            <a:r>
-              <a:rPr lang="en-US" sz="2400" dirty="0">
-                <a:solidFill>
-                  <a:schemeClr val="tx1"/>
-                </a:solidFill>
-              </a:rPr>
-              <a:t>Allt levande kallas organismer.</a:t>
-            </a:r>
-            <a:endParaRPr lang="en-US" sz="2400" dirty="0"/>
-          </a:p>
-          <a:p>
-            <a:pPr marL="342900" indent="-342900">
-              <a:spcAft>
-                <a:spcPts val="1000"/>
-              </a:spcAft>
-              <a:buSzPct val="100000"/>
-              <a:buChar char="•"/>
-            </a:pPr>
-            <a:r>
-              <a:rPr lang="en-US" sz="2400" dirty="0">
-                <a:solidFill>
-                  <a:schemeClr val="tx1"/>
-                </a:solidFill>
-              </a:rPr>
-              <a:t>Biologer arbetar ute i naturen, i labb, på sjukhus och vid datorer.</a:t>
-            </a:r>
-            <a:endParaRPr lang="en-US" sz="2400" dirty="0"/>
-          </a:p>
-        </p:txBody>
-      </p:sp>
-      <p:pic>
-        <p:nvPicPr>
-          <p:cNvPr id="5" name="Image 0" descr="Vad är biologi?">    </p:cNvPr>
-          <p:cNvPicPr>
-            <a:picLocks noChangeAspect="1"/>
-          </p:cNvPicPr>
-          <p:nvPr/>
-        </p:nvPicPr>
-        <p:blipFill>
-          <a:blip r:embed="rId1"/>
-          <a:stretch>
-            <a:fillRect/>
-          </a:stretch>
-        </p:blipFill>
-        <p:spPr>
-          <a:xfrm>
-            <a:off x="5239512" y="2843870"/>
-            <a:ext cx="6400800" cy="1901780"/>
-          </a:xfrm>
-          <a:prstGeom prst="rect">
-            <a:avLst/>
-          </a:prstGeom>
-        </p:spPr>
-      </p:pic>
-      <p:sp>
-        <p:nvSpPr>
-          <p:cNvPr id="25" name="Slide Number Placeholder 0"/>
-          <p:cNvSpPr>
-            <a:spLocks noGrp="1"/>
-          </p:cNvSpPr>
-          <p:nvPr>
-            <p:ph type="sldNum" sz="quarter" idx="4294967295"/>
-          </p:nvPr>
-        </p:nvSpPr>
-        <p:spPr>
-          <a:xfrm>
-            <a:off x="11274552" y="6400800"/>
-            <a:ext cx="457200" cy="274320"/>
-          </a:xfrm>
-          <a:prstGeom prst="rect">
-            <a:avLst/>
-          </a:prstGeom>
-          <a:extLst>
-            <a:ext uri="{C572A759-6A51-4108-AA02-DFA0A04FC94B}">
-              <ma14:wrappingTextBoxFlag xmlns:ma14="http://schemas.microsoft.com/office/mac/drawingml/2011/main" val="0"/>
-            </a:ext>
-          </a:extLst>
-        </p:spPr>
-        <p:txBody>
-          <a:bodyPr/>
-          <a:lstStyle>
-            <a:lvl1pPr>
-              <a:defRPr sz="1100">
-                <a:solidFill>
-                  <a:schemeClr val="tx2"/>
-                </a:solidFill>
-              </a:defRPr>
-            </a:lvl1pPr>
-          </a:lstStyle>
-          <a:p>
-            <a:pPr algn="l"/>
-            <a:fld id="{F7021451-1387-4CA6-816F-3879F97B5CBC}" type="slidenum">
-              <a:rPr b="0" lang="en-US"/>
-              <a:t>3</a:t>
-            </a:fld>
-            <a:endParaRPr lang="en-US"/>
-          </a:p>
-        </p:txBody>
-      </p:sp>
-    </p:spTree>
-  </p:cSld>
-  <p:clrMapOvr>
-    <a:masterClrMapping/>
-  </p:clrMapOvr>
-</p:sld>
-</file>
-
-<file path=ppt/slides/slide4.xml><?xml version="1.0" encoding="utf-8"?>
-<p:sld xmlns:a="http://schemas.openxmlformats.org/drawingml/2006/main" xmlns:r="http://schemas.openxmlformats.org/officeDocument/2006/relationships" xmlns:p="http://schemas.openxmlformats.org/presentationml/2006/main">
-  <p:cSld name="Slide 4">
-    <p:spTree>
-      <p:nvGrpSpPr>
-        <p:cNvPr id="1" name=""/>
-        <p:cNvGrpSpPr/>
-        <p:nvPr/>
-      </p:nvGrpSpPr>
-      <p:grpSpPr>
-        <a:xfrm>
-          <a:off x="0" y="0"/>
-          <a:ext cx="0" cy="0"/>
-          <a:chOff x="0" y="0"/>
-          <a:chExt cx="0" cy="0"/>
-        </a:xfrm>
-      </p:grpSpPr>
-      <p:sp>
-        <p:nvSpPr>
-          <p:cNvPr id="3" name="Text 0"/>
-          <p:cNvSpPr/>
-          <p:nvPr>
-            <p:ph idx="100" type="title" hasCustomPrompt="1"/>
-          </p:nvPr>
-        </p:nvSpPr>
-        <p:spPr>
-          <a:xfrm>
-            <a:off x="548640" y="320040"/>
-            <a:ext cx="11091672" cy="914400"/>
-          </a:xfrm>
-          <a:prstGeom prst="rect">
-            <a:avLst/>
-          </a:prstGeom>
-          <a:noFill/>
-          <a:ln/>
-        </p:spPr>
-        <p:txBody>
-          <a:bodyPr wrap="square" lIns="0" tIns="0" rIns="0" bIns="0" rtlCol="0" anchor="ctr"/>
-          <a:lstStyle/>
-          <a:p>
-            <a:pPr algn="l" indent="0" marL="0">
-              <a:buNone/>
-            </a:pPr>
-            <a:r>
-              <a:rPr lang="en-US" sz="3600" b="1" dirty="0">
-                <a:solidFill>
-                  <a:schemeClr val="tx2"/>
-                </a:solidFill>
-              </a:rPr>
               <a:t>Gör frågan undersökningsbar</a:t>
             </a:r>
             <a:endParaRPr lang="en-US" sz="3600" dirty="0"/>
@@ -9416,7 +8018,7 @@
       </p:sp>
       <p:graphicFrame>
         <p:nvGraphicFramePr>
-          <p:cNvPr id="5" name="Table 0"/>
+          <p:cNvPr id="4" name="Table 0"/>
           <p:cNvGraphicFramePr>
             <a:graphicFrameLocks noGrp="1"/>
           </p:cNvGraphicFramePr>
@@ -10015,6 +8617,232 @@
             <a:pPr algn="l"/>
             <a:fld id="{F7021451-1387-4CA6-816F-3879F97B5CBC}" type="slidenum">
               <a:rPr b="0" lang="en-US"/>
+              <a:t>3</a:t>
+            </a:fld>
+            <a:endParaRPr lang="en-US"/>
+          </a:p>
+        </p:txBody>
+      </p:sp>
+    </p:spTree>
+  </p:cSld>
+  <p:clrMapOvr>
+    <a:masterClrMapping/>
+  </p:clrMapOvr>
+</p:sld>
+</file>
+
+<file path=ppt/slides/slide4.xml><?xml version="1.0" encoding="utf-8"?>
+<p:sld xmlns:a="http://schemas.openxmlformats.org/drawingml/2006/main" xmlns:r="http://schemas.openxmlformats.org/officeDocument/2006/relationships" xmlns:p="http://schemas.openxmlformats.org/presentationml/2006/main">
+  <p:cSld name="Slide 4">
+    <p:spTree>
+      <p:nvGrpSpPr>
+        <p:cNvPr id="1" name=""/>
+        <p:cNvGrpSpPr/>
+        <p:nvPr/>
+      </p:nvGrpSpPr>
+      <p:grpSpPr>
+        <a:xfrm>
+          <a:off x="0" y="0"/>
+          <a:ext cx="0" cy="0"/>
+          <a:chOff x="0" y="0"/>
+          <a:chExt cx="0" cy="0"/>
+        </a:xfrm>
+      </p:grpSpPr>
+      <p:sp>
+        <p:nvSpPr>
+          <p:cNvPr id="3" name="Text 0"/>
+          <p:cNvSpPr/>
+          <p:nvPr>
+            <p:ph idx="100" type="title" hasCustomPrompt="1"/>
+          </p:nvPr>
+        </p:nvSpPr>
+        <p:spPr>
+          <a:xfrm>
+            <a:off x="548640" y="320040"/>
+            <a:ext cx="11091672" cy="914400"/>
+          </a:xfrm>
+          <a:prstGeom prst="rect">
+            <a:avLst/>
+          </a:prstGeom>
+          <a:noFill/>
+          <a:ln/>
+        </p:spPr>
+        <p:txBody>
+          <a:bodyPr wrap="square" lIns="0" tIns="0" rIns="0" bIns="0" rtlCol="0" anchor="ctr"/>
+          <a:lstStyle/>
+          <a:p>
+            <a:pPr algn="l" indent="0" marL="0">
+              <a:buNone/>
+            </a:pPr>
+            <a:r>
+              <a:rPr lang="en-US" sz="3600" b="1" dirty="0">
+                <a:solidFill>
+                  <a:schemeClr val="tx2"/>
+                </a:solidFill>
+              </a:rPr>
+              <a:t>Forskning är en cykel</a:t>
+            </a:r>
+            <a:endParaRPr lang="en-US" sz="3600" dirty="0"/>
+          </a:p>
+        </p:txBody>
+      </p:sp>
+      <p:sp>
+        <p:nvSpPr>
+          <p:cNvPr id="4" name="Text 1"/>
+          <p:cNvSpPr txBox="1"/>
+          <p:nvPr/>
+        </p:nvSpPr>
+        <p:spPr>
+          <a:xfrm>
+            <a:off x="548640" y="1554480"/>
+            <a:ext cx="4782312" cy="4480560"/>
+          </a:xfrm>
+          <a:prstGeom prst="rect">
+            <a:avLst/>
+          </a:prstGeom>
+          <a:noFill/>
+          <a:ln/>
+        </p:spPr>
+        <p:txBody>
+          <a:bodyPr wrap="square" lIns="0" tIns="0" rIns="0" bIns="0" rtlCol="0" anchor="t"/>
+          <a:lstStyle/>
+          <a:p>
+            <a:pPr marL="342900" indent="-342900">
+              <a:spcAft>
+                <a:spcPts val="1000"/>
+              </a:spcAft>
+              <a:buSzPct val="100000"/>
+              <a:buChar char="•"/>
+            </a:pPr>
+            <a:r>
+              <a:rPr lang="en-US" sz="2400" dirty="0">
+                <a:solidFill>
+                  <a:schemeClr val="tx1"/>
+                </a:solidFill>
+              </a:rPr>
+              <a:t>Fråga: vad undrar jag?</a:t>
+            </a:r>
+            <a:endParaRPr lang="en-US" sz="2400" dirty="0"/>
+          </a:p>
+          <a:p>
+            <a:pPr marL="342900" indent="-342900">
+              <a:spcAft>
+                <a:spcPts val="1000"/>
+              </a:spcAft>
+              <a:buSzPct val="100000"/>
+              <a:buChar char="•"/>
+            </a:pPr>
+            <a:r>
+              <a:rPr lang="en-US" sz="2400" dirty="0">
+                <a:solidFill>
+                  <a:schemeClr val="tx1"/>
+                </a:solidFill>
+              </a:rPr>
+              <a:t>Hypotes: ett prövbart svar med en motivering.</a:t>
+            </a:r>
+            <a:endParaRPr lang="en-US" sz="2400" dirty="0"/>
+          </a:p>
+          <a:p>
+            <a:pPr marL="342900" indent="-342900">
+              <a:spcAft>
+                <a:spcPts val="1000"/>
+              </a:spcAft>
+              <a:buSzPct val="100000"/>
+              <a:buChar char="•"/>
+            </a:pPr>
+            <a:r>
+              <a:rPr lang="en-US" sz="2400" dirty="0">
+                <a:solidFill>
+                  <a:schemeClr val="tx1"/>
+                </a:solidFill>
+              </a:rPr>
+              <a:t>Testa: gör en undersökning.</a:t>
+            </a:r>
+            <a:endParaRPr lang="en-US" sz="2400" dirty="0"/>
+          </a:p>
+          <a:p>
+            <a:pPr marL="342900" indent="-342900">
+              <a:spcAft>
+                <a:spcPts val="1000"/>
+              </a:spcAft>
+              <a:buSzPct val="100000"/>
+              <a:buChar char="•"/>
+            </a:pPr>
+            <a:r>
+              <a:rPr lang="en-US" sz="2400" dirty="0">
+                <a:solidFill>
+                  <a:schemeClr val="tx1"/>
+                </a:solidFill>
+              </a:rPr>
+              <a:t>Slutsats: vad lärde jag mig? Ofta kommer en ny fråga.</a:t>
+            </a:r>
+            <a:endParaRPr lang="en-US" sz="2400" dirty="0"/>
+          </a:p>
+        </p:txBody>
+      </p:sp>
+      <p:pic>
+        <p:nvPicPr>
+          <p:cNvPr id="5" name="Image 0" descr="Forskning är en cykel">    </p:cNvPr>
+          <p:cNvPicPr>
+            <a:picLocks noChangeAspect="1"/>
+          </p:cNvPicPr>
+          <p:nvPr/>
+        </p:nvPicPr>
+        <p:blipFill>
+          <a:blip r:embed="rId1"/>
+          <a:stretch>
+            <a:fillRect/>
+          </a:stretch>
+        </p:blipFill>
+        <p:spPr>
+          <a:xfrm>
+            <a:off x="5788152" y="2324851"/>
+            <a:ext cx="5852160" cy="2939817"/>
+          </a:xfrm>
+          <a:prstGeom prst="rect">
+            <a:avLst/>
+          </a:prstGeom>
+        </p:spPr>
+      </p:pic>
+      <p:sp>
+        <p:nvSpPr>
+          <p:cNvPr id="25" name="Slide Number Placeholder 0"/>
+          <p:cNvSpPr>
+            <a:spLocks noGrp="1"/>
+          </p:cNvSpPr>
+          <p:nvPr>
+            <p:ph type="sldNum" sz="quarter" idx="4294967295"/>
+          </p:nvPr>
+        </p:nvSpPr>
+        <p:spPr>
+          <a:xfrm>
+            <a:off x="11274552" y="6400800"/>
+            <a:ext cx="457200" cy="274320"/>
+          </a:xfrm>
+          <a:prstGeom prst="rect">
+            <a:avLst/>
+          </a:prstGeom>
+          <a:extLst>
+            <a:ext uri="{C572A759-6A51-4108-AA02-DFA0A04FC94B}">
+              <ma14:wrappingTextBoxFlag xmlns:ma14="http://schemas.microsoft.com/office/mac/drawingml/2011/main" val="0"/>
+            </a:ext>
+          </a:extLst>
+        </p:spPr>
+        <p:txBody>
+          <a:bodyPr/>
+          <a:lstStyle>
+            <a:lvl1pPr>
+              <a:defRPr sz="1100">
+                <a:solidFill>
+                  <a:schemeClr val="tx2"/>
+                </a:solidFill>
+              </a:defRPr>
+            </a:lvl1pPr>
+          </a:lstStyle>
+          <a:p>
+            <a:pPr algn="l"/>
+            <a:fld id="{F7021451-1387-4CA6-816F-3879F97B5CBC}" type="slidenum">
+              <a:rPr b="0" lang="en-US"/>
               <a:t>4</a:t>
             </a:fld>
             <a:endParaRPr lang="en-US"/>
@@ -10078,7 +8906,7 @@
                   <a:schemeClr val="tx2"/>
                 </a:solidFill>
               </a:rPr>
-              <a:t>Forskning är en cykel</a:t>
+              <a:t>Ett rättvist försök: krasse</a:t>
             </a:r>
             <a:endParaRPr lang="en-US" sz="3600" dirty="0"/>
           </a:p>
@@ -10093,7 +8921,7 @@
         <p:spPr>
           <a:xfrm>
             <a:off x="548640" y="1554480"/>
-            <a:ext cx="4782312" cy="4480560"/>
+            <a:ext cx="5330952" cy="4480560"/>
           </a:xfrm>
           <a:prstGeom prst="rect">
             <a:avLst/>
@@ -10113,14 +8941,14 @@
               <a:buChar char="•"/>
             </a:pPr>
             <a:r>
-              <a:rPr lang="en-US" sz="2400" dirty="0">
+              <a:rPr lang="en-US" sz="2200" dirty="0">
                 <a:solidFill>
                   <a:schemeClr val="tx1"/>
                 </a:solidFill>
               </a:rPr>
-              <a:t>Fråga: vad undrar jag?</a:t>
-            </a:r>
-            <a:endParaRPr lang="en-US" sz="2400" dirty="0"/>
+              <a:t>Oberoende variabel: ljus eller mörker (det vi ändrar).</a:t>
+            </a:r>
+            <a:endParaRPr lang="en-US" sz="2200" dirty="0"/>
           </a:p>
           <a:p>
             <a:pPr marL="342900" indent="-342900">
@@ -10131,14 +8959,14 @@
               <a:buChar char="•"/>
             </a:pPr>
             <a:r>
-              <a:rPr lang="en-US" sz="2400" dirty="0">
+              <a:rPr lang="en-US" sz="2200" dirty="0">
                 <a:solidFill>
                   <a:schemeClr val="tx1"/>
                 </a:solidFill>
               </a:rPr>
-              <a:t>Hypotes: ett prövbart svar med en motivering.</a:t>
-            </a:r>
-            <a:endParaRPr lang="en-US" sz="2400" dirty="0"/>
+              <a:t>Beroende variabel: höjd i mm (det vi mäter).</a:t>
+            </a:r>
+            <a:endParaRPr lang="en-US" sz="2200" dirty="0"/>
           </a:p>
           <a:p>
             <a:pPr marL="342900" indent="-342900">
@@ -10149,14 +8977,14 @@
               <a:buChar char="•"/>
             </a:pPr>
             <a:r>
-              <a:rPr lang="en-US" sz="2400" dirty="0">
+              <a:rPr lang="en-US" sz="2200" dirty="0">
                 <a:solidFill>
                   <a:schemeClr val="tx1"/>
                 </a:solidFill>
               </a:rPr>
-              <a:t>Testa: gör en undersökning.</a:t>
-            </a:r>
-            <a:endParaRPr lang="en-US" sz="2400" dirty="0"/>
+              <a:t>Kontrollerade variabler: jord, vatten, temperatur, antal frön, tid.</a:t>
+            </a:r>
+            <a:endParaRPr lang="en-US" sz="2200" dirty="0"/>
           </a:p>
           <a:p>
             <a:pPr marL="342900" indent="-342900">
@@ -10167,20 +8995,20 @@
               <a:buChar char="•"/>
             </a:pPr>
             <a:r>
-              <a:rPr lang="en-US" sz="2400" dirty="0">
+              <a:rPr lang="en-US" sz="2200" dirty="0">
                 <a:solidFill>
                   <a:schemeClr val="tx1"/>
                 </a:solidFill>
               </a:rPr>
-              <a:t>Slutsats: vad lärde jag mig? Ofta kommer en ny fråga.</a:t>
-            </a:r>
-            <a:endParaRPr lang="en-US" sz="2400" dirty="0"/>
+              <a:t>Kontrollgrupp: krassen i ljus.</a:t>
+            </a:r>
+            <a:endParaRPr lang="en-US" sz="2200" dirty="0"/>
           </a:p>
         </p:txBody>
       </p:sp>
       <p:pic>
         <p:nvPicPr>
-          <p:cNvPr id="5" name="Image 0" descr="Forskning är en cykel">    </p:cNvPr>
+          <p:cNvPr id="5" name="Image 0" descr="Ett rättvist försök: krasse">    </p:cNvPr>
           <p:cNvPicPr>
             <a:picLocks noChangeAspect="1"/>
           </p:cNvPicPr>
@@ -10194,8 +9022,8 @@
         </p:blipFill>
         <p:spPr>
           <a:xfrm>
-            <a:off x="5788152" y="2324851"/>
-            <a:ext cx="5852160" cy="2939817"/>
+            <a:off x="6336792" y="2712621"/>
+            <a:ext cx="5303520" cy="2164279"/>
           </a:xfrm>
           <a:prstGeom prst="rect">
             <a:avLst/>
@@ -10304,7 +9132,7 @@
                   <a:schemeClr val="tx2"/>
                 </a:solidFill>
               </a:rPr>
-              <a:t>Ett rättvist försök: krasse</a:t>
+              <a:t>Säkerhet i labbet</a:t>
             </a:r>
             <a:endParaRPr lang="en-US" sz="3600" dirty="0"/>
           </a:p>
@@ -10312,14 +9140,39 @@
       </p:sp>
       <p:sp>
         <p:nvSpPr>
-          <p:cNvPr id="4" name="Text 1"/>
+          <p:cNvPr id="4" name="Steg 1"/>
+          <p:cNvSpPr/>
+          <p:nvPr/>
+        </p:nvSpPr>
+        <p:spPr>
+          <a:xfrm>
+            <a:off x="548640" y="1581912"/>
+            <a:ext cx="502920" cy="502920"/>
+          </a:xfrm>
+          <a:prstGeom prst="ellipse">
+            <a:avLst/>
+          </a:prstGeom>
+          <a:solidFill>
+            <a:schemeClr val="accent2"/>
+          </a:solidFill>
+          <a:ln w="12700">
+            <a:solidFill>
+              <a:schemeClr val="accent2"/>
+            </a:solidFill>
+            <a:prstDash val="solid"/>
+          </a:ln>
+        </p:spPr>
+      </p:sp>
+      <p:sp>
+        <p:nvSpPr>
+          <p:cNvPr id="5" name="Text 2"/>
           <p:cNvSpPr txBox="1"/>
           <p:nvPr/>
         </p:nvSpPr>
         <p:spPr>
           <a:xfrm>
-            <a:off x="548640" y="1554480"/>
-            <a:ext cx="5330952" cy="4480560"/>
+            <a:off x="548640" y="1581912"/>
+            <a:ext cx="502920" cy="502920"/>
           </a:xfrm>
           <a:prstGeom prst="rect">
             <a:avLst/>
@@ -10328,106 +9181,448 @@
           <a:ln/>
         </p:spPr>
         <p:txBody>
-          <a:bodyPr wrap="square" lIns="0" tIns="0" rIns="0" bIns="0" rtlCol="0" anchor="t"/>
-          <a:lstStyle/>
-          <a:p>
-            <a:pPr marL="342900" indent="-342900">
-              <a:spcAft>
-                <a:spcPts val="1000"/>
-              </a:spcAft>
-              <a:buSzPct val="100000"/>
-              <a:buChar char="•"/>
+          <a:bodyPr wrap="square" lIns="0" tIns="0" rIns="0" bIns="0" rtlCol="0" anchor="ctr"/>
+          <a:lstStyle/>
+          <a:p>
+            <a:pPr algn="ctr" indent="0" marL="0">
+              <a:buNone/>
             </a:pPr>
             <a:r>
-              <a:rPr lang="en-US" sz="2200" dirty="0">
-                <a:solidFill>
-                  <a:schemeClr val="tx1"/>
+              <a:rPr lang="en-US" sz="1800" b="1" dirty="0">
+                <a:solidFill>
+                  <a:schemeClr val="bg1"/>
                 </a:solidFill>
               </a:rPr>
-              <a:t>Oberoende variabel: ljus eller mörker (det vi ändrar).</a:t>
-            </a:r>
-            <a:endParaRPr lang="en-US" sz="2200" dirty="0"/>
-          </a:p>
-          <a:p>
-            <a:pPr marL="342900" indent="-342900">
-              <a:spcAft>
-                <a:spcPts val="1000"/>
-              </a:spcAft>
-              <a:buSzPct val="100000"/>
-              <a:buChar char="•"/>
-            </a:pPr>
-            <a:r>
-              <a:rPr lang="en-US" sz="2200" dirty="0">
-                <a:solidFill>
-                  <a:schemeClr val="tx1"/>
-                </a:solidFill>
-              </a:rPr>
-              <a:t>Beroende variabel: höjd i mm (det vi mäter).</a:t>
-            </a:r>
-            <a:endParaRPr lang="en-US" sz="2200" dirty="0"/>
-          </a:p>
-          <a:p>
-            <a:pPr marL="342900" indent="-342900">
-              <a:spcAft>
-                <a:spcPts val="1000"/>
-              </a:spcAft>
-              <a:buSzPct val="100000"/>
-              <a:buChar char="•"/>
-            </a:pPr>
-            <a:r>
-              <a:rPr lang="en-US" sz="2200" dirty="0">
-                <a:solidFill>
-                  <a:schemeClr val="tx1"/>
-                </a:solidFill>
-              </a:rPr>
-              <a:t>Kontrollerade variabler: jord, vatten, temperatur, antal frön, tid.</a:t>
-            </a:r>
-            <a:endParaRPr lang="en-US" sz="2200" dirty="0"/>
-          </a:p>
-          <a:p>
-            <a:pPr marL="342900" indent="-342900">
-              <a:spcAft>
-                <a:spcPts val="1000"/>
-              </a:spcAft>
-              <a:buSzPct val="100000"/>
-              <a:buChar char="•"/>
-            </a:pPr>
-            <a:r>
-              <a:rPr lang="en-US" sz="2200" dirty="0">
-                <a:solidFill>
-                  <a:schemeClr val="tx1"/>
-                </a:solidFill>
-              </a:rPr>
-              <a:t>Kontrollgrupp: krassen i ljus.</a:t>
-            </a:r>
-            <a:endParaRPr lang="en-US" sz="2200" dirty="0"/>
-          </a:p>
-        </p:txBody>
-      </p:sp>
-      <p:pic>
-        <p:nvPicPr>
-          <p:cNvPr id="5" name="Image 0" descr="Ett rättvist försök: krasse">    </p:cNvPr>
-          <p:cNvPicPr>
-            <a:picLocks noChangeAspect="1"/>
-          </p:cNvPicPr>
+              <a:t>1</a:t>
+            </a:r>
+            <a:endParaRPr lang="en-US" sz="1800" dirty="0"/>
+          </a:p>
+        </p:txBody>
+      </p:sp>
+      <p:sp>
+        <p:nvSpPr>
+          <p:cNvPr id="6" name="Text 3"/>
+          <p:cNvSpPr txBox="1"/>
           <p:nvPr/>
-        </p:nvPicPr>
-        <p:blipFill>
-          <a:blip r:embed="rId1"/>
-          <a:stretch>
-            <a:fillRect/>
-          </a:stretch>
-        </p:blipFill>
-        <p:spPr>
-          <a:xfrm>
-            <a:off x="6336792" y="2712621"/>
-            <a:ext cx="5303520" cy="2164279"/>
+        </p:nvSpPr>
+        <p:spPr>
+          <a:xfrm>
+            <a:off x="1325880" y="1508760"/>
+            <a:ext cx="10314432" cy="640080"/>
           </a:xfrm>
           <a:prstGeom prst="rect">
             <a:avLst/>
           </a:prstGeom>
-        </p:spPr>
-      </p:pic>
+          <a:noFill/>
+          <a:ln/>
+        </p:spPr>
+        <p:txBody>
+          <a:bodyPr wrap="square" lIns="0" tIns="0" rIns="0" bIns="0" rtlCol="0" anchor="ctr"/>
+          <a:lstStyle/>
+          <a:p>
+            <a:pPr indent="0" marL="0">
+              <a:buNone/>
+            </a:pPr>
+            <a:r>
+              <a:rPr lang="en-US" sz="2400" dirty="0">
+                <a:solidFill>
+                  <a:schemeClr val="tx1"/>
+                </a:solidFill>
+              </a:rPr>
+              <a:t>Läs hela instruktionen först.</a:t>
+            </a:r>
+            <a:endParaRPr lang="en-US" sz="2400" dirty="0"/>
+          </a:p>
+        </p:txBody>
+      </p:sp>
+      <p:sp>
+        <p:nvSpPr>
+          <p:cNvPr id="7" name="Steg 2"/>
+          <p:cNvSpPr/>
+          <p:nvPr/>
+        </p:nvSpPr>
+        <p:spPr>
+          <a:xfrm>
+            <a:off x="548640" y="2450592"/>
+            <a:ext cx="502920" cy="502920"/>
+          </a:xfrm>
+          <a:prstGeom prst="ellipse">
+            <a:avLst/>
+          </a:prstGeom>
+          <a:solidFill>
+            <a:schemeClr val="accent2"/>
+          </a:solidFill>
+          <a:ln w="12700">
+            <a:solidFill>
+              <a:schemeClr val="accent2"/>
+            </a:solidFill>
+            <a:prstDash val="solid"/>
+          </a:ln>
+        </p:spPr>
+      </p:sp>
+      <p:sp>
+        <p:nvSpPr>
+          <p:cNvPr id="8" name="Text 5"/>
+          <p:cNvSpPr txBox="1"/>
+          <p:nvPr/>
+        </p:nvSpPr>
+        <p:spPr>
+          <a:xfrm>
+            <a:off x="548640" y="2450592"/>
+            <a:ext cx="502920" cy="502920"/>
+          </a:xfrm>
+          <a:prstGeom prst="rect">
+            <a:avLst/>
+          </a:prstGeom>
+          <a:noFill/>
+          <a:ln/>
+        </p:spPr>
+        <p:txBody>
+          <a:bodyPr wrap="square" lIns="0" tIns="0" rIns="0" bIns="0" rtlCol="0" anchor="ctr"/>
+          <a:lstStyle/>
+          <a:p>
+            <a:pPr algn="ctr" indent="0" marL="0">
+              <a:buNone/>
+            </a:pPr>
+            <a:r>
+              <a:rPr lang="en-US" sz="1800" b="1" dirty="0">
+                <a:solidFill>
+                  <a:schemeClr val="bg1"/>
+                </a:solidFill>
+              </a:rPr>
+              <a:t>2</a:t>
+            </a:r>
+            <a:endParaRPr lang="en-US" sz="1800" dirty="0"/>
+          </a:p>
+        </p:txBody>
+      </p:sp>
+      <p:sp>
+        <p:nvSpPr>
+          <p:cNvPr id="9" name="Text 6"/>
+          <p:cNvSpPr txBox="1"/>
+          <p:nvPr/>
+        </p:nvSpPr>
+        <p:spPr>
+          <a:xfrm>
+            <a:off x="1325880" y="2377440"/>
+            <a:ext cx="10314432" cy="640080"/>
+          </a:xfrm>
+          <a:prstGeom prst="rect">
+            <a:avLst/>
+          </a:prstGeom>
+          <a:noFill/>
+          <a:ln/>
+        </p:spPr>
+        <p:txBody>
+          <a:bodyPr wrap="square" lIns="0" tIns="0" rIns="0" bIns="0" rtlCol="0" anchor="ctr"/>
+          <a:lstStyle/>
+          <a:p>
+            <a:pPr indent="0" marL="0">
+              <a:buNone/>
+            </a:pPr>
+            <a:r>
+              <a:rPr lang="en-US" sz="2400" dirty="0">
+                <a:solidFill>
+                  <a:schemeClr val="tx1"/>
+                </a:solidFill>
+              </a:rPr>
+              <a:t>Skyddsglasögon och förkläde när läraren säger det. Sätt upp långt hår.</a:t>
+            </a:r>
+            <a:endParaRPr lang="en-US" sz="2400" dirty="0"/>
+          </a:p>
+        </p:txBody>
+      </p:sp>
+      <p:sp>
+        <p:nvSpPr>
+          <p:cNvPr id="10" name="Steg 3"/>
+          <p:cNvSpPr/>
+          <p:nvPr/>
+        </p:nvSpPr>
+        <p:spPr>
+          <a:xfrm>
+            <a:off x="548640" y="3319272"/>
+            <a:ext cx="502920" cy="502920"/>
+          </a:xfrm>
+          <a:prstGeom prst="ellipse">
+            <a:avLst/>
+          </a:prstGeom>
+          <a:solidFill>
+            <a:schemeClr val="accent2"/>
+          </a:solidFill>
+          <a:ln w="12700">
+            <a:solidFill>
+              <a:schemeClr val="accent2"/>
+            </a:solidFill>
+            <a:prstDash val="solid"/>
+          </a:ln>
+        </p:spPr>
+      </p:sp>
+      <p:sp>
+        <p:nvSpPr>
+          <p:cNvPr id="11" name="Text 8"/>
+          <p:cNvSpPr txBox="1"/>
+          <p:nvPr/>
+        </p:nvSpPr>
+        <p:spPr>
+          <a:xfrm>
+            <a:off x="548640" y="3319272"/>
+            <a:ext cx="502920" cy="502920"/>
+          </a:xfrm>
+          <a:prstGeom prst="rect">
+            <a:avLst/>
+          </a:prstGeom>
+          <a:noFill/>
+          <a:ln/>
+        </p:spPr>
+        <p:txBody>
+          <a:bodyPr wrap="square" lIns="0" tIns="0" rIns="0" bIns="0" rtlCol="0" anchor="ctr"/>
+          <a:lstStyle/>
+          <a:p>
+            <a:pPr algn="ctr" indent="0" marL="0">
+              <a:buNone/>
+            </a:pPr>
+            <a:r>
+              <a:rPr lang="en-US" sz="1800" b="1" dirty="0">
+                <a:solidFill>
+                  <a:schemeClr val="bg1"/>
+                </a:solidFill>
+              </a:rPr>
+              <a:t>3</a:t>
+            </a:r>
+            <a:endParaRPr lang="en-US" sz="1800" dirty="0"/>
+          </a:p>
+        </p:txBody>
+      </p:sp>
+      <p:sp>
+        <p:nvSpPr>
+          <p:cNvPr id="12" name="Text 9"/>
+          <p:cNvSpPr txBox="1"/>
+          <p:nvPr/>
+        </p:nvSpPr>
+        <p:spPr>
+          <a:xfrm>
+            <a:off x="1325880" y="3246120"/>
+            <a:ext cx="10314432" cy="640080"/>
+          </a:xfrm>
+          <a:prstGeom prst="rect">
+            <a:avLst/>
+          </a:prstGeom>
+          <a:noFill/>
+          <a:ln/>
+        </p:spPr>
+        <p:txBody>
+          <a:bodyPr wrap="square" lIns="0" tIns="0" rIns="0" bIns="0" rtlCol="0" anchor="ctr"/>
+          <a:lstStyle/>
+          <a:p>
+            <a:pPr indent="0" marL="0">
+              <a:buNone/>
+            </a:pPr>
+            <a:r>
+              <a:rPr lang="en-US" sz="2400" dirty="0">
+                <a:solidFill>
+                  <a:schemeClr val="tx1"/>
+                </a:solidFill>
+              </a:rPr>
+              <a:t>Ät, drick och smaka aldrig i labbet.</a:t>
+            </a:r>
+            <a:endParaRPr lang="en-US" sz="2400" dirty="0"/>
+          </a:p>
+        </p:txBody>
+      </p:sp>
+      <p:sp>
+        <p:nvSpPr>
+          <p:cNvPr id="13" name="Steg 4"/>
+          <p:cNvSpPr/>
+          <p:nvPr/>
+        </p:nvSpPr>
+        <p:spPr>
+          <a:xfrm>
+            <a:off x="548640" y="4187952"/>
+            <a:ext cx="502920" cy="502920"/>
+          </a:xfrm>
+          <a:prstGeom prst="ellipse">
+            <a:avLst/>
+          </a:prstGeom>
+          <a:solidFill>
+            <a:schemeClr val="accent2"/>
+          </a:solidFill>
+          <a:ln w="12700">
+            <a:solidFill>
+              <a:schemeClr val="accent2"/>
+            </a:solidFill>
+            <a:prstDash val="solid"/>
+          </a:ln>
+        </p:spPr>
+      </p:sp>
+      <p:sp>
+        <p:nvSpPr>
+          <p:cNvPr id="14" name="Text 11"/>
+          <p:cNvSpPr txBox="1"/>
+          <p:nvPr/>
+        </p:nvSpPr>
+        <p:spPr>
+          <a:xfrm>
+            <a:off x="548640" y="4187952"/>
+            <a:ext cx="502920" cy="502920"/>
+          </a:xfrm>
+          <a:prstGeom prst="rect">
+            <a:avLst/>
+          </a:prstGeom>
+          <a:noFill/>
+          <a:ln/>
+        </p:spPr>
+        <p:txBody>
+          <a:bodyPr wrap="square" lIns="0" tIns="0" rIns="0" bIns="0" rtlCol="0" anchor="ctr"/>
+          <a:lstStyle/>
+          <a:p>
+            <a:pPr algn="ctr" indent="0" marL="0">
+              <a:buNone/>
+            </a:pPr>
+            <a:r>
+              <a:rPr lang="en-US" sz="1800" b="1" dirty="0">
+                <a:solidFill>
+                  <a:schemeClr val="bg1"/>
+                </a:solidFill>
+              </a:rPr>
+              <a:t>4</a:t>
+            </a:r>
+            <a:endParaRPr lang="en-US" sz="1800" dirty="0"/>
+          </a:p>
+        </p:txBody>
+      </p:sp>
+      <p:sp>
+        <p:nvSpPr>
+          <p:cNvPr id="15" name="Text 12"/>
+          <p:cNvSpPr txBox="1"/>
+          <p:nvPr/>
+        </p:nvSpPr>
+        <p:spPr>
+          <a:xfrm>
+            <a:off x="1325880" y="4114800"/>
+            <a:ext cx="10314432" cy="640080"/>
+          </a:xfrm>
+          <a:prstGeom prst="rect">
+            <a:avLst/>
+          </a:prstGeom>
+          <a:noFill/>
+          <a:ln/>
+        </p:spPr>
+        <p:txBody>
+          <a:bodyPr wrap="square" lIns="0" tIns="0" rIns="0" bIns="0" rtlCol="0" anchor="ctr"/>
+          <a:lstStyle/>
+          <a:p>
+            <a:pPr indent="0" marL="0">
+              <a:buNone/>
+            </a:pPr>
+            <a:r>
+              <a:rPr lang="en-US" sz="2400" dirty="0">
+                <a:solidFill>
+                  <a:schemeClr val="tx1"/>
+                </a:solidFill>
+              </a:rPr>
+              <a:t>Säg till direkt om något går sönder eller om du skadar dig.</a:t>
+            </a:r>
+            <a:endParaRPr lang="en-US" sz="2400" dirty="0"/>
+          </a:p>
+        </p:txBody>
+      </p:sp>
+      <p:sp>
+        <p:nvSpPr>
+          <p:cNvPr id="16" name="Steg 5"/>
+          <p:cNvSpPr/>
+          <p:nvPr/>
+        </p:nvSpPr>
+        <p:spPr>
+          <a:xfrm>
+            <a:off x="548640" y="5056632"/>
+            <a:ext cx="502920" cy="502920"/>
+          </a:xfrm>
+          <a:prstGeom prst="ellipse">
+            <a:avLst/>
+          </a:prstGeom>
+          <a:solidFill>
+            <a:schemeClr val="accent2"/>
+          </a:solidFill>
+          <a:ln w="12700">
+            <a:solidFill>
+              <a:schemeClr val="accent2"/>
+            </a:solidFill>
+            <a:prstDash val="solid"/>
+          </a:ln>
+        </p:spPr>
+      </p:sp>
+      <p:sp>
+        <p:nvSpPr>
+          <p:cNvPr id="17" name="Text 14"/>
+          <p:cNvSpPr txBox="1"/>
+          <p:nvPr/>
+        </p:nvSpPr>
+        <p:spPr>
+          <a:xfrm>
+            <a:off x="548640" y="5056632"/>
+            <a:ext cx="502920" cy="502920"/>
+          </a:xfrm>
+          <a:prstGeom prst="rect">
+            <a:avLst/>
+          </a:prstGeom>
+          <a:noFill/>
+          <a:ln/>
+        </p:spPr>
+        <p:txBody>
+          <a:bodyPr wrap="square" lIns="0" tIns="0" rIns="0" bIns="0" rtlCol="0" anchor="ctr"/>
+          <a:lstStyle/>
+          <a:p>
+            <a:pPr algn="ctr" indent="0" marL="0">
+              <a:buNone/>
+            </a:pPr>
+            <a:r>
+              <a:rPr lang="en-US" sz="1800" b="1" dirty="0">
+                <a:solidFill>
+                  <a:schemeClr val="bg1"/>
+                </a:solidFill>
+              </a:rPr>
+              <a:t>5</a:t>
+            </a:r>
+            <a:endParaRPr lang="en-US" sz="1800" dirty="0"/>
+          </a:p>
+        </p:txBody>
+      </p:sp>
+      <p:sp>
+        <p:nvSpPr>
+          <p:cNvPr id="18" name="Text 15"/>
+          <p:cNvSpPr txBox="1"/>
+          <p:nvPr/>
+        </p:nvSpPr>
+        <p:spPr>
+          <a:xfrm>
+            <a:off x="1325880" y="4983480"/>
+            <a:ext cx="10314432" cy="640080"/>
+          </a:xfrm>
+          <a:prstGeom prst="rect">
+            <a:avLst/>
+          </a:prstGeom>
+          <a:noFill/>
+          <a:ln/>
+        </p:spPr>
+        <p:txBody>
+          <a:bodyPr wrap="square" lIns="0" tIns="0" rIns="0" bIns="0" rtlCol="0" anchor="ctr"/>
+          <a:lstStyle/>
+          <a:p>
+            <a:pPr indent="0" marL="0">
+              <a:buNone/>
+            </a:pPr>
+            <a:r>
+              <a:rPr lang="en-US" sz="2400" dirty="0">
+                <a:solidFill>
+                  <a:schemeClr val="tx1"/>
+                </a:solidFill>
+              </a:rPr>
+              <a:t>Städa och tvätta händerna när du är klar.</a:t>
+            </a:r>
+            <a:endParaRPr lang="en-US" sz="2400" dirty="0"/>
+          </a:p>
+        </p:txBody>
+      </p:sp>
       <p:sp>
         <p:nvSpPr>
           <p:cNvPr id="25" name="Slide Number Placeholder 0"/>
@@ -10530,7 +9725,7 @@
                   <a:schemeClr val="tx2"/>
                 </a:solidFill>
               </a:rPr>
-              <a:t>Säkerhet i labbet</a:t>
+              <a:t>Kolla dig själv: 1.1.1</a:t>
             </a:r>
             <a:endParaRPr lang="en-US" sz="3600" dirty="0"/>
           </a:p>
@@ -10538,24 +9733,26 @@
       </p:sp>
       <p:sp>
         <p:nvSpPr>
-          <p:cNvPr id="4" name="Steg 1"/>
+          <p:cNvPr id="4" name="Kolla dig själv"/>
           <p:cNvSpPr/>
           <p:nvPr/>
         </p:nvSpPr>
         <p:spPr>
           <a:xfrm>
-            <a:off x="548640" y="1581912"/>
-            <a:ext cx="502920" cy="502920"/>
-          </a:xfrm>
-          <a:prstGeom prst="ellipse">
-            <a:avLst/>
+            <a:off x="548640" y="1554480"/>
+            <a:ext cx="11091672" cy="4297680"/>
+          </a:xfrm>
+          <a:prstGeom prst="roundRect">
+            <a:avLst>
+              <a:gd name="adj" fmla="val 3191"/>
+            </a:avLst>
           </a:prstGeom>
           <a:solidFill>
-            <a:schemeClr val="accent2"/>
+            <a:schemeClr val="bg2"/>
           </a:solidFill>
-          <a:ln w="12700">
+          <a:ln w="25400">
             <a:solidFill>
-              <a:schemeClr val="accent2"/>
+              <a:schemeClr val="accent3"/>
             </a:solidFill>
             <a:prstDash val="solid"/>
           </a:ln>
@@ -10569,8 +9766,8 @@
         </p:nvSpPr>
         <p:spPr>
           <a:xfrm>
-            <a:off x="548640" y="1581912"/>
-            <a:ext cx="502920" cy="502920"/>
+            <a:off x="914400" y="1737360"/>
+            <a:ext cx="5486400" cy="365760"/>
           </a:xfrm>
           <a:prstGeom prst="rect">
             <a:avLst/>
@@ -10582,18 +9779,18 @@
           <a:bodyPr wrap="square" lIns="0" tIns="0" rIns="0" bIns="0" rtlCol="0" anchor="ctr"/>
           <a:lstStyle/>
           <a:p>
-            <a:pPr algn="ctr" indent="0" marL="0">
+            <a:pPr indent="0" marL="0">
               <a:buNone/>
             </a:pPr>
             <a:r>
-              <a:rPr lang="en-US" sz="1800" b="1" dirty="0">
-                <a:solidFill>
-                  <a:schemeClr val="bg1"/>
+              <a:rPr lang="en-US" sz="1400" b="1" spc="300" kern="0" dirty="0">
+                <a:solidFill>
+                  <a:schemeClr val="accent1"/>
                 </a:solidFill>
               </a:rPr>
-              <a:t>1</a:t>
-            </a:r>
-            <a:endParaRPr lang="en-US" sz="1800" dirty="0"/>
+              <a:t>KOLLA DIG SJÄLV</a:t>
+            </a:r>
+            <a:endParaRPr lang="en-US" sz="1400" dirty="0"/>
           </a:p>
         </p:txBody>
       </p:sp>
@@ -10605,8 +9802,8 @@
         </p:nvSpPr>
         <p:spPr>
           <a:xfrm>
-            <a:off x="1325880" y="1508760"/>
-            <a:ext cx="10314432" cy="640080"/>
+            <a:off x="914400" y="2194560"/>
+            <a:ext cx="10360152" cy="3474720"/>
           </a:xfrm>
           <a:prstGeom prst="rect">
             <a:avLst/>
@@ -10615,409 +9812,83 @@
           <a:ln/>
         </p:spPr>
         <p:txBody>
-          <a:bodyPr wrap="square" lIns="0" tIns="0" rIns="0" bIns="0" rtlCol="0" anchor="ctr"/>
-          <a:lstStyle/>
-          <a:p>
-            <a:pPr indent="0" marL="0">
-              <a:buNone/>
+          <a:bodyPr wrap="square" lIns="0" tIns="0" rIns="0" bIns="0" rtlCol="0" anchor="t"/>
+          <a:lstStyle/>
+          <a:p>
+            <a:pPr marL="342900" indent="-342900">
+              <a:spcAft>
+                <a:spcPts val="1200"/>
+              </a:spcAft>
+              <a:buSzPct val="100000"/>
+              <a:buFont typeface="+mj-lt"/>
+              <a:buAutoNum type="arabicPeriod" startAt="1"/>
             </a:pPr>
             <a:r>
-              <a:rPr lang="en-US" sz="2400" dirty="0">
+              <a:rPr lang="en-US" sz="2600" dirty="0">
                 <a:solidFill>
                   <a:schemeClr val="tx1"/>
                 </a:solidFill>
               </a:rPr>
-              <a:t>Läs hela instruktionen först.</a:t>
-            </a:r>
-            <a:endParaRPr lang="en-US" sz="2400" dirty="0"/>
-          </a:p>
-        </p:txBody>
-      </p:sp>
-      <p:sp>
-        <p:nvSpPr>
-          <p:cNvPr id="7" name="Steg 2"/>
-          <p:cNvSpPr/>
-          <p:nvPr/>
-        </p:nvSpPr>
-        <p:spPr>
-          <a:xfrm>
-            <a:off x="548640" y="2450592"/>
-            <a:ext cx="502920" cy="502920"/>
-          </a:xfrm>
-          <a:prstGeom prst="ellipse">
-            <a:avLst/>
-          </a:prstGeom>
-          <a:solidFill>
-            <a:schemeClr val="accent2"/>
-          </a:solidFill>
-          <a:ln w="12700">
-            <a:solidFill>
-              <a:schemeClr val="accent2"/>
-            </a:solidFill>
-            <a:prstDash val="solid"/>
-          </a:ln>
-        </p:spPr>
-      </p:sp>
-      <p:sp>
-        <p:nvSpPr>
-          <p:cNvPr id="8" name="Text 5"/>
-          <p:cNvSpPr txBox="1"/>
-          <p:nvPr/>
-        </p:nvSpPr>
-        <p:spPr>
-          <a:xfrm>
-            <a:off x="548640" y="2450592"/>
-            <a:ext cx="502920" cy="502920"/>
-          </a:xfrm>
-          <a:prstGeom prst="rect">
-            <a:avLst/>
-          </a:prstGeom>
-          <a:noFill/>
-          <a:ln/>
-        </p:spPr>
-        <p:txBody>
-          <a:bodyPr wrap="square" lIns="0" tIns="0" rIns="0" bIns="0" rtlCol="0" anchor="ctr"/>
-          <a:lstStyle/>
-          <a:p>
-            <a:pPr algn="ctr" indent="0" marL="0">
-              <a:buNone/>
+              <a:t>Gör frågan ”Är hundar snälla?” undersökningsbar.</a:t>
+            </a:r>
+            <a:endParaRPr lang="en-US" sz="2600" dirty="0"/>
+          </a:p>
+          <a:p>
+            <a:pPr marL="342900" indent="-342900">
+              <a:spcAft>
+                <a:spcPts val="1200"/>
+              </a:spcAft>
+              <a:buSzPct val="100000"/>
+              <a:buFont typeface="+mj-lt"/>
+              <a:buAutoNum type="arabicPeriod" startAt="1"/>
             </a:pPr>
             <a:r>
-              <a:rPr lang="en-US" sz="1800" b="1" dirty="0">
-                <a:solidFill>
-                  <a:schemeClr val="bg1"/>
+              <a:rPr lang="en-US" sz="2600" dirty="0">
+                <a:solidFill>
+                  <a:schemeClr val="tx1"/>
                 </a:solidFill>
               </a:rPr>
-              <a:t>2</a:t>
-            </a:r>
-            <a:endParaRPr lang="en-US" sz="1800" dirty="0"/>
-          </a:p>
-        </p:txBody>
-      </p:sp>
-      <p:sp>
-        <p:nvSpPr>
-          <p:cNvPr id="9" name="Text 6"/>
-          <p:cNvSpPr txBox="1"/>
-          <p:nvPr/>
-        </p:nvSpPr>
-        <p:spPr>
-          <a:xfrm>
-            <a:off x="1325880" y="2377440"/>
-            <a:ext cx="10314432" cy="640080"/>
-          </a:xfrm>
-          <a:prstGeom prst="rect">
-            <a:avLst/>
-          </a:prstGeom>
-          <a:noFill/>
-          <a:ln/>
-        </p:spPr>
-        <p:txBody>
-          <a:bodyPr wrap="square" lIns="0" tIns="0" rIns="0" bIns="0" rtlCol="0" anchor="ctr"/>
-          <a:lstStyle/>
-          <a:p>
-            <a:pPr indent="0" marL="0">
-              <a:buNone/>
+              <a:t>Vad är skillnaden mellan oberoende och beroende variabel?</a:t>
+            </a:r>
+            <a:endParaRPr lang="en-US" sz="2600" dirty="0"/>
+          </a:p>
+          <a:p>
+            <a:pPr marL="342900" indent="-342900">
+              <a:spcAft>
+                <a:spcPts val="1200"/>
+              </a:spcAft>
+              <a:buSzPct val="100000"/>
+              <a:buFont typeface="+mj-lt"/>
+              <a:buAutoNum type="arabicPeriod" startAt="1"/>
             </a:pPr>
             <a:r>
-              <a:rPr lang="en-US" sz="2400" dirty="0">
+              <a:rPr lang="en-US" sz="2600" dirty="0">
                 <a:solidFill>
                   <a:schemeClr val="tx1"/>
                 </a:solidFill>
               </a:rPr>
-              <a:t>Skyddsglasögon och förkläde när läraren säger det. Sätt upp långt hår.</a:t>
-            </a:r>
-            <a:endParaRPr lang="en-US" sz="2400" dirty="0"/>
-          </a:p>
-        </p:txBody>
-      </p:sp>
-      <p:sp>
-        <p:nvSpPr>
-          <p:cNvPr id="10" name="Steg 3"/>
-          <p:cNvSpPr/>
-          <p:nvPr/>
-        </p:nvSpPr>
-        <p:spPr>
-          <a:xfrm>
-            <a:off x="548640" y="3319272"/>
-            <a:ext cx="502920" cy="502920"/>
-          </a:xfrm>
-          <a:prstGeom prst="ellipse">
-            <a:avLst/>
-          </a:prstGeom>
-          <a:solidFill>
-            <a:schemeClr val="accent2"/>
-          </a:solidFill>
-          <a:ln w="12700">
-            <a:solidFill>
-              <a:schemeClr val="accent2"/>
-            </a:solidFill>
-            <a:prstDash val="solid"/>
-          </a:ln>
-        </p:spPr>
-      </p:sp>
-      <p:sp>
-        <p:nvSpPr>
-          <p:cNvPr id="11" name="Text 8"/>
-          <p:cNvSpPr txBox="1"/>
-          <p:nvPr/>
-        </p:nvSpPr>
-        <p:spPr>
-          <a:xfrm>
-            <a:off x="548640" y="3319272"/>
-            <a:ext cx="502920" cy="502920"/>
-          </a:xfrm>
-          <a:prstGeom prst="rect">
-            <a:avLst/>
-          </a:prstGeom>
-          <a:noFill/>
-          <a:ln/>
-        </p:spPr>
-        <p:txBody>
-          <a:bodyPr wrap="square" lIns="0" tIns="0" rIns="0" bIns="0" rtlCol="0" anchor="ctr"/>
-          <a:lstStyle/>
-          <a:p>
-            <a:pPr algn="ctr" indent="0" marL="0">
-              <a:buNone/>
+              <a:t>Varför behövs en kontrollgrupp?</a:t>
+            </a:r>
+            <a:endParaRPr lang="en-US" sz="2600" dirty="0"/>
+          </a:p>
+          <a:p>
+            <a:pPr marL="342900" indent="-342900">
+              <a:spcAft>
+                <a:spcPts val="1200"/>
+              </a:spcAft>
+              <a:buSzPct val="100000"/>
+              <a:buFont typeface="+mj-lt"/>
+              <a:buAutoNum type="arabicPeriod" startAt="1"/>
             </a:pPr>
             <a:r>
-              <a:rPr lang="en-US" sz="1800" b="1" dirty="0">
-                <a:solidFill>
-                  <a:schemeClr val="bg1"/>
+              <a:rPr lang="en-US" sz="2600" dirty="0">
+                <a:solidFill>
+                  <a:schemeClr val="tx1"/>
                 </a:solidFill>
               </a:rPr>
-              <a:t>3</a:t>
-            </a:r>
-            <a:endParaRPr lang="en-US" sz="1800" dirty="0"/>
-          </a:p>
-        </p:txBody>
-      </p:sp>
-      <p:sp>
-        <p:nvSpPr>
-          <p:cNvPr id="12" name="Text 9"/>
-          <p:cNvSpPr txBox="1"/>
-          <p:nvPr/>
-        </p:nvSpPr>
-        <p:spPr>
-          <a:xfrm>
-            <a:off x="1325880" y="3246120"/>
-            <a:ext cx="10314432" cy="640080"/>
-          </a:xfrm>
-          <a:prstGeom prst="rect">
-            <a:avLst/>
-          </a:prstGeom>
-          <a:noFill/>
-          <a:ln/>
-        </p:spPr>
-        <p:txBody>
-          <a:bodyPr wrap="square" lIns="0" tIns="0" rIns="0" bIns="0" rtlCol="0" anchor="ctr"/>
-          <a:lstStyle/>
-          <a:p>
-            <a:pPr indent="0" marL="0">
-              <a:buNone/>
-            </a:pPr>
-            <a:r>
-              <a:rPr lang="en-US" sz="2400" dirty="0">
-                <a:solidFill>
-                  <a:schemeClr val="tx1"/>
-                </a:solidFill>
-              </a:rPr>
-              <a:t>Ät, drick och smaka aldrig i labbet.</a:t>
-            </a:r>
-            <a:endParaRPr lang="en-US" sz="2400" dirty="0"/>
-          </a:p>
-        </p:txBody>
-      </p:sp>
-      <p:sp>
-        <p:nvSpPr>
-          <p:cNvPr id="13" name="Steg 4"/>
-          <p:cNvSpPr/>
-          <p:nvPr/>
-        </p:nvSpPr>
-        <p:spPr>
-          <a:xfrm>
-            <a:off x="548640" y="4187952"/>
-            <a:ext cx="502920" cy="502920"/>
-          </a:xfrm>
-          <a:prstGeom prst="ellipse">
-            <a:avLst/>
-          </a:prstGeom>
-          <a:solidFill>
-            <a:schemeClr val="accent2"/>
-          </a:solidFill>
-          <a:ln w="12700">
-            <a:solidFill>
-              <a:schemeClr val="accent2"/>
-            </a:solidFill>
-            <a:prstDash val="solid"/>
-          </a:ln>
-        </p:spPr>
-      </p:sp>
-      <p:sp>
-        <p:nvSpPr>
-          <p:cNvPr id="14" name="Text 11"/>
-          <p:cNvSpPr txBox="1"/>
-          <p:nvPr/>
-        </p:nvSpPr>
-        <p:spPr>
-          <a:xfrm>
-            <a:off x="548640" y="4187952"/>
-            <a:ext cx="502920" cy="502920"/>
-          </a:xfrm>
-          <a:prstGeom prst="rect">
-            <a:avLst/>
-          </a:prstGeom>
-          <a:noFill/>
-          <a:ln/>
-        </p:spPr>
-        <p:txBody>
-          <a:bodyPr wrap="square" lIns="0" tIns="0" rIns="0" bIns="0" rtlCol="0" anchor="ctr"/>
-          <a:lstStyle/>
-          <a:p>
-            <a:pPr algn="ctr" indent="0" marL="0">
-              <a:buNone/>
-            </a:pPr>
-            <a:r>
-              <a:rPr lang="en-US" sz="1800" b="1" dirty="0">
-                <a:solidFill>
-                  <a:schemeClr val="bg1"/>
-                </a:solidFill>
-              </a:rPr>
-              <a:t>4</a:t>
-            </a:r>
-            <a:endParaRPr lang="en-US" sz="1800" dirty="0"/>
-          </a:p>
-        </p:txBody>
-      </p:sp>
-      <p:sp>
-        <p:nvSpPr>
-          <p:cNvPr id="15" name="Text 12"/>
-          <p:cNvSpPr txBox="1"/>
-          <p:nvPr/>
-        </p:nvSpPr>
-        <p:spPr>
-          <a:xfrm>
-            <a:off x="1325880" y="4114800"/>
-            <a:ext cx="10314432" cy="640080"/>
-          </a:xfrm>
-          <a:prstGeom prst="rect">
-            <a:avLst/>
-          </a:prstGeom>
-          <a:noFill/>
-          <a:ln/>
-        </p:spPr>
-        <p:txBody>
-          <a:bodyPr wrap="square" lIns="0" tIns="0" rIns="0" bIns="0" rtlCol="0" anchor="ctr"/>
-          <a:lstStyle/>
-          <a:p>
-            <a:pPr indent="0" marL="0">
-              <a:buNone/>
-            </a:pPr>
-            <a:r>
-              <a:rPr lang="en-US" sz="2400" dirty="0">
-                <a:solidFill>
-                  <a:schemeClr val="tx1"/>
-                </a:solidFill>
-              </a:rPr>
-              <a:t>Säg till direkt om något går sönder eller om du skadar dig.</a:t>
-            </a:r>
-            <a:endParaRPr lang="en-US" sz="2400" dirty="0"/>
-          </a:p>
-        </p:txBody>
-      </p:sp>
-      <p:sp>
-        <p:nvSpPr>
-          <p:cNvPr id="16" name="Steg 5"/>
-          <p:cNvSpPr/>
-          <p:nvPr/>
-        </p:nvSpPr>
-        <p:spPr>
-          <a:xfrm>
-            <a:off x="548640" y="5056632"/>
-            <a:ext cx="502920" cy="502920"/>
-          </a:xfrm>
-          <a:prstGeom prst="ellipse">
-            <a:avLst/>
-          </a:prstGeom>
-          <a:solidFill>
-            <a:schemeClr val="accent2"/>
-          </a:solidFill>
-          <a:ln w="12700">
-            <a:solidFill>
-              <a:schemeClr val="accent2"/>
-            </a:solidFill>
-            <a:prstDash val="solid"/>
-          </a:ln>
-        </p:spPr>
-      </p:sp>
-      <p:sp>
-        <p:nvSpPr>
-          <p:cNvPr id="17" name="Text 14"/>
-          <p:cNvSpPr txBox="1"/>
-          <p:nvPr/>
-        </p:nvSpPr>
-        <p:spPr>
-          <a:xfrm>
-            <a:off x="548640" y="5056632"/>
-            <a:ext cx="502920" cy="502920"/>
-          </a:xfrm>
-          <a:prstGeom prst="rect">
-            <a:avLst/>
-          </a:prstGeom>
-          <a:noFill/>
-          <a:ln/>
-        </p:spPr>
-        <p:txBody>
-          <a:bodyPr wrap="square" lIns="0" tIns="0" rIns="0" bIns="0" rtlCol="0" anchor="ctr"/>
-          <a:lstStyle/>
-          <a:p>
-            <a:pPr algn="ctr" indent="0" marL="0">
-              <a:buNone/>
-            </a:pPr>
-            <a:r>
-              <a:rPr lang="en-US" sz="1800" b="1" dirty="0">
-                <a:solidFill>
-                  <a:schemeClr val="bg1"/>
-                </a:solidFill>
-              </a:rPr>
-              <a:t>5</a:t>
-            </a:r>
-            <a:endParaRPr lang="en-US" sz="1800" dirty="0"/>
-          </a:p>
-        </p:txBody>
-      </p:sp>
-      <p:sp>
-        <p:nvSpPr>
-          <p:cNvPr id="18" name="Text 15"/>
-          <p:cNvSpPr txBox="1"/>
-          <p:nvPr/>
-        </p:nvSpPr>
-        <p:spPr>
-          <a:xfrm>
-            <a:off x="1325880" y="4983480"/>
-            <a:ext cx="10314432" cy="640080"/>
-          </a:xfrm>
-          <a:prstGeom prst="rect">
-            <a:avLst/>
-          </a:prstGeom>
-          <a:noFill/>
-          <a:ln/>
-        </p:spPr>
-        <p:txBody>
-          <a:bodyPr wrap="square" lIns="0" tIns="0" rIns="0" bIns="0" rtlCol="0" anchor="ctr"/>
-          <a:lstStyle/>
-          <a:p>
-            <a:pPr indent="0" marL="0">
-              <a:buNone/>
-            </a:pPr>
-            <a:r>
-              <a:rPr lang="en-US" sz="2400" dirty="0">
-                <a:solidFill>
-                  <a:schemeClr val="tx1"/>
-                </a:solidFill>
-              </a:rPr>
-              <a:t>Städa och tvätta händerna när du är klar.</a:t>
-            </a:r>
-            <a:endParaRPr lang="en-US" sz="2400" dirty="0"/>
+              <a:t>Varför får man bara ändra en variabel åt gången?</a:t>
+            </a:r>
+            <a:endParaRPr lang="en-US" sz="2600" dirty="0"/>
           </a:p>
         </p:txBody>
       </p:sp>
@@ -11101,8 +9972,8 @@
         </p:nvSpPr>
         <p:spPr>
           <a:xfrm>
-            <a:off x="548640" y="320040"/>
-            <a:ext cx="11091672" cy="914400"/>
+            <a:off x="731520" y="2103120"/>
+            <a:ext cx="10698480" cy="1463040"/>
           </a:xfrm>
           <a:prstGeom prst="rect">
             <a:avLst/>
@@ -11118,54 +9989,29 @@
               <a:buNone/>
             </a:pPr>
             <a:r>
-              <a:rPr lang="en-US" sz="3600" b="1" dirty="0">
-                <a:solidFill>
-                  <a:schemeClr val="tx2"/>
+              <a:rPr lang="en-US" sz="4400" b="1" dirty="0">
+                <a:solidFill>
+                  <a:schemeClr val="bg1"/>
                 </a:solidFill>
               </a:rPr>
-              <a:t>Kolla dig själv: 1.1.1</a:t>
-            </a:r>
-            <a:endParaRPr lang="en-US" sz="3600" dirty="0"/>
-          </a:p>
-        </p:txBody>
-      </p:sp>
-      <p:sp>
-        <p:nvSpPr>
-          <p:cNvPr id="4" name="Kolla dig själv"/>
+              <a:t>1.1.2 Dokumentera</a:t>
+            </a:r>
+            <a:endParaRPr lang="en-US" sz="4400" dirty="0"/>
+          </a:p>
+        </p:txBody>
+      </p:sp>
+      <p:sp>
+        <p:nvSpPr>
+          <p:cNvPr id="4" name="Text 0"/>
           <p:cNvSpPr/>
-          <p:nvPr/>
-        </p:nvSpPr>
-        <p:spPr>
-          <a:xfrm>
-            <a:off x="548640" y="1554480"/>
-            <a:ext cx="11091672" cy="4297680"/>
-          </a:xfrm>
-          <a:prstGeom prst="roundRect">
-            <a:avLst>
-              <a:gd name="adj" fmla="val 3191"/>
-            </a:avLst>
-          </a:prstGeom>
-          <a:solidFill>
-            <a:schemeClr val="bg2"/>
-          </a:solidFill>
-          <a:ln w="25400">
-            <a:solidFill>
-              <a:schemeClr val="accent3"/>
-            </a:solidFill>
-            <a:prstDash val="solid"/>
-          </a:ln>
-        </p:spPr>
-      </p:sp>
-      <p:sp>
-        <p:nvSpPr>
-          <p:cNvPr id="5" name="Text 2"/>
-          <p:cNvSpPr txBox="1"/>
-          <p:nvPr/>
-        </p:nvSpPr>
-        <p:spPr>
-          <a:xfrm>
-            <a:off x="914400" y="1737360"/>
-            <a:ext cx="5486400" cy="365760"/>
+          <p:nvPr>
+            <p:ph idx="101" type="body" hasCustomPrompt="1"/>
+          </p:nvPr>
+        </p:nvSpPr>
+        <p:spPr>
+          <a:xfrm>
+            <a:off x="731520" y="3657600"/>
+            <a:ext cx="10698480" cy="822960"/>
           </a:xfrm>
           <a:prstGeom prst="rect">
             <a:avLst/>
@@ -11174,164 +10020,21 @@
           <a:ln/>
         </p:spPr>
         <p:txBody>
-          <a:bodyPr wrap="square" lIns="0" tIns="0" rIns="0" bIns="0" rtlCol="0" anchor="ctr"/>
-          <a:lstStyle/>
-          <a:p>
-            <a:pPr indent="0" marL="0">
+          <a:bodyPr wrap="square" lIns="0" tIns="0" rIns="0" bIns="0" rtlCol="0" anchor="t"/>
+          <a:lstStyle/>
+          <a:p>
+            <a:pPr algn="l" indent="0" marL="0">
               <a:buNone/>
             </a:pPr>
             <a:r>
-              <a:rPr lang="en-US" sz="1400" b="1" spc="300" kern="0" dirty="0">
-                <a:solidFill>
-                  <a:schemeClr val="accent1"/>
+              <a:rPr lang="en-US" sz="2200" dirty="0">
+                <a:solidFill>
+                  <a:schemeClr val="bg2"/>
                 </a:solidFill>
               </a:rPr>
-              <a:t>KOLLA DIG SJÄLV</a:t>
-            </a:r>
-            <a:endParaRPr lang="en-US" sz="1400" dirty="0"/>
-          </a:p>
-        </p:txBody>
-      </p:sp>
-      <p:sp>
-        <p:nvSpPr>
-          <p:cNvPr id="6" name="Text 3"/>
-          <p:cNvSpPr txBox="1"/>
-          <p:nvPr/>
-        </p:nvSpPr>
-        <p:spPr>
-          <a:xfrm>
-            <a:off x="914400" y="2194560"/>
-            <a:ext cx="10360152" cy="3474720"/>
-          </a:xfrm>
-          <a:prstGeom prst="rect">
-            <a:avLst/>
-          </a:prstGeom>
-          <a:noFill/>
-          <a:ln/>
-        </p:spPr>
-        <p:txBody>
-          <a:bodyPr wrap="square" lIns="0" tIns="0" rIns="0" bIns="0" rtlCol="0" anchor="t"/>
-          <a:lstStyle/>
-          <a:p>
-            <a:pPr marL="342900" indent="-342900">
-              <a:spcAft>
-                <a:spcPts val="1200"/>
-              </a:spcAft>
-              <a:buSzPct val="100000"/>
-              <a:buFont typeface="+mj-lt"/>
-              <a:buAutoNum type="arabicPeriod" startAt="1"/>
-            </a:pPr>
-            <a:r>
-              <a:rPr lang="en-US" sz="2600" dirty="0">
-                <a:solidFill>
-                  <a:schemeClr val="tx1"/>
-                </a:solidFill>
-              </a:rPr>
-              <a:t>Gör frågan ”Är hundar snälla?” undersökningsbar.</a:t>
-            </a:r>
-            <a:endParaRPr lang="en-US" sz="2600" dirty="0"/>
-          </a:p>
-          <a:p>
-            <a:pPr marL="342900" indent="-342900">
-              <a:spcAft>
-                <a:spcPts val="1200"/>
-              </a:spcAft>
-              <a:buSzPct val="100000"/>
-              <a:buFont typeface="+mj-lt"/>
-              <a:buAutoNum type="arabicPeriod" startAt="1"/>
-            </a:pPr>
-            <a:r>
-              <a:rPr lang="en-US" sz="2600" dirty="0">
-                <a:solidFill>
-                  <a:schemeClr val="tx1"/>
-                </a:solidFill>
-              </a:rPr>
-              <a:t>Vad är skillnaden mellan oberoende och beroende variabel?</a:t>
-            </a:r>
-            <a:endParaRPr lang="en-US" sz="2600" dirty="0"/>
-          </a:p>
-          <a:p>
-            <a:pPr marL="342900" indent="-342900">
-              <a:spcAft>
-                <a:spcPts val="1200"/>
-              </a:spcAft>
-              <a:buSzPct val="100000"/>
-              <a:buFont typeface="+mj-lt"/>
-              <a:buAutoNum type="arabicPeriod" startAt="1"/>
-            </a:pPr>
-            <a:r>
-              <a:rPr lang="en-US" sz="2600" dirty="0">
-                <a:solidFill>
-                  <a:schemeClr val="tx1"/>
-                </a:solidFill>
-              </a:rPr>
-              <a:t>Varför behövs en kontrollgrupp?</a:t>
-            </a:r>
-            <a:endParaRPr lang="en-US" sz="2600" dirty="0"/>
-          </a:p>
-          <a:p>
-            <a:pPr marL="342900" indent="-342900">
-              <a:spcAft>
-                <a:spcPts val="1200"/>
-              </a:spcAft>
-              <a:buSzPct val="100000"/>
-              <a:buFont typeface="+mj-lt"/>
-              <a:buAutoNum type="arabicPeriod" startAt="1"/>
-            </a:pPr>
-            <a:r>
-              <a:rPr lang="en-US" sz="2600" dirty="0">
-                <a:solidFill>
-                  <a:schemeClr val="tx1"/>
-                </a:solidFill>
-              </a:rPr>
-              <a:t>Varför får man bara ändra en variabel åt gången?</a:t>
-            </a:r>
-            <a:endParaRPr lang="en-US" sz="2600" dirty="0"/>
-          </a:p>
-        </p:txBody>
-      </p:sp>
-      <p:sp>
-        <p:nvSpPr>
-          <p:cNvPr id="25" name="Slide Number Placeholder 0"/>
-          <p:cNvSpPr>
-            <a:spLocks noGrp="1"/>
-          </p:cNvSpPr>
-          <p:nvPr>
-            <p:ph type="sldNum" sz="quarter" idx="4294967295"/>
-          </p:nvPr>
-        </p:nvSpPr>
-        <p:spPr>
-          <a:xfrm>
-            <a:off x="11274552" y="6400800"/>
-            <a:ext cx="457200" cy="274320"/>
-          </a:xfrm>
-          <a:prstGeom prst="rect">
-            <a:avLst/>
-          </a:prstGeom>
-          <a:extLst>
-            <a:ext uri="{C572A759-6A51-4108-AA02-DFA0A04FC94B}">
-              <ma14:wrappingTextBoxFlag xmlns:ma14="http://schemas.microsoft.com/office/mac/drawingml/2011/main" val="0"/>
-            </a:ext>
-          </a:extLst>
-        </p:spPr>
-        <p:txBody>
-          <a:bodyPr/>
-          <a:lstStyle>
-            <a:lvl1pPr>
-              <a:defRPr sz="1100">
-                <a:solidFill>
-                  <a:schemeClr val="tx2"/>
-                </a:solidFill>
-              </a:defRPr>
-            </a:lvl1pPr>
-          </a:lstStyle>
-          <a:p>
-            <a:pPr algn="l"/>
-            <a:fld id="{F7021451-1387-4CA6-816F-3879F97B5CBC}" type="slidenum">
-              <a:rPr b="0" lang="en-US"/>
-              <a:t>8</a:t>
-            </a:fld>
-            <a:endParaRPr lang="en-US"/>
+              <a:t>Lektion 2: tabell, diagram och rapport</a:t>
+            </a:r>
+            <a:endParaRPr lang="en-US" sz="2200" dirty="0"/>
           </a:p>
         </p:txBody>
       </p:sp>
@@ -11370,8 +10073,8 @@
         </p:nvSpPr>
         <p:spPr>
           <a:xfrm>
-            <a:off x="731520" y="2103120"/>
-            <a:ext cx="10698480" cy="1463040"/>
+            <a:off x="548640" y="320040"/>
+            <a:ext cx="11091672" cy="914400"/>
           </a:xfrm>
           <a:prstGeom prst="rect">
             <a:avLst/>
@@ -11387,29 +10090,983 @@
               <a:buNone/>
             </a:pPr>
             <a:r>
-              <a:rPr lang="en-US" sz="4400" b="1" dirty="0">
-                <a:solidFill>
-                  <a:schemeClr val="bg1"/>
+              <a:rPr lang="en-US" sz="3600" b="1" dirty="0">
+                <a:solidFill>
+                  <a:schemeClr val="tx2"/>
                 </a:solidFill>
               </a:rPr>
-              <a:t>1.1.2 Dokumentera</a:t>
-            </a:r>
-            <a:endParaRPr lang="en-US" sz="4400" dirty="0"/>
-          </a:p>
-        </p:txBody>
-      </p:sp>
-      <p:sp>
-        <p:nvSpPr>
-          <p:cNvPr id="4" name="Text 0"/>
-          <p:cNvSpPr/>
+              <a:t>Skriv värdena i en tabell</a:t>
+            </a:r>
+            <a:endParaRPr lang="en-US" sz="3600" dirty="0"/>
+          </a:p>
+        </p:txBody>
+      </p:sp>
+      <p:graphicFrame>
+        <p:nvGraphicFramePr>
+          <p:cNvPr id="10" name="Table 0"/>
+          <p:cNvGraphicFramePr>
+            <a:graphicFrameLocks noGrp="1"/>
+          </p:cNvGraphicFramePr>
           <p:nvPr>
-            <p:ph idx="101" type="body" hasCustomPrompt="1"/>
+            <p:extLst>
+              <p:ext uri="{D42A27DB-BD31-4B8C-83A1-F6EECF244321}">
+                <p14:modId xmlns:p14="http://schemas.microsoft.com/office/powerpoint/2010/main" val="1579011935"/>
+              </p:ext>
+            </p:extLst>
           </p:nvPr>
-        </p:nvSpPr>
-        <p:spPr>
-          <a:xfrm>
-            <a:off x="731520" y="3657600"/>
-            <a:ext cx="10698480" cy="822960"/>
+        </p:nvGraphicFramePr>
+        <p:xfrm>
+          <a:off x="548640" y="1554480"/>
+          <a:ext cx="11091672" cy="914400"/>
+        </p:xfrm>
+        <a:graphic>
+          <a:graphicData uri="http://schemas.openxmlformats.org/drawingml/2006/table">
+            <a:tbl>
+              <a:tblPr/>
+              <a:tblGrid>
+                <a:gridCol w="2743200"/>
+                <a:gridCol w="4114800"/>
+                <a:gridCol w="4233672"/>
+              </a:tblGrid>
+              <a:tr h="731520">
+                <a:tc>
+                  <a:txBody>
+                    <a:bodyPr/>
+                    <a:lstStyle/>
+                    <a:p>
+                      <a:pPr indent="0" marL="0">
+                        <a:buNone/>
+                      </a:pPr>
+                      <a:r>
+                        <a:rPr lang="en-US" sz="2000" b="1" dirty="0">
+                          <a:solidFill>
+                            <a:schemeClr val="bg1"/>
+                          </a:solidFill>
+                        </a:rPr>
+                        <a:t>Dag</a:t>
+                      </a:r>
+                      <a:endParaRPr lang="en-US" sz="2000" dirty="0"/>
+                    </a:p>
+                  </a:txBody>
+                  <a:tcPr marL="109728" marR="109728" marT="73152" marB="73152" anchor="ctr">
+                    <a:lnL w="12700" cap="flat" cmpd="sng" algn="ctr">
+                      <a:solidFill>
+                        <a:srgbClr val="C9D8CD"/>
+                      </a:solidFill>
+                      <a:prstDash val="solid"/>
+                      <a:round/>
+                      <a:headEnd type="none" w="med" len="med"/>
+                      <a:tailEnd type="none" w="med" len="med"/>
+                    </a:lnL>
+                    <a:lnR w="12700" cap="flat" cmpd="sng" algn="ctr">
+                      <a:solidFill>
+                        <a:srgbClr val="C9D8CD"/>
+                      </a:solidFill>
+                      <a:prstDash val="solid"/>
+                      <a:round/>
+                      <a:headEnd type="none" w="med" len="med"/>
+                      <a:tailEnd type="none" w="med" len="med"/>
+                    </a:lnR>
+                    <a:lnT w="12700" cap="flat" cmpd="sng" algn="ctr">
+                      <a:solidFill>
+                        <a:srgbClr val="C9D8CD"/>
+                      </a:solidFill>
+                      <a:prstDash val="solid"/>
+                      <a:round/>
+                      <a:headEnd type="none" w="med" len="med"/>
+                      <a:tailEnd type="none" w="med" len="med"/>
+                    </a:lnT>
+                    <a:lnB w="12700" cap="flat" cmpd="sng" algn="ctr">
+                      <a:solidFill>
+                        <a:srgbClr val="C9D8CD"/>
+                      </a:solidFill>
+                      <a:prstDash val="solid"/>
+                      <a:round/>
+                      <a:headEnd type="none" w="med" len="med"/>
+                      <a:tailEnd type="none" w="med" len="med"/>
+                    </a:lnB>
+                    <a:solidFill>
+                      <a:schemeClr val="accent1"/>
+                    </a:solidFill>
+                  </a:tcPr>
+                </a:tc>
+                <a:tc>
+                  <a:txBody>
+                    <a:bodyPr/>
+                    <a:lstStyle/>
+                    <a:p>
+                      <a:pPr indent="0" marL="0">
+                        <a:buNone/>
+                      </a:pPr>
+                      <a:r>
+                        <a:rPr lang="en-US" sz="2000" b="1" dirty="0">
+                          <a:solidFill>
+                            <a:schemeClr val="bg1"/>
+                          </a:solidFill>
+                        </a:rPr>
+                        <a:t>Ljus (mm)</a:t>
+                      </a:r>
+                      <a:endParaRPr lang="en-US" sz="2000" dirty="0"/>
+                    </a:p>
+                  </a:txBody>
+                  <a:tcPr marL="109728" marR="109728" marT="73152" marB="73152" anchor="ctr">
+                    <a:lnL w="12700" cap="flat" cmpd="sng" algn="ctr">
+                      <a:solidFill>
+                        <a:srgbClr val="C9D8CD"/>
+                      </a:solidFill>
+                      <a:prstDash val="solid"/>
+                      <a:round/>
+                      <a:headEnd type="none" w="med" len="med"/>
+                      <a:tailEnd type="none" w="med" len="med"/>
+                    </a:lnL>
+                    <a:lnR w="12700" cap="flat" cmpd="sng" algn="ctr">
+                      <a:solidFill>
+                        <a:srgbClr val="C9D8CD"/>
+                      </a:solidFill>
+                      <a:prstDash val="solid"/>
+                      <a:round/>
+                      <a:headEnd type="none" w="med" len="med"/>
+                      <a:tailEnd type="none" w="med" len="med"/>
+                    </a:lnR>
+                    <a:lnT w="12700" cap="flat" cmpd="sng" algn="ctr">
+                      <a:solidFill>
+                        <a:srgbClr val="C9D8CD"/>
+                      </a:solidFill>
+                      <a:prstDash val="solid"/>
+                      <a:round/>
+                      <a:headEnd type="none" w="med" len="med"/>
+                      <a:tailEnd type="none" w="med" len="med"/>
+                    </a:lnT>
+                    <a:lnB w="12700" cap="flat" cmpd="sng" algn="ctr">
+                      <a:solidFill>
+                        <a:srgbClr val="C9D8CD"/>
+                      </a:solidFill>
+                      <a:prstDash val="solid"/>
+                      <a:round/>
+                      <a:headEnd type="none" w="med" len="med"/>
+                      <a:tailEnd type="none" w="med" len="med"/>
+                    </a:lnB>
+                    <a:solidFill>
+                      <a:schemeClr val="accent1"/>
+                    </a:solidFill>
+                  </a:tcPr>
+                </a:tc>
+                <a:tc>
+                  <a:txBody>
+                    <a:bodyPr/>
+                    <a:lstStyle/>
+                    <a:p>
+                      <a:pPr indent="0" marL="0">
+                        <a:buNone/>
+                      </a:pPr>
+                      <a:r>
+                        <a:rPr lang="en-US" sz="2000" b="1" dirty="0">
+                          <a:solidFill>
+                            <a:schemeClr val="bg1"/>
+                          </a:solidFill>
+                        </a:rPr>
+                        <a:t>Mörker (mm)</a:t>
+                      </a:r>
+                      <a:endParaRPr lang="en-US" sz="2000" dirty="0"/>
+                    </a:p>
+                  </a:txBody>
+                  <a:tcPr marL="109728" marR="109728" marT="73152" marB="73152" anchor="ctr">
+                    <a:lnL w="12700" cap="flat" cmpd="sng" algn="ctr">
+                      <a:solidFill>
+                        <a:srgbClr val="C9D8CD"/>
+                      </a:solidFill>
+                      <a:prstDash val="solid"/>
+                      <a:round/>
+                      <a:headEnd type="none" w="med" len="med"/>
+                      <a:tailEnd type="none" w="med" len="med"/>
+                    </a:lnL>
+                    <a:lnR w="12700" cap="flat" cmpd="sng" algn="ctr">
+                      <a:solidFill>
+                        <a:srgbClr val="C9D8CD"/>
+                      </a:solidFill>
+                      <a:prstDash val="solid"/>
+                      <a:round/>
+                      <a:headEnd type="none" w="med" len="med"/>
+                      <a:tailEnd type="none" w="med" len="med"/>
+                    </a:lnR>
+                    <a:lnT w="12700" cap="flat" cmpd="sng" algn="ctr">
+                      <a:solidFill>
+                        <a:srgbClr val="C9D8CD"/>
+                      </a:solidFill>
+                      <a:prstDash val="solid"/>
+                      <a:round/>
+                      <a:headEnd type="none" w="med" len="med"/>
+                      <a:tailEnd type="none" w="med" len="med"/>
+                    </a:lnT>
+                    <a:lnB w="12700" cap="flat" cmpd="sng" algn="ctr">
+                      <a:solidFill>
+                        <a:srgbClr val="C9D8CD"/>
+                      </a:solidFill>
+                      <a:prstDash val="solid"/>
+                      <a:round/>
+                      <a:headEnd type="none" w="med" len="med"/>
+                      <a:tailEnd type="none" w="med" len="med"/>
+                    </a:lnB>
+                    <a:solidFill>
+                      <a:schemeClr val="accent1"/>
+                    </a:solidFill>
+                  </a:tcPr>
+                </a:tc>
+              </a:tr>
+              <a:tr h="731520">
+                <a:tc>
+                  <a:txBody>
+                    <a:bodyPr/>
+                    <a:lstStyle/>
+                    <a:p>
+                      <a:pPr indent="0" marL="0">
+                        <a:buNone/>
+                      </a:pPr>
+                      <a:r>
+                        <a:rPr lang="en-US" sz="2000" b="1" dirty="0">
+                          <a:solidFill>
+                            <a:schemeClr val="tx1"/>
+                          </a:solidFill>
+                        </a:rPr>
+                        <a:t>1</a:t>
+                      </a:r>
+                      <a:endParaRPr lang="en-US" sz="2000" dirty="0"/>
+                    </a:p>
+                  </a:txBody>
+                  <a:tcPr marL="109728" marR="109728" marT="73152" marB="73152" anchor="ctr">
+                    <a:lnL w="12700" cap="flat" cmpd="sng" algn="ctr">
+                      <a:solidFill>
+                        <a:srgbClr val="C9D8CD"/>
+                      </a:solidFill>
+                      <a:prstDash val="solid"/>
+                      <a:round/>
+                      <a:headEnd type="none" w="med" len="med"/>
+                      <a:tailEnd type="none" w="med" len="med"/>
+                    </a:lnL>
+                    <a:lnR w="12700" cap="flat" cmpd="sng" algn="ctr">
+                      <a:solidFill>
+                        <a:srgbClr val="C9D8CD"/>
+                      </a:solidFill>
+                      <a:prstDash val="solid"/>
+                      <a:round/>
+                      <a:headEnd type="none" w="med" len="med"/>
+                      <a:tailEnd type="none" w="med" len="med"/>
+                    </a:lnR>
+                    <a:lnT w="12700" cap="flat" cmpd="sng" algn="ctr">
+                      <a:solidFill>
+                        <a:srgbClr val="C9D8CD"/>
+                      </a:solidFill>
+                      <a:prstDash val="solid"/>
+                      <a:round/>
+                      <a:headEnd type="none" w="med" len="med"/>
+                      <a:tailEnd type="none" w="med" len="med"/>
+                    </a:lnT>
+                    <a:lnB w="12700" cap="flat" cmpd="sng" algn="ctr">
+                      <a:solidFill>
+                        <a:srgbClr val="C9D8CD"/>
+                      </a:solidFill>
+                      <a:prstDash val="solid"/>
+                      <a:round/>
+                      <a:headEnd type="none" w="med" len="med"/>
+                      <a:tailEnd type="none" w="med" len="med"/>
+                    </a:lnB>
+                    <a:solidFill>
+                      <a:schemeClr val="bg1"/>
+                    </a:solidFill>
+                  </a:tcPr>
+                </a:tc>
+                <a:tc>
+                  <a:txBody>
+                    <a:bodyPr/>
+                    <a:lstStyle/>
+                    <a:p>
+                      <a:pPr indent="0" marL="0">
+                        <a:buNone/>
+                      </a:pPr>
+                      <a:r>
+                        <a:rPr lang="en-US" sz="2000" dirty="0">
+                          <a:solidFill>
+                            <a:schemeClr val="tx1"/>
+                          </a:solidFill>
+                        </a:rPr>
+                        <a:t>5</a:t>
+                      </a:r>
+                      <a:endParaRPr lang="en-US" sz="2000" dirty="0"/>
+                    </a:p>
+                  </a:txBody>
+                  <a:tcPr marL="109728" marR="109728" marT="73152" marB="73152" anchor="ctr">
+                    <a:lnL w="12700" cap="flat" cmpd="sng" algn="ctr">
+                      <a:solidFill>
+                        <a:srgbClr val="C9D8CD"/>
+                      </a:solidFill>
+                      <a:prstDash val="solid"/>
+                      <a:round/>
+                      <a:headEnd type="none" w="med" len="med"/>
+                      <a:tailEnd type="none" w="med" len="med"/>
+                    </a:lnL>
+                    <a:lnR w="12700" cap="flat" cmpd="sng" algn="ctr">
+                      <a:solidFill>
+                        <a:srgbClr val="C9D8CD"/>
+                      </a:solidFill>
+                      <a:prstDash val="solid"/>
+                      <a:round/>
+                      <a:headEnd type="none" w="med" len="med"/>
+                      <a:tailEnd type="none" w="med" len="med"/>
+                    </a:lnR>
+                    <a:lnT w="12700" cap="flat" cmpd="sng" algn="ctr">
+                      <a:solidFill>
+                        <a:srgbClr val="C9D8CD"/>
+                      </a:solidFill>
+                      <a:prstDash val="solid"/>
+                      <a:round/>
+                      <a:headEnd type="none" w="med" len="med"/>
+                      <a:tailEnd type="none" w="med" len="med"/>
+                    </a:lnT>
+                    <a:lnB w="12700" cap="flat" cmpd="sng" algn="ctr">
+                      <a:solidFill>
+                        <a:srgbClr val="C9D8CD"/>
+                      </a:solidFill>
+                      <a:prstDash val="solid"/>
+                      <a:round/>
+                      <a:headEnd type="none" w="med" len="med"/>
+                      <a:tailEnd type="none" w="med" len="med"/>
+                    </a:lnB>
+                    <a:solidFill>
+                      <a:schemeClr val="bg1"/>
+                    </a:solidFill>
+                  </a:tcPr>
+                </a:tc>
+                <a:tc>
+                  <a:txBody>
+                    <a:bodyPr/>
+                    <a:lstStyle/>
+                    <a:p>
+                      <a:pPr indent="0" marL="0">
+                        <a:buNone/>
+                      </a:pPr>
+                      <a:r>
+                        <a:rPr lang="en-US" sz="2000" dirty="0">
+                          <a:solidFill>
+                            <a:schemeClr val="tx1"/>
+                          </a:solidFill>
+                        </a:rPr>
+                        <a:t>5</a:t>
+                      </a:r>
+                      <a:endParaRPr lang="en-US" sz="2000" dirty="0"/>
+                    </a:p>
+                  </a:txBody>
+                  <a:tcPr marL="109728" marR="109728" marT="73152" marB="73152" anchor="ctr">
+                    <a:lnL w="12700" cap="flat" cmpd="sng" algn="ctr">
+                      <a:solidFill>
+                        <a:srgbClr val="C9D8CD"/>
+                      </a:solidFill>
+                      <a:prstDash val="solid"/>
+                      <a:round/>
+                      <a:headEnd type="none" w="med" len="med"/>
+                      <a:tailEnd type="none" w="med" len="med"/>
+                    </a:lnL>
+                    <a:lnR w="12700" cap="flat" cmpd="sng" algn="ctr">
+                      <a:solidFill>
+                        <a:srgbClr val="C9D8CD"/>
+                      </a:solidFill>
+                      <a:prstDash val="solid"/>
+                      <a:round/>
+                      <a:headEnd type="none" w="med" len="med"/>
+                      <a:tailEnd type="none" w="med" len="med"/>
+                    </a:lnR>
+                    <a:lnT w="12700" cap="flat" cmpd="sng" algn="ctr">
+                      <a:solidFill>
+                        <a:srgbClr val="C9D8CD"/>
+                      </a:solidFill>
+                      <a:prstDash val="solid"/>
+                      <a:round/>
+                      <a:headEnd type="none" w="med" len="med"/>
+                      <a:tailEnd type="none" w="med" len="med"/>
+                    </a:lnT>
+                    <a:lnB w="12700" cap="flat" cmpd="sng" algn="ctr">
+                      <a:solidFill>
+                        <a:srgbClr val="C9D8CD"/>
+                      </a:solidFill>
+                      <a:prstDash val="solid"/>
+                      <a:round/>
+                      <a:headEnd type="none" w="med" len="med"/>
+                      <a:tailEnd type="none" w="med" len="med"/>
+                    </a:lnB>
+                    <a:solidFill>
+                      <a:schemeClr val="bg1"/>
+                    </a:solidFill>
+                  </a:tcPr>
+                </a:tc>
+              </a:tr>
+              <a:tr h="731520">
+                <a:tc>
+                  <a:txBody>
+                    <a:bodyPr/>
+                    <a:lstStyle/>
+                    <a:p>
+                      <a:pPr indent="0" marL="0">
+                        <a:buNone/>
+                      </a:pPr>
+                      <a:r>
+                        <a:rPr lang="en-US" sz="2000" b="1" dirty="0">
+                          <a:solidFill>
+                            <a:schemeClr val="tx1"/>
+                          </a:solidFill>
+                        </a:rPr>
+                        <a:t>3</a:t>
+                      </a:r>
+                      <a:endParaRPr lang="en-US" sz="2000" dirty="0"/>
+                    </a:p>
+                  </a:txBody>
+                  <a:tcPr marL="109728" marR="109728" marT="73152" marB="73152" anchor="ctr">
+                    <a:lnL w="12700" cap="flat" cmpd="sng" algn="ctr">
+                      <a:solidFill>
+                        <a:srgbClr val="C9D8CD"/>
+                      </a:solidFill>
+                      <a:prstDash val="solid"/>
+                      <a:round/>
+                      <a:headEnd type="none" w="med" len="med"/>
+                      <a:tailEnd type="none" w="med" len="med"/>
+                    </a:lnL>
+                    <a:lnR w="12700" cap="flat" cmpd="sng" algn="ctr">
+                      <a:solidFill>
+                        <a:srgbClr val="C9D8CD"/>
+                      </a:solidFill>
+                      <a:prstDash val="solid"/>
+                      <a:round/>
+                      <a:headEnd type="none" w="med" len="med"/>
+                      <a:tailEnd type="none" w="med" len="med"/>
+                    </a:lnR>
+                    <a:lnT w="12700" cap="flat" cmpd="sng" algn="ctr">
+                      <a:solidFill>
+                        <a:srgbClr val="C9D8CD"/>
+                      </a:solidFill>
+                      <a:prstDash val="solid"/>
+                      <a:round/>
+                      <a:headEnd type="none" w="med" len="med"/>
+                      <a:tailEnd type="none" w="med" len="med"/>
+                    </a:lnT>
+                    <a:lnB w="12700" cap="flat" cmpd="sng" algn="ctr">
+                      <a:solidFill>
+                        <a:srgbClr val="C9D8CD"/>
+                      </a:solidFill>
+                      <a:prstDash val="solid"/>
+                      <a:round/>
+                      <a:headEnd type="none" w="med" len="med"/>
+                      <a:tailEnd type="none" w="med" len="med"/>
+                    </a:lnB>
+                    <a:solidFill>
+                      <a:schemeClr val="bg1"/>
+                    </a:solidFill>
+                  </a:tcPr>
+                </a:tc>
+                <a:tc>
+                  <a:txBody>
+                    <a:bodyPr/>
+                    <a:lstStyle/>
+                    <a:p>
+                      <a:pPr indent="0" marL="0">
+                        <a:buNone/>
+                      </a:pPr>
+                      <a:r>
+                        <a:rPr lang="en-US" sz="2000" dirty="0">
+                          <a:solidFill>
+                            <a:schemeClr val="tx1"/>
+                          </a:solidFill>
+                        </a:rPr>
+                        <a:t>15</a:t>
+                      </a:r>
+                      <a:endParaRPr lang="en-US" sz="2000" dirty="0"/>
+                    </a:p>
+                  </a:txBody>
+                  <a:tcPr marL="109728" marR="109728" marT="73152" marB="73152" anchor="ctr">
+                    <a:lnL w="12700" cap="flat" cmpd="sng" algn="ctr">
+                      <a:solidFill>
+                        <a:srgbClr val="C9D8CD"/>
+                      </a:solidFill>
+                      <a:prstDash val="solid"/>
+                      <a:round/>
+                      <a:headEnd type="none" w="med" len="med"/>
+                      <a:tailEnd type="none" w="med" len="med"/>
+                    </a:lnL>
+                    <a:lnR w="12700" cap="flat" cmpd="sng" algn="ctr">
+                      <a:solidFill>
+                        <a:srgbClr val="C9D8CD"/>
+                      </a:solidFill>
+                      <a:prstDash val="solid"/>
+                      <a:round/>
+                      <a:headEnd type="none" w="med" len="med"/>
+                      <a:tailEnd type="none" w="med" len="med"/>
+                    </a:lnR>
+                    <a:lnT w="12700" cap="flat" cmpd="sng" algn="ctr">
+                      <a:solidFill>
+                        <a:srgbClr val="C9D8CD"/>
+                      </a:solidFill>
+                      <a:prstDash val="solid"/>
+                      <a:round/>
+                      <a:headEnd type="none" w="med" len="med"/>
+                      <a:tailEnd type="none" w="med" len="med"/>
+                    </a:lnT>
+                    <a:lnB w="12700" cap="flat" cmpd="sng" algn="ctr">
+                      <a:solidFill>
+                        <a:srgbClr val="C9D8CD"/>
+                      </a:solidFill>
+                      <a:prstDash val="solid"/>
+                      <a:round/>
+                      <a:headEnd type="none" w="med" len="med"/>
+                      <a:tailEnd type="none" w="med" len="med"/>
+                    </a:lnB>
+                    <a:solidFill>
+                      <a:schemeClr val="bg1"/>
+                    </a:solidFill>
+                  </a:tcPr>
+                </a:tc>
+                <a:tc>
+                  <a:txBody>
+                    <a:bodyPr/>
+                    <a:lstStyle/>
+                    <a:p>
+                      <a:pPr indent="0" marL="0">
+                        <a:buNone/>
+                      </a:pPr>
+                      <a:r>
+                        <a:rPr lang="en-US" sz="2000" dirty="0">
+                          <a:solidFill>
+                            <a:schemeClr val="tx1"/>
+                          </a:solidFill>
+                        </a:rPr>
+                        <a:t>25</a:t>
+                      </a:r>
+                      <a:endParaRPr lang="en-US" sz="2000" dirty="0"/>
+                    </a:p>
+                  </a:txBody>
+                  <a:tcPr marL="109728" marR="109728" marT="73152" marB="73152" anchor="ctr">
+                    <a:lnL w="12700" cap="flat" cmpd="sng" algn="ctr">
+                      <a:solidFill>
+                        <a:srgbClr val="C9D8CD"/>
+                      </a:solidFill>
+                      <a:prstDash val="solid"/>
+                      <a:round/>
+                      <a:headEnd type="none" w="med" len="med"/>
+                      <a:tailEnd type="none" w="med" len="med"/>
+                    </a:lnL>
+                    <a:lnR w="12700" cap="flat" cmpd="sng" algn="ctr">
+                      <a:solidFill>
+                        <a:srgbClr val="C9D8CD"/>
+                      </a:solidFill>
+                      <a:prstDash val="solid"/>
+                      <a:round/>
+                      <a:headEnd type="none" w="med" len="med"/>
+                      <a:tailEnd type="none" w="med" len="med"/>
+                    </a:lnR>
+                    <a:lnT w="12700" cap="flat" cmpd="sng" algn="ctr">
+                      <a:solidFill>
+                        <a:srgbClr val="C9D8CD"/>
+                      </a:solidFill>
+                      <a:prstDash val="solid"/>
+                      <a:round/>
+                      <a:headEnd type="none" w="med" len="med"/>
+                      <a:tailEnd type="none" w="med" len="med"/>
+                    </a:lnT>
+                    <a:lnB w="12700" cap="flat" cmpd="sng" algn="ctr">
+                      <a:solidFill>
+                        <a:srgbClr val="C9D8CD"/>
+                      </a:solidFill>
+                      <a:prstDash val="solid"/>
+                      <a:round/>
+                      <a:headEnd type="none" w="med" len="med"/>
+                      <a:tailEnd type="none" w="med" len="med"/>
+                    </a:lnB>
+                    <a:solidFill>
+                      <a:schemeClr val="bg1"/>
+                    </a:solidFill>
+                  </a:tcPr>
+                </a:tc>
+              </a:tr>
+              <a:tr h="731520">
+                <a:tc>
+                  <a:txBody>
+                    <a:bodyPr/>
+                    <a:lstStyle/>
+                    <a:p>
+                      <a:pPr indent="0" marL="0">
+                        <a:buNone/>
+                      </a:pPr>
+                      <a:r>
+                        <a:rPr lang="en-US" sz="2000" b="1" dirty="0">
+                          <a:solidFill>
+                            <a:schemeClr val="tx1"/>
+                          </a:solidFill>
+                        </a:rPr>
+                        <a:t>5</a:t>
+                      </a:r>
+                      <a:endParaRPr lang="en-US" sz="2000" dirty="0"/>
+                    </a:p>
+                  </a:txBody>
+                  <a:tcPr marL="109728" marR="109728" marT="73152" marB="73152" anchor="ctr">
+                    <a:lnL w="12700" cap="flat" cmpd="sng" algn="ctr">
+                      <a:solidFill>
+                        <a:srgbClr val="C9D8CD"/>
+                      </a:solidFill>
+                      <a:prstDash val="solid"/>
+                      <a:round/>
+                      <a:headEnd type="none" w="med" len="med"/>
+                      <a:tailEnd type="none" w="med" len="med"/>
+                    </a:lnL>
+                    <a:lnR w="12700" cap="flat" cmpd="sng" algn="ctr">
+                      <a:solidFill>
+                        <a:srgbClr val="C9D8CD"/>
+                      </a:solidFill>
+                      <a:prstDash val="solid"/>
+                      <a:round/>
+                      <a:headEnd type="none" w="med" len="med"/>
+                      <a:tailEnd type="none" w="med" len="med"/>
+                    </a:lnR>
+                    <a:lnT w="12700" cap="flat" cmpd="sng" algn="ctr">
+                      <a:solidFill>
+                        <a:srgbClr val="C9D8CD"/>
+                      </a:solidFill>
+                      <a:prstDash val="solid"/>
+                      <a:round/>
+                      <a:headEnd type="none" w="med" len="med"/>
+                      <a:tailEnd type="none" w="med" len="med"/>
+                    </a:lnT>
+                    <a:lnB w="12700" cap="flat" cmpd="sng" algn="ctr">
+                      <a:solidFill>
+                        <a:srgbClr val="C9D8CD"/>
+                      </a:solidFill>
+                      <a:prstDash val="solid"/>
+                      <a:round/>
+                      <a:headEnd type="none" w="med" len="med"/>
+                      <a:tailEnd type="none" w="med" len="med"/>
+                    </a:lnB>
+                    <a:solidFill>
+                      <a:schemeClr val="bg1"/>
+                    </a:solidFill>
+                  </a:tcPr>
+                </a:tc>
+                <a:tc>
+                  <a:txBody>
+                    <a:bodyPr/>
+                    <a:lstStyle/>
+                    <a:p>
+                      <a:pPr indent="0" marL="0">
+                        <a:buNone/>
+                      </a:pPr>
+                      <a:r>
+                        <a:rPr lang="en-US" sz="2000" dirty="0">
+                          <a:solidFill>
+                            <a:schemeClr val="tx1"/>
+                          </a:solidFill>
+                        </a:rPr>
+                        <a:t>28</a:t>
+                      </a:r>
+                      <a:endParaRPr lang="en-US" sz="2000" dirty="0"/>
+                    </a:p>
+                  </a:txBody>
+                  <a:tcPr marL="109728" marR="109728" marT="73152" marB="73152" anchor="ctr">
+                    <a:lnL w="12700" cap="flat" cmpd="sng" algn="ctr">
+                      <a:solidFill>
+                        <a:srgbClr val="C9D8CD"/>
+                      </a:solidFill>
+                      <a:prstDash val="solid"/>
+                      <a:round/>
+                      <a:headEnd type="none" w="med" len="med"/>
+                      <a:tailEnd type="none" w="med" len="med"/>
+                    </a:lnL>
+                    <a:lnR w="12700" cap="flat" cmpd="sng" algn="ctr">
+                      <a:solidFill>
+                        <a:srgbClr val="C9D8CD"/>
+                      </a:solidFill>
+                      <a:prstDash val="solid"/>
+                      <a:round/>
+                      <a:headEnd type="none" w="med" len="med"/>
+                      <a:tailEnd type="none" w="med" len="med"/>
+                    </a:lnR>
+                    <a:lnT w="12700" cap="flat" cmpd="sng" algn="ctr">
+                      <a:solidFill>
+                        <a:srgbClr val="C9D8CD"/>
+                      </a:solidFill>
+                      <a:prstDash val="solid"/>
+                      <a:round/>
+                      <a:headEnd type="none" w="med" len="med"/>
+                      <a:tailEnd type="none" w="med" len="med"/>
+                    </a:lnT>
+                    <a:lnB w="12700" cap="flat" cmpd="sng" algn="ctr">
+                      <a:solidFill>
+                        <a:srgbClr val="C9D8CD"/>
+                      </a:solidFill>
+                      <a:prstDash val="solid"/>
+                      <a:round/>
+                      <a:headEnd type="none" w="med" len="med"/>
+                      <a:tailEnd type="none" w="med" len="med"/>
+                    </a:lnB>
+                    <a:solidFill>
+                      <a:schemeClr val="bg1"/>
+                    </a:solidFill>
+                  </a:tcPr>
+                </a:tc>
+                <a:tc>
+                  <a:txBody>
+                    <a:bodyPr/>
+                    <a:lstStyle/>
+                    <a:p>
+                      <a:pPr indent="0" marL="0">
+                        <a:buNone/>
+                      </a:pPr>
+                      <a:r>
+                        <a:rPr lang="en-US" sz="2000" dirty="0">
+                          <a:solidFill>
+                            <a:schemeClr val="tx1"/>
+                          </a:solidFill>
+                        </a:rPr>
+                        <a:t>42</a:t>
+                      </a:r>
+                      <a:endParaRPr lang="en-US" sz="2000" dirty="0"/>
+                    </a:p>
+                  </a:txBody>
+                  <a:tcPr marL="109728" marR="109728" marT="73152" marB="73152" anchor="ctr">
+                    <a:lnL w="12700" cap="flat" cmpd="sng" algn="ctr">
+                      <a:solidFill>
+                        <a:srgbClr val="C9D8CD"/>
+                      </a:solidFill>
+                      <a:prstDash val="solid"/>
+                      <a:round/>
+                      <a:headEnd type="none" w="med" len="med"/>
+                      <a:tailEnd type="none" w="med" len="med"/>
+                    </a:lnL>
+                    <a:lnR w="12700" cap="flat" cmpd="sng" algn="ctr">
+                      <a:solidFill>
+                        <a:srgbClr val="C9D8CD"/>
+                      </a:solidFill>
+                      <a:prstDash val="solid"/>
+                      <a:round/>
+                      <a:headEnd type="none" w="med" len="med"/>
+                      <a:tailEnd type="none" w="med" len="med"/>
+                    </a:lnR>
+                    <a:lnT w="12700" cap="flat" cmpd="sng" algn="ctr">
+                      <a:solidFill>
+                        <a:srgbClr val="C9D8CD"/>
+                      </a:solidFill>
+                      <a:prstDash val="solid"/>
+                      <a:round/>
+                      <a:headEnd type="none" w="med" len="med"/>
+                      <a:tailEnd type="none" w="med" len="med"/>
+                    </a:lnT>
+                    <a:lnB w="12700" cap="flat" cmpd="sng" algn="ctr">
+                      <a:solidFill>
+                        <a:srgbClr val="C9D8CD"/>
+                      </a:solidFill>
+                      <a:prstDash val="solid"/>
+                      <a:round/>
+                      <a:headEnd type="none" w="med" len="med"/>
+                      <a:tailEnd type="none" w="med" len="med"/>
+                    </a:lnB>
+                    <a:solidFill>
+                      <a:schemeClr val="bg1"/>
+                    </a:solidFill>
+                  </a:tcPr>
+                </a:tc>
+              </a:tr>
+              <a:tr h="731520">
+                <a:tc>
+                  <a:txBody>
+                    <a:bodyPr/>
+                    <a:lstStyle/>
+                    <a:p>
+                      <a:pPr indent="0" marL="0">
+                        <a:buNone/>
+                      </a:pPr>
+                      <a:r>
+                        <a:rPr lang="en-US" sz="2000" b="1" dirty="0">
+                          <a:solidFill>
+                            <a:schemeClr val="tx1"/>
+                          </a:solidFill>
+                        </a:rPr>
+                        <a:t>7</a:t>
+                      </a:r>
+                      <a:endParaRPr lang="en-US" sz="2000" dirty="0"/>
+                    </a:p>
+                  </a:txBody>
+                  <a:tcPr marL="109728" marR="109728" marT="73152" marB="73152" anchor="ctr">
+                    <a:lnL w="12700" cap="flat" cmpd="sng" algn="ctr">
+                      <a:solidFill>
+                        <a:srgbClr val="C9D8CD"/>
+                      </a:solidFill>
+                      <a:prstDash val="solid"/>
+                      <a:round/>
+                      <a:headEnd type="none" w="med" len="med"/>
+                      <a:tailEnd type="none" w="med" len="med"/>
+                    </a:lnL>
+                    <a:lnR w="12700" cap="flat" cmpd="sng" algn="ctr">
+                      <a:solidFill>
+                        <a:srgbClr val="C9D8CD"/>
+                      </a:solidFill>
+                      <a:prstDash val="solid"/>
+                      <a:round/>
+                      <a:headEnd type="none" w="med" len="med"/>
+                      <a:tailEnd type="none" w="med" len="med"/>
+                    </a:lnR>
+                    <a:lnT w="12700" cap="flat" cmpd="sng" algn="ctr">
+                      <a:solidFill>
+                        <a:srgbClr val="C9D8CD"/>
+                      </a:solidFill>
+                      <a:prstDash val="solid"/>
+                      <a:round/>
+                      <a:headEnd type="none" w="med" len="med"/>
+                      <a:tailEnd type="none" w="med" len="med"/>
+                    </a:lnT>
+                    <a:lnB w="12700" cap="flat" cmpd="sng" algn="ctr">
+                      <a:solidFill>
+                        <a:srgbClr val="C9D8CD"/>
+                      </a:solidFill>
+                      <a:prstDash val="solid"/>
+                      <a:round/>
+                      <a:headEnd type="none" w="med" len="med"/>
+                      <a:tailEnd type="none" w="med" len="med"/>
+                    </a:lnB>
+                    <a:solidFill>
+                      <a:schemeClr val="bg1"/>
+                    </a:solidFill>
+                  </a:tcPr>
+                </a:tc>
+                <a:tc>
+                  <a:txBody>
+                    <a:bodyPr/>
+                    <a:lstStyle/>
+                    <a:p>
+                      <a:pPr indent="0" marL="0">
+                        <a:buNone/>
+                      </a:pPr>
+                      <a:r>
+                        <a:rPr lang="en-US" sz="2000" dirty="0">
+                          <a:solidFill>
+                            <a:schemeClr val="tx1"/>
+                          </a:solidFill>
+                        </a:rPr>
+                        <a:t>40</a:t>
+                      </a:r>
+                      <a:endParaRPr lang="en-US" sz="2000" dirty="0"/>
+                    </a:p>
+                  </a:txBody>
+                  <a:tcPr marL="109728" marR="109728" marT="73152" marB="73152" anchor="ctr">
+                    <a:lnL w="12700" cap="flat" cmpd="sng" algn="ctr">
+                      <a:solidFill>
+                        <a:srgbClr val="C9D8CD"/>
+                      </a:solidFill>
+                      <a:prstDash val="solid"/>
+                      <a:round/>
+                      <a:headEnd type="none" w="med" len="med"/>
+                      <a:tailEnd type="none" w="med" len="med"/>
+                    </a:lnL>
+                    <a:lnR w="12700" cap="flat" cmpd="sng" algn="ctr">
+                      <a:solidFill>
+                        <a:srgbClr val="C9D8CD"/>
+                      </a:solidFill>
+                      <a:prstDash val="solid"/>
+                      <a:round/>
+                      <a:headEnd type="none" w="med" len="med"/>
+                      <a:tailEnd type="none" w="med" len="med"/>
+                    </a:lnR>
+                    <a:lnT w="12700" cap="flat" cmpd="sng" algn="ctr">
+                      <a:solidFill>
+                        <a:srgbClr val="C9D8CD"/>
+                      </a:solidFill>
+                      <a:prstDash val="solid"/>
+                      <a:round/>
+                      <a:headEnd type="none" w="med" len="med"/>
+                      <a:tailEnd type="none" w="med" len="med"/>
+                    </a:lnT>
+                    <a:lnB w="12700" cap="flat" cmpd="sng" algn="ctr">
+                      <a:solidFill>
+                        <a:srgbClr val="C9D8CD"/>
+                      </a:solidFill>
+                      <a:prstDash val="solid"/>
+                      <a:round/>
+                      <a:headEnd type="none" w="med" len="med"/>
+                      <a:tailEnd type="none" w="med" len="med"/>
+                    </a:lnB>
+                    <a:solidFill>
+                      <a:schemeClr val="bg1"/>
+                    </a:solidFill>
+                  </a:tcPr>
+                </a:tc>
+                <a:tc>
+                  <a:txBody>
+                    <a:bodyPr/>
+                    <a:lstStyle/>
+                    <a:p>
+                      <a:pPr indent="0" marL="0">
+                        <a:buNone/>
+                      </a:pPr>
+                      <a:r>
+                        <a:rPr lang="en-US" sz="2000" dirty="0">
+                          <a:solidFill>
+                            <a:schemeClr val="tx1"/>
+                          </a:solidFill>
+                        </a:rPr>
+                        <a:t>60</a:t>
+                      </a:r>
+                      <a:endParaRPr lang="en-US" sz="2000" dirty="0"/>
+                    </a:p>
+                  </a:txBody>
+                  <a:tcPr marL="109728" marR="109728" marT="73152" marB="73152" anchor="ctr">
+                    <a:lnL w="12700" cap="flat" cmpd="sng" algn="ctr">
+                      <a:solidFill>
+                        <a:srgbClr val="C9D8CD"/>
+                      </a:solidFill>
+                      <a:prstDash val="solid"/>
+                      <a:round/>
+                      <a:headEnd type="none" w="med" len="med"/>
+                      <a:tailEnd type="none" w="med" len="med"/>
+                    </a:lnL>
+                    <a:lnR w="12700" cap="flat" cmpd="sng" algn="ctr">
+                      <a:solidFill>
+                        <a:srgbClr val="C9D8CD"/>
+                      </a:solidFill>
+                      <a:prstDash val="solid"/>
+                      <a:round/>
+                      <a:headEnd type="none" w="med" len="med"/>
+                      <a:tailEnd type="none" w="med" len="med"/>
+                    </a:lnR>
+                    <a:lnT w="12700" cap="flat" cmpd="sng" algn="ctr">
+                      <a:solidFill>
+                        <a:srgbClr val="C9D8CD"/>
+                      </a:solidFill>
+                      <a:prstDash val="solid"/>
+                      <a:round/>
+                      <a:headEnd type="none" w="med" len="med"/>
+                      <a:tailEnd type="none" w="med" len="med"/>
+                    </a:lnT>
+                    <a:lnB w="12700" cap="flat" cmpd="sng" algn="ctr">
+                      <a:solidFill>
+                        <a:srgbClr val="C9D8CD"/>
+                      </a:solidFill>
+                      <a:prstDash val="solid"/>
+                      <a:round/>
+                      <a:headEnd type="none" w="med" len="med"/>
+                      <a:tailEnd type="none" w="med" len="med"/>
+                    </a:lnB>
+                    <a:solidFill>
+                      <a:schemeClr val="bg1"/>
+                    </a:solidFill>
+                  </a:tcPr>
+                </a:tc>
+              </a:tr>
+            </a:tbl>
+          </a:graphicData>
+        </a:graphic>
+      </p:graphicFrame>
+      <p:sp>
+        <p:nvSpPr>
+          <p:cNvPr id="5" name="Text 1"/>
+          <p:cNvSpPr txBox="1"/>
+          <p:nvPr/>
+        </p:nvSpPr>
+        <p:spPr>
+          <a:xfrm>
+            <a:off x="548640" y="5577840"/>
+            <a:ext cx="11091672" cy="731520"/>
           </a:xfrm>
           <a:prstGeom prst="rect">
             <a:avLst/>
@@ -11418,21 +11075,66 @@
           <a:ln/>
         </p:spPr>
         <p:txBody>
-          <a:bodyPr wrap="square" lIns="0" tIns="0" rIns="0" bIns="0" rtlCol="0" anchor="t"/>
-          <a:lstStyle/>
-          <a:p>
-            <a:pPr algn="l" indent="0" marL="0">
+          <a:bodyPr wrap="square" lIns="0" tIns="0" rIns="0" bIns="0" rtlCol="0" anchor="ctr"/>
+          <a:lstStyle/>
+          <a:p>
+            <a:pPr indent="0" marL="0">
               <a:buNone/>
             </a:pPr>
             <a:r>
-              <a:rPr lang="en-US" sz="2200" dirty="0">
-                <a:solidFill>
-                  <a:schemeClr val="bg2"/>
+              <a:rPr lang="en-US" sz="1800" b="1" dirty="0">
+                <a:solidFill>
+                  <a:schemeClr val="accent2"/>
                 </a:solidFill>
               </a:rPr>
-              <a:t>Lektion 2: tabell, diagram och rapport</a:t>
-            </a:r>
-            <a:endParaRPr lang="en-US" sz="2200" dirty="0"/>
+              <a:t>Rubriker och enheter. Medelvärde = summan delat med antalet värden.</a:t>
+            </a:r>
+            <a:endParaRPr lang="en-US" sz="1800" dirty="0"/>
+          </a:p>
+        </p:txBody>
+      </p:sp>
+      <p:sp>
+        <p:nvSpPr>
+          <p:cNvPr id="25" name="Slide Number Placeholder 0"/>
+          <p:cNvSpPr>
+            <a:spLocks noGrp="1"/>
+          </p:cNvSpPr>
+          <p:nvPr>
+            <p:ph type="sldNum" sz="quarter" idx="4294967295"/>
+          </p:nvPr>
+        </p:nvSpPr>
+        <p:spPr>
+          <a:xfrm>
+            <a:off x="11274552" y="6400800"/>
+            <a:ext cx="457200" cy="274320"/>
+          </a:xfrm>
+          <a:prstGeom prst="rect">
+            <a:avLst/>
+          </a:prstGeom>
+          <a:extLst>
+            <a:ext uri="{C572A759-6A51-4108-AA02-DFA0A04FC94B}">
+              <ma14:wrappingTextBoxFlag xmlns:ma14="http://schemas.microsoft.com/office/mac/drawingml/2011/main" val="0"/>
+            </a:ext>
+          </a:extLst>
+        </p:spPr>
+        <p:txBody>
+          <a:bodyPr/>
+          <a:lstStyle>
+            <a:lvl1pPr>
+              <a:defRPr sz="1100">
+                <a:solidFill>
+                  <a:schemeClr val="tx2"/>
+                </a:solidFill>
+              </a:defRPr>
+            </a:lvl1pPr>
+          </a:lstStyle>
+          <a:p>
+            <a:pPr algn="l"/>
+            <a:fld id="{F7021451-1387-4CA6-816F-3879F97B5CBC}" type="slidenum">
+              <a:rPr b="0" lang="en-US"/>
+              <a:t>9</a:t>
+            </a:fld>
+            <a:endParaRPr lang="en-US"/>
           </a:p>
         </p:txBody>
       </p:sp>

--- a/planering/biologi-omrade1/biologi-1-1-undersoka-systematiskt.pptx
+++ b/planering/biologi-omrade1/biologi-1-1-undersoka-systematiskt.pptx
@@ -125,12 +125,12 @@
   <p:extLst>
     <p:ext uri="{521415D9-36F7-43E2-AB2F-B90AF26B5E84}">
       <p14:sectionLst xmlns:p14="http://schemas.microsoft.com/office/powerpoint/2010/main">
-        <p14:section name="Start" id="{da025d6b-360a-00e4-9f30-4a38ad01a873}">
+        <p14:section name="Start" id="{8ce5faa9-02a6-032f-8c31-6c4a21a4d4b1}">
           <p14:sldIdLst>
             <p14:sldId id="256"/>
           </p14:sldIdLst>
         </p14:section>
-        <p14:section name="1.1.1 Från fråga till plan" id="{ee0f048c-be12-c50b-05de-146bd26d9a4e}">
+        <p14:section name="1.1.1 Från fråga till plan" id="{1efc4dd3-3391-3540-3b6e-c40f8b8121f8}">
           <p14:sldIdLst>
             <p14:sldId id="257"/>
             <p14:sldId id="258"/>
@@ -140,7 +140,7 @@
             <p14:sldId id="262"/>
           </p14:sldIdLst>
         </p14:section>
-        <p14:section name="1.1.2 Dokumentera" id="{78bb6a04-a91d-d713-4a9e-1cead7fd9dd8}">
+        <p14:section name="1.1.2 Dokumentera" id="{5312823a-217a-d734-380a-63a2699c739d}">
           <p14:sldIdLst>
             <p14:sldId id="263"/>
             <p14:sldId id="264"/>
@@ -149,7 +149,7 @@
             <p14:sldId id="267"/>
           </p14:sldIdLst>
         </p14:section>
-        <p14:section name="1.1.3 Värdera" id="{953a3836-ec6a-f4fa-20a8-226a865a3cb9}">
+        <p14:section name="1.1.3 Värdera" id="{bfcfa1cd-55b1-30ed-cc3d-1e0ff3305ae3}">
           <p14:sldIdLst>
             <p14:sldId id="268"/>
             <p14:sldId id="269"/>
@@ -157,7 +157,7 @@
             <p14:sldId id="271"/>
           </p14:sldIdLst>
         </p14:section>
-        <p14:section name="Labb 1.1 Reaktionstid" id="{fbb8e4b3-d7aa-601d-07a1-04c3cbd473cf}">
+        <p14:section name="Labb 1.1 Reaktionstid" id="{6381e560-0fdd-27ad-162f-c1a86410f16f}">
           <p14:sldIdLst>
             <p14:sldId id="272"/>
             <p14:sldId id="273"/>
@@ -5216,7 +5216,7 @@
                             <a:schemeClr val="tx1"/>
                           </a:solidFill>
                         </a:rPr>
-                        <a:t>En fläkt blåser på en av lådorna.</a:t>
+                        <a:t>Man läser av linjalen lite olika varje gång.</a:t>
                       </a:r>
                       <a:endParaRPr lang="en-US" sz="2000" dirty="0"/>
                     </a:p>

--- a/planering/biologi-omrade1/biologi-1-1-undersoka-systematiskt.pptx
+++ b/planering/biologi-omrade1/biologi-1-1-undersoka-systematiskt.pptx
@@ -125,12 +125,12 @@
   <p:extLst>
     <p:ext uri="{521415D9-36F7-43E2-AB2F-B90AF26B5E84}">
       <p14:sectionLst xmlns:p14="http://schemas.microsoft.com/office/powerpoint/2010/main">
-        <p14:section name="Start" id="{8ce5faa9-02a6-032f-8c31-6c4a21a4d4b1}">
+        <p14:section name="Start" id="{ff109ec8-98d7-65a6-97ef-e6e2ebd890e8}">
           <p14:sldIdLst>
             <p14:sldId id="256"/>
           </p14:sldIdLst>
         </p14:section>
-        <p14:section name="1.1.1 Från fråga till plan" id="{1efc4dd3-3391-3540-3b6e-c40f8b8121f8}">
+        <p14:section name="1.1.1 Från fråga till plan" id="{c4303ff4-cf0d-5795-4dbb-2c59499737f1}">
           <p14:sldIdLst>
             <p14:sldId id="257"/>
             <p14:sldId id="258"/>
@@ -140,7 +140,7 @@
             <p14:sldId id="262"/>
           </p14:sldIdLst>
         </p14:section>
-        <p14:section name="1.1.2 Dokumentera" id="{5312823a-217a-d734-380a-63a2699c739d}">
+        <p14:section name="1.1.2 Dokumentera" id="{a07633d3-1ed1-11e4-cb6b-6bf7ac3d76a5}">
           <p14:sldIdLst>
             <p14:sldId id="263"/>
             <p14:sldId id="264"/>
@@ -149,7 +149,7 @@
             <p14:sldId id="267"/>
           </p14:sldIdLst>
         </p14:section>
-        <p14:section name="1.1.3 Värdera" id="{bfcfa1cd-55b1-30ed-cc3d-1e0ff3305ae3}">
+        <p14:section name="1.1.3 Värdera" id="{1a951b92-c9f0-0d02-e6f3-41e523f08227}">
           <p14:sldIdLst>
             <p14:sldId id="268"/>
             <p14:sldId id="269"/>
@@ -157,7 +157,7 @@
             <p14:sldId id="271"/>
           </p14:sldIdLst>
         </p14:section>
-        <p14:section name="Labb 1.1 Reaktionstid" id="{6381e560-0fdd-27ad-162f-c1a86410f16f}">
+        <p14:section name="Labb 1.1 Reaktionstid" id="{0a757339-7ac4-e5d8-8f6a-921a2c29a8d3}">
           <p14:sldIdLst>
             <p14:sldId id="272"/>
             <p14:sldId id="273"/>
@@ -199,7 +199,7 @@
                 </a:solidFill>
                 <a:latin typeface="+mn-lt"/>
               </a:rPr>
-              <a:t>Krassens höjd (mm) över tid</a:t>
+              <a:t>Krassens höjd (mm) över tid, påhittade värden</a:t>
             </a:r>
           </a:p>
         </c:rich>
@@ -11087,7 +11087,7 @@
                   <a:schemeClr val="accent2"/>
                 </a:solidFill>
               </a:rPr>
-              <a:t>Rubriker och enheter. Medelvärde = summan delat med antalet värden.</a:t>
+              <a:t>Påhittade exempelvärden. Rubriker och enheter. Medelvärde = summan delat med antalet värden.</a:t>
             </a:r>
             <a:endParaRPr lang="en-US" sz="1800" dirty="0"/>
           </a:p>

--- a/planering/biologi-omrade1/biologi-1-1-undersoka-systematiskt.pptx
+++ b/planering/biologi-omrade1/biologi-1-1-undersoka-systematiskt.pptx
@@ -125,12 +125,12 @@
   <p:extLst>
     <p:ext uri="{521415D9-36F7-43E2-AB2F-B90AF26B5E84}">
       <p14:sectionLst xmlns:p14="http://schemas.microsoft.com/office/powerpoint/2010/main">
-        <p14:section name="Start" id="{ff109ec8-98d7-65a6-97ef-e6e2ebd890e8}">
+        <p14:section name="Start" id="{581ebf1d-df38-e0d9-489b-b503e17848b7}">
           <p14:sldIdLst>
             <p14:sldId id="256"/>
           </p14:sldIdLst>
         </p14:section>
-        <p14:section name="1.1.1 Från fråga till plan" id="{c4303ff4-cf0d-5795-4dbb-2c59499737f1}">
+        <p14:section name="Från fråga till plan" id="{36e2a145-3934-418d-89a3-ac1d49389062}">
           <p14:sldIdLst>
             <p14:sldId id="257"/>
             <p14:sldId id="258"/>
@@ -140,7 +140,7 @@
             <p14:sldId id="262"/>
           </p14:sldIdLst>
         </p14:section>
-        <p14:section name="1.1.2 Dokumentera" id="{a07633d3-1ed1-11e4-cb6b-6bf7ac3d76a5}">
+        <p14:section name="Dokumentera" id="{b75b980f-a7dc-1fff-d95a-a21158b95a54}">
           <p14:sldIdLst>
             <p14:sldId id="263"/>
             <p14:sldId id="264"/>
@@ -149,7 +149,7 @@
             <p14:sldId id="267"/>
           </p14:sldIdLst>
         </p14:section>
-        <p14:section name="1.1.3 Värdera" id="{1a951b92-c9f0-0d02-e6f3-41e523f08227}">
+        <p14:section name="Värdera" id="{6c3ffb0e-8647-7293-ae3d-ba3f763d5a28}">
           <p14:sldIdLst>
             <p14:sldId id="268"/>
             <p14:sldId id="269"/>
@@ -157,7 +157,7 @@
             <p14:sldId id="271"/>
           </p14:sldIdLst>
         </p14:section>
-        <p14:section name="Labb 1.1 Reaktionstid" id="{0a757339-7ac4-e5d8-8f6a-921a2c29a8d3}">
+        <p14:section name="Labb 1.1 Reaktionstid" id="{f56c97b4-201e-74a3-f588-ceb601bb4c58}">
           <p14:sldIdLst>
             <p14:sldId id="272"/>
             <p14:sldId id="273"/>
@@ -3487,7 +3487,7 @@
                   <a:schemeClr val="bg2"/>
                 </a:solidFill>
               </a:rPr>
-              <a:t>Lektion 1.1.1 Från fråga till plan · 1.1.2 Dokumentera · 1.1.3 Värdera · Labb 1.1 Reaktionstid</a:t>
+              <a:t>Lektion Från fråga till plan · Dokumentera · Värdera · Labb 1.1 Reaktionstid</a:t>
             </a:r>
             <a:endParaRPr lang="en-US" sz="1600" dirty="0"/>
           </a:p>
@@ -4552,7 +4552,7 @@
                   <a:schemeClr val="tx2"/>
                 </a:solidFill>
               </a:rPr>
-              <a:t>Kolla dig själv: 1.1.2</a:t>
+              <a:t>Kolla dig själv</a:t>
             </a:r>
             <a:endParaRPr lang="en-US" sz="3600" dirty="0"/>
           </a:p>
@@ -4821,7 +4821,7 @@
                   <a:schemeClr val="bg1"/>
                 </a:solidFill>
               </a:rPr>
-              <a:t>1.1.3 Värdera</a:t>
+              <a:t>Värdera</a:t>
             </a:r>
             <a:endParaRPr lang="en-US" sz="4400" dirty="0"/>
           </a:p>
@@ -6276,7 +6276,7 @@
                   <a:schemeClr val="tx2"/>
                 </a:solidFill>
               </a:rPr>
-              <a:t>Kolla dig själv: 1.1.3</a:t>
+              <a:t>Kolla dig själv</a:t>
             </a:r>
             <a:endParaRPr lang="en-US" sz="3600" dirty="0"/>
           </a:p>
@@ -7909,7 +7909,7 @@
                   <a:schemeClr val="bg1"/>
                 </a:solidFill>
               </a:rPr>
-              <a:t>1.1.1 Från fråga till plan</a:t>
+              <a:t>Från fråga till plan</a:t>
             </a:r>
             <a:endParaRPr lang="en-US" sz="4400" dirty="0"/>
           </a:p>
@@ -9725,7 +9725,7 @@
                   <a:schemeClr val="tx2"/>
                 </a:solidFill>
               </a:rPr>
-              <a:t>Kolla dig själv: 1.1.1</a:t>
+              <a:t>Kolla dig själv</a:t>
             </a:r>
             <a:endParaRPr lang="en-US" sz="3600" dirty="0"/>
           </a:p>
@@ -9994,7 +9994,7 @@
                   <a:schemeClr val="bg1"/>
                 </a:solidFill>
               </a:rPr>
-              <a:t>1.1.2 Dokumentera</a:t>
+              <a:t>Dokumentera</a:t>
             </a:r>
             <a:endParaRPr lang="en-US" sz="4400" dirty="0"/>
           </a:p>

--- a/planering/biologi-omrade1/biologi-1-1-undersoka-systematiskt.pptx
+++ b/planering/biologi-omrade1/biologi-1-1-undersoka-systematiskt.pptx
@@ -125,12 +125,12 @@
   <p:extLst>
     <p:ext uri="{521415D9-36F7-43E2-AB2F-B90AF26B5E84}">
       <p14:sectionLst xmlns:p14="http://schemas.microsoft.com/office/powerpoint/2010/main">
-        <p14:section name="Start" id="{581ebf1d-df38-e0d9-489b-b503e17848b7}">
+        <p14:section name="Start" id="{688f8c7e-c5c9-3210-1208-c9a4933b72c9}">
           <p14:sldIdLst>
             <p14:sldId id="256"/>
           </p14:sldIdLst>
         </p14:section>
-        <p14:section name="Från fråga till plan" id="{36e2a145-3934-418d-89a3-ac1d49389062}">
+        <p14:section name="Från fråga till plan" id="{84e09d48-fbfb-c571-b605-5f212abf7c2e}">
           <p14:sldIdLst>
             <p14:sldId id="257"/>
             <p14:sldId id="258"/>
@@ -140,7 +140,7 @@
             <p14:sldId id="262"/>
           </p14:sldIdLst>
         </p14:section>
-        <p14:section name="Dokumentera" id="{b75b980f-a7dc-1fff-d95a-a21158b95a54}">
+        <p14:section name="Dokumentera" id="{091acb86-69db-a7b5-8c21-202059962529}">
           <p14:sldIdLst>
             <p14:sldId id="263"/>
             <p14:sldId id="264"/>
@@ -149,7 +149,7 @@
             <p14:sldId id="267"/>
           </p14:sldIdLst>
         </p14:section>
-        <p14:section name="Värdera" id="{6c3ffb0e-8647-7293-ae3d-ba3f763d5a28}">
+        <p14:section name="Värdera" id="{0f783f09-a470-c68a-e4ef-25dfadda85af}">
           <p14:sldIdLst>
             <p14:sldId id="268"/>
             <p14:sldId id="269"/>
@@ -157,7 +157,7 @@
             <p14:sldId id="271"/>
           </p14:sldIdLst>
         </p14:section>
-        <p14:section name="Labb 1.1 Reaktionstid" id="{f56c97b4-201e-74a3-f588-ceb601bb4c58}">
+        <p14:section name="Labb 1.1 Reaktionstid" id="{c1d25501-2399-0c6c-c2e6-394c1ff280f6}">
           <p14:sldIdLst>
             <p14:sldId id="272"/>
             <p14:sldId id="273"/>
@@ -1409,7 +1409,7 @@
           <a:p>
             <a:r>
               <a:rPr lang="en-US" dirty="0"/>
-              <a:t>Ca 50 min.</a:t>
+              <a:t/>
             </a:r>
             <a:endParaRPr lang="en-US" dirty="0"/>
           </a:p>
@@ -2025,7 +2025,7 @@
           <a:p>
             <a:r>
               <a:rPr lang="en-US" dirty="0"/>
-              <a:t>Ca 50 min. Börja med att fråga: Vad är biologi? Vilka sorters biologer känner ni till?</a:t>
+              <a:t>Börja med att fråga: Vad är biologi? Vilka sorters biologer känner ni till?</a:t>
             </a:r>
             <a:endParaRPr lang="en-US" dirty="0"/>
           </a:p>
@@ -2553,7 +2553,7 @@
           <a:p>
             <a:r>
               <a:rPr lang="en-US" dirty="0"/>
-              <a:t>Ca 50 min.</a:t>
+              <a:t/>
             </a:r>
             <a:endParaRPr lang="en-US" dirty="0"/>
           </a:p>
@@ -4791,7 +4791,7 @@
       </p:grpSpPr>
       <p:sp>
         <p:nvSpPr>
-          <p:cNvPr id="3" name="Text 0"/>
+          <p:cNvPr id="2" name="Text 0"/>
           <p:cNvSpPr/>
           <p:nvPr>
             <p:ph idx="100" type="title" hasCustomPrompt="1"/>
@@ -4829,7 +4829,7 @@
       </p:sp>
       <p:sp>
         <p:nvSpPr>
-          <p:cNvPr id="4" name="Text 0"/>
+          <p:cNvPr id="3" name="Text 0"/>
           <p:cNvSpPr/>
           <p:nvPr>
             <p:ph idx="101" type="body" hasCustomPrompt="1"/>
@@ -6583,7 +6583,7 @@
                   <a:schemeClr val="bg2"/>
                 </a:solidFill>
               </a:rPr>
-              <a:t>Ca 45 min: planera och genomför ett rättvist försök</a:t>
+              <a:t>Planera och genomför ett rättvist försök</a:t>
             </a:r>
             <a:endParaRPr lang="en-US" sz="2200" dirty="0"/>
           </a:p>
@@ -9964,7 +9964,7 @@
       </p:grpSpPr>
       <p:sp>
         <p:nvSpPr>
-          <p:cNvPr id="3" name="Text 0"/>
+          <p:cNvPr id="2" name="Text 0"/>
           <p:cNvSpPr/>
           <p:nvPr>
             <p:ph idx="100" type="title" hasCustomPrompt="1"/>
@@ -10002,7 +10002,7 @@
       </p:sp>
       <p:sp>
         <p:nvSpPr>
-          <p:cNvPr id="4" name="Text 0"/>
+          <p:cNvPr id="3" name="Text 0"/>
           <p:cNvSpPr/>
           <p:nvPr>
             <p:ph idx="101" type="body" hasCustomPrompt="1"/>
